--- a/static/ppts/G6_Math_T4_Sequences.pptx
+++ b/static/ppts/G6_Math_T4_Sequences.pptx
@@ -9,9 +9,10 @@
     <p:sldId id="257" r:id="rId3"/>
     <p:sldId id="258" r:id="rId4"/>
     <p:sldId id="259" r:id="rId5"/>
+    <p:sldId id="260" r:id="rId6"/>
   </p:sldIdLst>
   <p:notesMasterIdLst>
-    <p:notesMasterId r:id="rId6"/>
+    <p:notesMasterId r:id="rId7"/>
   </p:notesMasterIdLst>
   <p:sldSz cx="9144000" cy="5143500"/>
   <p:notesSz cx="5143500" cy="9144000"/>
@@ -811,6 +812,94 @@
 </p:notes>
 </file>
 
+<file path=ppt/notesSlides/notesSlide5.xml><?xml version="1.0" encoding="utf-8"?>
+<p:notes xmlns:a="http://schemas.openxmlformats.org/drawingml/2006/main" xmlns:r="http://schemas.openxmlformats.org/officeDocument/2006/relationships" xmlns:p="http://schemas.openxmlformats.org/presentationml/2006/main">
+  <p:cSld>
+    <p:spTree>
+      <p:nvGrpSpPr>
+        <p:cNvPr id="1" name=""/>
+        <p:cNvGrpSpPr/>
+        <p:nvPr/>
+      </p:nvGrpSpPr>
+      <p:grpSpPr>
+        <a:xfrm>
+          <a:off x="0" y="0"/>
+          <a:ext cx="0" cy="0"/>
+          <a:chOff x="0" y="0"/>
+          <a:chExt cx="0" cy="0"/>
+        </a:xfrm>
+      </p:grpSpPr>
+      <p:sp>
+        <p:nvSpPr>
+          <p:cNvPr id="2" name="Slide Image Placeholder 1"/>
+          <p:cNvSpPr>
+            <a:spLocks noGrp="1" noRot="1" noChangeAspect="1"/>
+          </p:cNvSpPr>
+          <p:nvPr>
+            <p:ph type="sldImg"/>
+          </p:nvPr>
+        </p:nvSpPr>
+        <p:spPr/>
+      </p:sp>
+      <p:sp>
+        <p:nvSpPr>
+          <p:cNvPr id="3" name="Notes Placeholder 2"/>
+          <p:cNvSpPr>
+            <a:spLocks noGrp="1"/>
+          </p:cNvSpPr>
+          <p:nvPr>
+            <p:ph type="body" idx="1"/>
+          </p:nvPr>
+        </p:nvSpPr>
+        <p:spPr/>
+        <p:txBody>
+          <a:bodyPr/>
+          <a:lstStyle/>
+          <a:p>
+            <a:r>
+              <a:rPr lang="en-US" dirty="0"/>
+              <a:t/>
+            </a:r>
+            <a:endParaRPr lang="en-US" dirty="0"/>
+          </a:p>
+        </p:txBody>
+      </p:sp>
+      <p:sp>
+        <p:nvSpPr>
+          <p:cNvPr id="4" name="Slide Number Placeholder 3"/>
+          <p:cNvSpPr>
+            <a:spLocks noGrp="1"/>
+          </p:cNvSpPr>
+          <p:nvPr>
+            <p:ph type="sldNum" sz="quarter" idx="10"/>
+          </p:nvPr>
+        </p:nvSpPr>
+        <p:spPr/>
+        <p:txBody>
+          <a:bodyPr/>
+          <a:lstStyle/>
+          <a:p>
+            <a:fld id="{F7021451-1387-4CA6-816F-3879F97B5CBC}" type="slidenum">
+              <a:rPr lang="en-US"/>
+              <a:t>5</a:t>
+            </a:fld>
+            <a:endParaRPr lang="en-US"/>
+          </a:p>
+        </p:txBody>
+      </p:sp>
+    </p:spTree>
+    <p:extLst>
+      <p:ext uri="{BB962C8B-B14F-4D97-AF65-F5344CB8AC3E}">
+        <p14:creationId xmlns:p14="http://schemas.microsoft.com/office/powerpoint/2010/main" val="1024086991"/>
+      </p:ext>
+    </p:extLst>
+  </p:cSld>
+  <p:clrMapOvr>
+    <a:masterClrMapping/>
+  </p:clrMapOvr>
+</p:notes>
+</file>
+
 <file path=ppt/slideLayouts/slideLayout1.xml><?xml version="1.0" encoding="utf-8"?>
 <p:sldLayout xmlns:a="http://schemas.openxmlformats.org/drawingml/2006/main" xmlns:r="http://schemas.openxmlformats.org/officeDocument/2006/relationships" xmlns:p="http://schemas.openxmlformats.org/presentationml/2006/main" preserve="1">
   <p:cSld name="DEFAULT">
@@ -1170,7 +1259,7 @@
         </p:nvSpPr>
         <p:spPr>
           <a:xfrm>
-            <a:off x="731520" y="1280160"/>
+            <a:off x="731520" y="1097280"/>
             <a:ext cx="7772400" cy="1371600"/>
           </a:xfrm>
           <a:prstGeom prst="rect">
@@ -1187,7 +1276,7 @@
               <a:buNone/>
             </a:pPr>
             <a:r>
-              <a:rPr lang="en-US" sz="3600" b="1" dirty="0">
+              <a:rPr lang="en-US" sz="4000" b="1" dirty="0">
                 <a:solidFill>
                   <a:srgbClr val="FFFFFF"/>
                 </a:solidFill>
@@ -1197,7 +1286,7 @@
               </a:rPr>
               <a:t>Number Sequences &amp; Patterns</a:t>
             </a:r>
-            <a:endParaRPr lang="en-US" sz="3600" dirty="0"/>
+            <a:endParaRPr lang="en-US" sz="4000" dirty="0"/>
           </a:p>
         </p:txBody>
       </p:sp>
@@ -1209,7 +1298,7 @@
         </p:nvSpPr>
         <p:spPr>
           <a:xfrm>
-            <a:off x="731520" y="2743200"/>
+            <a:off x="731520" y="2560320"/>
             <a:ext cx="7772400" cy="548640"/>
           </a:xfrm>
           <a:prstGeom prst="rect">
@@ -1228,13 +1317,13 @@
             <a:r>
               <a:rPr lang="en-US" sz="1600" dirty="0">
                 <a:solidFill>
-                  <a:srgbClr val="9B9690"/>
+                  <a:srgbClr val="E9C46A"/>
                 </a:solidFill>
                 <a:latin typeface="Calibri" pitchFamily="34" charset="0"/>
                 <a:ea typeface="Calibri" pitchFamily="34" charset="-122"/>
                 <a:cs typeface="Calibri" pitchFamily="34" charset="-120"/>
               </a:rPr>
-              <a:t>G6 Maths · Algebra</a:t>
+              <a:t>Grade 6 Mathematics · Mr Zocchi</a:t>
             </a:r>
             <a:endParaRPr lang="en-US" sz="1600" dirty="0"/>
           </a:p>
@@ -1242,14 +1331,36 @@
       </p:sp>
       <p:sp>
         <p:nvSpPr>
-          <p:cNvPr id="5" name="Text 3"/>
+          <p:cNvPr id="5" name="Shape 3"/>
           <p:cNvSpPr/>
           <p:nvPr/>
         </p:nvSpPr>
         <p:spPr>
           <a:xfrm>
-            <a:off x="731520" y="4389120"/>
-            <a:ext cx="7772400" cy="457200"/>
+            <a:off x="731520" y="3474720"/>
+            <a:ext cx="2011680" cy="411480"/>
+          </a:xfrm>
+          <a:prstGeom prst="roundRect">
+            <a:avLst>
+              <a:gd name="adj" fmla="val 17778"/>
+            </a:avLst>
+          </a:prstGeom>
+          <a:solidFill>
+            <a:srgbClr val="2A9D8F"/>
+          </a:solidFill>
+          <a:ln/>
+        </p:spPr>
+      </p:sp>
+      <p:sp>
+        <p:nvSpPr>
+          <p:cNvPr id="6" name="Text 4"/>
+          <p:cNvSpPr/>
+          <p:nvPr/>
+        </p:nvSpPr>
+        <p:spPr>
+          <a:xfrm>
+            <a:off x="731520" y="3474720"/>
+            <a:ext cx="2011680" cy="411480"/>
           </a:xfrm>
           <a:prstGeom prst="rect">
             <a:avLst/>
@@ -1261,21 +1372,21 @@
           <a:bodyPr wrap="square" rtlCol="0" anchor="ctr"/>
           <a:lstStyle/>
           <a:p>
-            <a:pPr indent="0" marL="0">
+            <a:pPr algn="ctr" indent="0" marL="0">
               <a:buNone/>
             </a:pPr>
             <a:r>
-              <a:rPr lang="en-US" sz="1000" dirty="0">
-                <a:solidFill>
-                  <a:srgbClr val="6B6660"/>
+              <a:rPr lang="en-US" sz="1200" b="1" dirty="0">
+                <a:solidFill>
+                  <a:srgbClr val="FFFFFF"/>
                 </a:solidFill>
                 <a:latin typeface="Calibri" pitchFamily="34" charset="0"/>
                 <a:ea typeface="Calibri" pitchFamily="34" charset="-122"/>
                 <a:cs typeface="Calibri" pitchFamily="34" charset="-120"/>
               </a:rPr>
-              <a:t>Mr Zocchi · mrzocchi.com</a:t>
-            </a:r>
-            <a:endParaRPr lang="en-US" sz="1000" dirty="0"/>
+              <a:t>Term 4 · Algebra</a:t>
+            </a:r>
+            <a:endParaRPr lang="en-US" sz="1200" dirty="0"/>
           </a:p>
         </p:txBody>
       </p:sp>
@@ -1293,7 +1404,7 @@
     <p:bg>
       <p:bgPr>
         <a:solidFill>
-          <a:srgbClr val="FFFFFF"/>
+          <a:srgbClr val="FAF8F5"/>
         </a:solidFill>
       </p:bgPr>
     </p:bg>
@@ -1339,8 +1450,8 @@
         </p:nvSpPr>
         <p:spPr>
           <a:xfrm>
-            <a:off x="548640" y="274320"/>
-            <a:ext cx="8046720" cy="640080"/>
+            <a:off x="7772400" y="4709160"/>
+            <a:ext cx="1097280" cy="320040"/>
           </a:xfrm>
           <a:prstGeom prst="rect">
             <a:avLst/>
@@ -1349,14 +1460,105 @@
           <a:ln/>
         </p:spPr>
         <p:txBody>
-          <a:bodyPr wrap="square" lIns="0" tIns="0" rIns="0" bIns="0" rtlCol="0" anchor="ctr"/>
+          <a:bodyPr wrap="square" rtlCol="0" anchor="ctr"/>
+          <a:lstStyle/>
+          <a:p>
+            <a:pPr algn="r" indent="0" marL="0">
+              <a:buNone/>
+            </a:pPr>
+            <a:r>
+              <a:rPr lang="en-US" sz="900" dirty="0">
+                <a:solidFill>
+                  <a:srgbClr val="6B6660"/>
+                </a:solidFill>
+                <a:latin typeface="Calibri" pitchFamily="34" charset="0"/>
+                <a:ea typeface="Calibri" pitchFamily="34" charset="-122"/>
+                <a:cs typeface="Calibri" pitchFamily="34" charset="-120"/>
+              </a:rPr>
+              <a:t>2 / 5</a:t>
+            </a:r>
+            <a:endParaRPr lang="en-US" sz="900" dirty="0"/>
+          </a:p>
+        </p:txBody>
+      </p:sp>
+      <p:sp>
+        <p:nvSpPr>
+          <p:cNvPr id="4" name="Shape 2"/>
+          <p:cNvSpPr/>
+          <p:nvPr/>
+        </p:nvSpPr>
+        <p:spPr>
+          <a:xfrm>
+            <a:off x="1371600" y="914400"/>
+            <a:ext cx="6400800" cy="3200400"/>
+          </a:xfrm>
+          <a:prstGeom prst="rect">
+            <a:avLst/>
+          </a:prstGeom>
+          <a:solidFill>
+            <a:srgbClr val="FFFFFF"/>
+          </a:solidFill>
+          <a:ln w="12700">
+            <a:solidFill>
+              <a:srgbClr val="E5E2DC"/>
+            </a:solidFill>
+            <a:prstDash val="solid"/>
+          </a:ln>
+          <a:effectLst>
+            <a:outerShdw sx="100000" sy="100000" kx="0" ky="0" algn="bl" rotWithShape="0" blurRad="50800" dist="25400" dir="8100000">
+              <a:srgbClr val="000000">
+                <a:alpha val="10000"/>
+              </a:srgbClr>
+            </a:outerShdw>
+          </a:effectLst>
+        </p:spPr>
+      </p:sp>
+      <p:sp>
+        <p:nvSpPr>
+          <p:cNvPr id="5" name="Shape 3"/>
+          <p:cNvSpPr/>
+          <p:nvPr/>
+        </p:nvSpPr>
+        <p:spPr>
+          <a:xfrm>
+            <a:off x="1371600" y="914400"/>
+            <a:ext cx="91440" cy="3200400"/>
+          </a:xfrm>
+          <a:prstGeom prst="rect">
+            <a:avLst/>
+          </a:prstGeom>
+          <a:solidFill>
+            <a:srgbClr val="2A9D8F"/>
+          </a:solidFill>
+          <a:ln/>
+        </p:spPr>
+      </p:sp>
+      <p:sp>
+        <p:nvSpPr>
+          <p:cNvPr id="6" name="Text 4"/>
+          <p:cNvSpPr/>
+          <p:nvPr/>
+        </p:nvSpPr>
+        <p:spPr>
+          <a:xfrm>
+            <a:off x="1828800" y="1097280"/>
+            <a:ext cx="5669280" cy="640080"/>
+          </a:xfrm>
+          <a:prstGeom prst="rect">
+            <a:avLst/>
+          </a:prstGeom>
+          <a:noFill/>
+          <a:ln/>
+        </p:spPr>
+        <p:txBody>
+          <a:bodyPr wrap="square" rtlCol="0" anchor="ctr"/>
           <a:lstStyle/>
           <a:p>
             <a:pPr indent="0" marL="0">
               <a:buNone/>
             </a:pPr>
             <a:r>
-              <a:rPr lang="en-US" sz="2600" b="1" dirty="0">
+              <a:rPr lang="en-US" sz="2400" b="1" dirty="0">
                 <a:solidFill>
                   <a:srgbClr val="1B2A4A"/>
                 </a:solidFill>
@@ -1364,22 +1566,22 @@
                 <a:ea typeface="Georgia" pitchFamily="34" charset="-122"/>
                 <a:cs typeface="Georgia" pitchFamily="34" charset="-120"/>
               </a:rPr>
-              <a:t>What is a Sequence?</a:t>
-            </a:r>
-            <a:endParaRPr lang="en-US" sz="2600" dirty="0"/>
-          </a:p>
-        </p:txBody>
-      </p:sp>
-      <p:sp>
-        <p:nvSpPr>
-          <p:cNvPr id="4" name="Text 2"/>
+              <a:t>Patterns in Numbers</a:t>
+            </a:r>
+            <a:endParaRPr lang="en-US" sz="2400" dirty="0"/>
+          </a:p>
+        </p:txBody>
+      </p:sp>
+      <p:sp>
+        <p:nvSpPr>
+          <p:cNvPr id="7" name="Text 5"/>
           <p:cNvSpPr/>
           <p:nvPr/>
         </p:nvSpPr>
         <p:spPr>
           <a:xfrm>
-            <a:off x="548640" y="1097280"/>
-            <a:ext cx="8046720" cy="3474720"/>
+            <a:off x="1828800" y="1828800"/>
+            <a:ext cx="5669280" cy="2011680"/>
           </a:xfrm>
           <a:prstGeom prst="rect">
             <a:avLst/>
@@ -1391,12 +1593,11 @@
           <a:bodyPr wrap="square" rtlCol="0" anchor="t"/>
           <a:lstStyle/>
           <a:p>
-            <a:pPr marL="342900" indent="-342900">
-              <a:spcAft>
-                <a:spcPts val="800"/>
-              </a:spcAft>
-              <a:buSzPct val="100000"/>
-              <a:buChar char="•"/>
+            <a:pPr indent="0" marL="0">
+              <a:lnSpc>
+                <a:spcPct val="130000"/>
+              </a:lnSpc>
+              <a:buNone/>
             </a:pPr>
             <a:r>
               <a:rPr lang="en-US" sz="1500" dirty="0">
@@ -1407,150 +1608,9 @@
                 <a:ea typeface="Calibri" pitchFamily="34" charset="-122"/>
                 <a:cs typeface="Calibri" pitchFamily="34" charset="-120"/>
               </a:rPr>
-              <a:t>An ordered list of numbers following a RULE</a:t>
+              <a:t>A sequence is a list of numbers that follows a pattern. The pattern is described by a rule — either a term-to-term rule (how to get from one term to the next) or a position-to-term rule (a formula using the term number). Finding and describing patterns is a key skill in algebra.</a:t>
             </a:r>
             <a:endParaRPr lang="en-US" sz="1500" dirty="0"/>
-          </a:p>
-          <a:p>
-            <a:pPr marL="342900" indent="-342900">
-              <a:spcAft>
-                <a:spcPts val="800"/>
-              </a:spcAft>
-              <a:buSzPct val="100000"/>
-              <a:buChar char="•"/>
-            </a:pPr>
-            <a:r>
-              <a:rPr lang="en-US" sz="1500" dirty="0">
-                <a:solidFill>
-                  <a:srgbClr val="3D3A36"/>
-                </a:solidFill>
-                <a:latin typeface="Calibri" pitchFamily="34" charset="0"/>
-                <a:ea typeface="Calibri" pitchFamily="34" charset="-122"/>
-                <a:cs typeface="Calibri" pitchFamily="34" charset="-120"/>
-              </a:rPr>
-              <a:t>Each number in the sequence is called a TERM</a:t>
-            </a:r>
-            <a:endParaRPr lang="en-US" sz="1500" dirty="0"/>
-          </a:p>
-          <a:p>
-            <a:pPr marL="342900" indent="-342900">
-              <a:spcAft>
-                <a:spcPts val="800"/>
-              </a:spcAft>
-              <a:buSzPct val="100000"/>
-              <a:buChar char="•"/>
-            </a:pPr>
-            <a:r>
-              <a:rPr lang="en-US" sz="1500" dirty="0">
-                <a:solidFill>
-                  <a:srgbClr val="3D3A36"/>
-                </a:solidFill>
-                <a:latin typeface="Calibri" pitchFamily="34" charset="0"/>
-                <a:ea typeface="Calibri" pitchFamily="34" charset="-122"/>
-                <a:cs typeface="Calibri" pitchFamily="34" charset="-120"/>
-              </a:rPr>
-              <a:t>Common difference: how much you add/subtract each time</a:t>
-            </a:r>
-            <a:endParaRPr lang="en-US" sz="1500" dirty="0"/>
-          </a:p>
-          <a:p>
-            <a:pPr marL="342900" indent="-342900">
-              <a:spcAft>
-                <a:spcPts val="800"/>
-              </a:spcAft>
-              <a:buSzPct val="100000"/>
-              <a:buChar char="•"/>
-            </a:pPr>
-            <a:r>
-              <a:rPr lang="en-US" sz="1500" dirty="0">
-                <a:solidFill>
-                  <a:srgbClr val="3D3A36"/>
-                </a:solidFill>
-                <a:latin typeface="Calibri" pitchFamily="34" charset="0"/>
-                <a:ea typeface="Calibri" pitchFamily="34" charset="-122"/>
-                <a:cs typeface="Calibri" pitchFamily="34" charset="-120"/>
-              </a:rPr>
-              <a:t>Arithmetic sequence: same amount added each time</a:t>
-            </a:r>
-            <a:endParaRPr lang="en-US" sz="1500" dirty="0"/>
-          </a:p>
-          <a:p>
-            <a:pPr marL="342900" indent="-342900">
-              <a:spcAft>
-                <a:spcPts val="800"/>
-              </a:spcAft>
-              <a:buSzPct val="100000"/>
-              <a:buChar char="•"/>
-            </a:pPr>
-            <a:r>
-              <a:rPr lang="en-US" sz="1500" dirty="0">
-                <a:solidFill>
-                  <a:srgbClr val="3D3A36"/>
-                </a:solidFill>
-                <a:latin typeface="Calibri" pitchFamily="34" charset="0"/>
-                <a:ea typeface="Calibri" pitchFamily="34" charset="-122"/>
-                <a:cs typeface="Calibri" pitchFamily="34" charset="-120"/>
-              </a:rPr>
-              <a:t>Term-to-term rule: how to get from one term to the next</a:t>
-            </a:r>
-            <a:endParaRPr lang="en-US" sz="1500" dirty="0"/>
-          </a:p>
-          <a:p>
-            <a:pPr marL="342900" indent="-342900">
-              <a:spcAft>
-                <a:spcPts val="800"/>
-              </a:spcAft>
-              <a:buSzPct val="100000"/>
-              <a:buChar char="•"/>
-            </a:pPr>
-            <a:r>
-              <a:rPr lang="en-US" sz="1500" dirty="0">
-                <a:solidFill>
-                  <a:srgbClr val="3D3A36"/>
-                </a:solidFill>
-                <a:latin typeface="Calibri" pitchFamily="34" charset="0"/>
-                <a:ea typeface="Calibri" pitchFamily="34" charset="-122"/>
-                <a:cs typeface="Calibri" pitchFamily="34" charset="-120"/>
-              </a:rPr>
-              <a:t>Position-to-term rule: formula using the position number (nth term)</a:t>
-            </a:r>
-            <a:endParaRPr lang="en-US" sz="1500" dirty="0"/>
-          </a:p>
-        </p:txBody>
-      </p:sp>
-      <p:sp>
-        <p:nvSpPr>
-          <p:cNvPr id="5" name="Text 3"/>
-          <p:cNvSpPr/>
-          <p:nvPr/>
-        </p:nvSpPr>
-        <p:spPr>
-          <a:xfrm>
-            <a:off x="548640" y="4800600"/>
-            <a:ext cx="3657600" cy="274320"/>
-          </a:xfrm>
-          <a:prstGeom prst="rect">
-            <a:avLst/>
-          </a:prstGeom>
-          <a:noFill/>
-          <a:ln/>
-        </p:spPr>
-        <p:txBody>
-          <a:bodyPr wrap="square" rtlCol="0" anchor="ctr"/>
-          <a:lstStyle/>
-          <a:p>
-            <a:pPr indent="0" marL="0">
-              <a:buNone/>
-            </a:pPr>
-            <a:r>
-              <a:rPr lang="en-US" sz="800" dirty="0">
-                <a:solidFill>
-                  <a:srgbClr val="9B9690"/>
-                </a:solidFill>
-              </a:rPr>
-              <a:t>mrzocchi.com</a:t>
-            </a:r>
-            <a:endParaRPr lang="en-US" sz="800" dirty="0"/>
           </a:p>
         </p:txBody>
       </p:sp>
@@ -1568,7 +1628,7 @@
     <p:bg>
       <p:bgPr>
         <a:solidFill>
-          <a:srgbClr val="FFFFFF"/>
+          <a:srgbClr val="FAF8F5"/>
         </a:solidFill>
       </p:bgPr>
     </p:bg>
@@ -1614,8 +1674,8 @@
         </p:nvSpPr>
         <p:spPr>
           <a:xfrm>
-            <a:off x="548640" y="274320"/>
-            <a:ext cx="8046720" cy="640080"/>
+            <a:off x="7772400" y="4709160"/>
+            <a:ext cx="1097280" cy="320040"/>
           </a:xfrm>
           <a:prstGeom prst="rect">
             <a:avLst/>
@@ -1624,7 +1684,46 @@
           <a:ln/>
         </p:spPr>
         <p:txBody>
-          <a:bodyPr wrap="square" lIns="0" tIns="0" rIns="0" bIns="0" rtlCol="0" anchor="ctr"/>
+          <a:bodyPr wrap="square" rtlCol="0" anchor="ctr"/>
+          <a:lstStyle/>
+          <a:p>
+            <a:pPr algn="r" indent="0" marL="0">
+              <a:buNone/>
+            </a:pPr>
+            <a:r>
+              <a:rPr lang="en-US" sz="900" dirty="0">
+                <a:solidFill>
+                  <a:srgbClr val="6B6660"/>
+                </a:solidFill>
+                <a:latin typeface="Calibri" pitchFamily="34" charset="0"/>
+                <a:ea typeface="Calibri" pitchFamily="34" charset="-122"/>
+                <a:cs typeface="Calibri" pitchFamily="34" charset="-120"/>
+              </a:rPr>
+              <a:t>3 / 5</a:t>
+            </a:r>
+            <a:endParaRPr lang="en-US" sz="900" dirty="0"/>
+          </a:p>
+        </p:txBody>
+      </p:sp>
+      <p:sp>
+        <p:nvSpPr>
+          <p:cNvPr id="4" name="Text 2"/>
+          <p:cNvSpPr/>
+          <p:nvPr/>
+        </p:nvSpPr>
+        <p:spPr>
+          <a:xfrm>
+            <a:off x="457200" y="274320"/>
+            <a:ext cx="8229600" cy="640080"/>
+          </a:xfrm>
+          <a:prstGeom prst="rect">
+            <a:avLst/>
+          </a:prstGeom>
+          <a:noFill/>
+          <a:ln/>
+        </p:spPr>
+        <p:txBody>
+          <a:bodyPr wrap="square" rtlCol="0" anchor="ctr"/>
           <a:lstStyle/>
           <a:p>
             <a:pPr indent="0" marL="0">
@@ -1639,7 +1738,7 @@
                 <a:ea typeface="Georgia" pitchFamily="34" charset="-122"/>
                 <a:cs typeface="Georgia" pitchFamily="34" charset="-120"/>
               </a:rPr>
-              <a:t>Finding the nth Term</a:t>
+              <a:t>Term-to-Term Rules</a:t>
             </a:r>
             <a:endParaRPr lang="en-US" sz="2600" dirty="0"/>
           </a:p>
@@ -1647,14 +1746,14 @@
       </p:sp>
       <p:sp>
         <p:nvSpPr>
-          <p:cNvPr id="4" name="Text 2"/>
+          <p:cNvPr id="5" name="Text 3"/>
           <p:cNvSpPr/>
           <p:nvPr/>
         </p:nvSpPr>
         <p:spPr>
           <a:xfrm>
-            <a:off x="548640" y="1097280"/>
-            <a:ext cx="8046720" cy="3474720"/>
+            <a:off x="457200" y="1188720"/>
+            <a:ext cx="3840480" cy="3474720"/>
           </a:xfrm>
           <a:prstGeom prst="rect">
             <a:avLst/>
@@ -1668,13 +1767,13 @@
           <a:p>
             <a:pPr marL="342900" indent="-342900">
               <a:spcAft>
-                <a:spcPts val="800"/>
+                <a:spcPts val="600"/>
               </a:spcAft>
               <a:buSzPct val="100000"/>
               <a:buChar char="•"/>
             </a:pPr>
             <a:r>
-              <a:rPr lang="en-US" sz="1500" dirty="0">
+              <a:rPr lang="en-US" sz="1400" dirty="0">
                 <a:solidFill>
                   <a:srgbClr val="3D3A36"/>
                 </a:solidFill>
@@ -1682,20 +1781,20 @@
                 <a:ea typeface="Calibri" pitchFamily="34" charset="-122"/>
                 <a:cs typeface="Calibri" pitchFamily="34" charset="-120"/>
               </a:rPr>
-              <a:t>Sequence: 3, 7, 11, 15, 19... (common difference = +4)</a:t>
-            </a:r>
-            <a:endParaRPr lang="en-US" sz="1500" dirty="0"/>
+              <a:t>Add a constant: 3, 7, 11, 15, 19... (add 4)</a:t>
+            </a:r>
+            <a:endParaRPr lang="en-US" sz="1400" dirty="0"/>
           </a:p>
           <a:p>
             <a:pPr marL="342900" indent="-342900">
               <a:spcAft>
-                <a:spcPts val="800"/>
+                <a:spcPts val="600"/>
               </a:spcAft>
               <a:buSzPct val="100000"/>
               <a:buChar char="•"/>
             </a:pPr>
             <a:r>
-              <a:rPr lang="en-US" sz="1500" dirty="0">
+              <a:rPr lang="en-US" sz="1400" dirty="0">
                 <a:solidFill>
                   <a:srgbClr val="3D3A36"/>
                 </a:solidFill>
@@ -1703,20 +1802,20 @@
                 <a:ea typeface="Calibri" pitchFamily="34" charset="-122"/>
                 <a:cs typeface="Calibri" pitchFamily="34" charset="-120"/>
               </a:rPr>
-              <a:t>The nth term formula: first term + (n-1) × common difference</a:t>
-            </a:r>
-            <a:endParaRPr lang="en-US" sz="1500" dirty="0"/>
+              <a:t>Subtract: 20, 17, 14, 11... (subtract 3)</a:t>
+            </a:r>
+            <a:endParaRPr lang="en-US" sz="1400" dirty="0"/>
           </a:p>
           <a:p>
             <a:pPr marL="342900" indent="-342900">
               <a:spcAft>
-                <a:spcPts val="800"/>
+                <a:spcPts val="600"/>
               </a:spcAft>
               <a:buSzPct val="100000"/>
               <a:buChar char="•"/>
             </a:pPr>
             <a:r>
-              <a:rPr lang="en-US" sz="1500" dirty="0">
+              <a:rPr lang="en-US" sz="1400" dirty="0">
                 <a:solidFill>
                   <a:srgbClr val="3D3A36"/>
                 </a:solidFill>
@@ -1724,20 +1823,20 @@
                 <a:ea typeface="Calibri" pitchFamily="34" charset="-122"/>
                 <a:cs typeface="Calibri" pitchFamily="34" charset="-120"/>
               </a:rPr>
-              <a:t>= 3 + (n-1) × 4 = 3 + 4n - 4 = 4n - 1</a:t>
-            </a:r>
-            <a:endParaRPr lang="en-US" sz="1500" dirty="0"/>
+              <a:t>Multiply: 2, 6, 18, 54... (multiply by 3)</a:t>
+            </a:r>
+            <a:endParaRPr lang="en-US" sz="1400" dirty="0"/>
           </a:p>
           <a:p>
             <a:pPr marL="342900" indent="-342900">
               <a:spcAft>
-                <a:spcPts val="800"/>
+                <a:spcPts val="600"/>
               </a:spcAft>
               <a:buSzPct val="100000"/>
               <a:buChar char="•"/>
             </a:pPr>
             <a:r>
-              <a:rPr lang="en-US" sz="1500" dirty="0">
+              <a:rPr lang="en-US" sz="1400" dirty="0">
                 <a:solidFill>
                   <a:srgbClr val="3D3A36"/>
                 </a:solidFill>
@@ -1745,20 +1844,20 @@
                 <a:ea typeface="Calibri" pitchFamily="34" charset="-122"/>
                 <a:cs typeface="Calibri" pitchFamily="34" charset="-120"/>
               </a:rPr>
-              <a:t>Check: when n=1, 4(1)-1 = 3 ✓ | when n=2, 4(2)-1 = 7 ✓</a:t>
-            </a:r>
-            <a:endParaRPr lang="en-US" sz="1500" dirty="0"/>
+              <a:t>The common difference = what you add/subtract each time</a:t>
+            </a:r>
+            <a:endParaRPr lang="en-US" sz="1400" dirty="0"/>
           </a:p>
           <a:p>
             <a:pPr marL="342900" indent="-342900">
               <a:spcAft>
-                <a:spcPts val="800"/>
+                <a:spcPts val="600"/>
               </a:spcAft>
               <a:buSzPct val="100000"/>
               <a:buChar char="•"/>
             </a:pPr>
             <a:r>
-              <a:rPr lang="en-US" sz="1500" dirty="0">
+              <a:rPr lang="en-US" sz="1400" dirty="0">
                 <a:solidFill>
                   <a:srgbClr val="3D3A36"/>
                 </a:solidFill>
@@ -1766,22 +1865,74 @@
                 <a:ea typeface="Calibri" pitchFamily="34" charset="-122"/>
                 <a:cs typeface="Calibri" pitchFamily="34" charset="-120"/>
               </a:rPr>
-              <a:t>Use the formula to find ANY term (e.g., 100th term = 4(100)-1 = 399)</a:t>
-            </a:r>
-            <a:endParaRPr lang="en-US" sz="1500" dirty="0"/>
-          </a:p>
-        </p:txBody>
-      </p:sp>
-      <p:sp>
-        <p:nvSpPr>
-          <p:cNvPr id="5" name="Text 3"/>
+              <a:t>Example: 5, 8, 11, 14 → common difference = +3</a:t>
+            </a:r>
+            <a:endParaRPr lang="en-US" sz="1400" dirty="0"/>
+          </a:p>
+        </p:txBody>
+      </p:sp>
+      <p:sp>
+        <p:nvSpPr>
+          <p:cNvPr id="6" name="Shape 4"/>
           <p:cNvSpPr/>
           <p:nvPr/>
         </p:nvSpPr>
         <p:spPr>
           <a:xfrm>
-            <a:off x="548640" y="4800600"/>
-            <a:ext cx="3657600" cy="274320"/>
+            <a:off x="4846320" y="1188720"/>
+            <a:ext cx="3840480" cy="3474720"/>
+          </a:xfrm>
+          <a:prstGeom prst="rect">
+            <a:avLst/>
+          </a:prstGeom>
+          <a:solidFill>
+            <a:srgbClr val="FFFFFF"/>
+          </a:solidFill>
+          <a:ln w="12700">
+            <a:solidFill>
+              <a:srgbClr val="E5E2DC"/>
+            </a:solidFill>
+            <a:prstDash val="solid"/>
+          </a:ln>
+          <a:effectLst>
+            <a:outerShdw sx="100000" sy="100000" kx="0" ky="0" algn="bl" rotWithShape="0" blurRad="50800" dist="25400" dir="8100000">
+              <a:srgbClr val="000000">
+                <a:alpha val="10000"/>
+              </a:srgbClr>
+            </a:outerShdw>
+          </a:effectLst>
+        </p:spPr>
+      </p:sp>
+      <p:sp>
+        <p:nvSpPr>
+          <p:cNvPr id="7" name="Shape 5"/>
+          <p:cNvSpPr/>
+          <p:nvPr/>
+        </p:nvSpPr>
+        <p:spPr>
+          <a:xfrm>
+            <a:off x="4846320" y="1188720"/>
+            <a:ext cx="3840480" cy="54864"/>
+          </a:xfrm>
+          <a:prstGeom prst="rect">
+            <a:avLst/>
+          </a:prstGeom>
+          <a:solidFill>
+            <a:srgbClr val="2A9D8F"/>
+          </a:solidFill>
+          <a:ln/>
+        </p:spPr>
+      </p:sp>
+      <p:sp>
+        <p:nvSpPr>
+          <p:cNvPr id="8" name="Text 6"/>
+          <p:cNvSpPr/>
+          <p:nvPr/>
+        </p:nvSpPr>
+        <p:spPr>
+          <a:xfrm>
+            <a:off x="5120640" y="1371600"/>
+            <a:ext cx="3291840" cy="3108960"/>
           </a:xfrm>
           <a:prstGeom prst="rect">
             <a:avLst/>
@@ -1790,21 +1941,136 @@
           <a:ln/>
         </p:spPr>
         <p:txBody>
-          <a:bodyPr wrap="square" rtlCol="0" anchor="ctr"/>
+          <a:bodyPr wrap="square" rtlCol="0" anchor="t"/>
           <a:lstStyle/>
           <a:p>
             <a:pPr indent="0" marL="0">
+              <a:spcAft>
+                <a:spcPts val="400"/>
+              </a:spcAft>
               <a:buNone/>
             </a:pPr>
             <a:r>
-              <a:rPr lang="en-US" sz="800" dirty="0">
-                <a:solidFill>
-                  <a:srgbClr val="9B9690"/>
-                </a:solidFill>
-              </a:rPr>
-              <a:t>mrzocchi.com</a:t>
-            </a:r>
-            <a:endParaRPr lang="en-US" sz="800" dirty="0"/>
+              <a:rPr lang="en-US" sz="1600" b="1" dirty="0">
+                <a:solidFill>
+                  <a:srgbClr val="1B2A4A"/>
+                </a:solidFill>
+                <a:latin typeface="Calibri" pitchFamily="34" charset="0"/>
+                <a:ea typeface="Calibri" pitchFamily="34" charset="-122"/>
+                <a:cs typeface="Calibri" pitchFamily="34" charset="-120"/>
+              </a:rPr>
+              <a:t>Position-to-Term Rules (nth term)</a:t>
+            </a:r>
+            <a:endParaRPr lang="en-US" sz="1600" dirty="0"/>
+          </a:p>
+          <a:p>
+            <a:pPr indent="0" marL="0">
+              <a:spcAft>
+                <a:spcPts val="400"/>
+              </a:spcAft>
+              <a:buNone/>
+            </a:pPr>
+            <a:endParaRPr lang="en-US" sz="1600" dirty="0"/>
+          </a:p>
+          <a:p>
+            <a:pPr indent="0" marL="0">
+              <a:spcAft>
+                <a:spcPts val="400"/>
+              </a:spcAft>
+              <a:buNone/>
+            </a:pPr>
+            <a:r>
+              <a:rPr lang="en-US" sz="1300" dirty="0">
+                <a:solidFill>
+                  <a:srgbClr val="3D3A36"/>
+                </a:solidFill>
+                <a:latin typeface="Calibri" pitchFamily="34" charset="0"/>
+                <a:ea typeface="Calibri" pitchFamily="34" charset="-122"/>
+                <a:cs typeface="Calibri" pitchFamily="34" charset="-120"/>
+              </a:rPr>
+              <a:t>A formula that gives any term from its position number (n)</a:t>
+            </a:r>
+            <a:endParaRPr lang="en-US" sz="1600" dirty="0"/>
+          </a:p>
+          <a:p>
+            <a:pPr indent="0" marL="0">
+              <a:spcAft>
+                <a:spcPts val="400"/>
+              </a:spcAft>
+              <a:buNone/>
+            </a:pPr>
+            <a:r>
+              <a:rPr lang="en-US" sz="1300" dirty="0">
+                <a:solidFill>
+                  <a:srgbClr val="3D3A36"/>
+                </a:solidFill>
+                <a:latin typeface="Calibri" pitchFamily="34" charset="0"/>
+                <a:ea typeface="Calibri" pitchFamily="34" charset="-122"/>
+                <a:cs typeface="Calibri" pitchFamily="34" charset="-120"/>
+              </a:rPr>
+              <a:t>Sequence: 4, 7, 10, 13... → rule: 3n + 1</a:t>
+            </a:r>
+            <a:endParaRPr lang="en-US" sz="1600" dirty="0"/>
+          </a:p>
+          <a:p>
+            <a:pPr indent="0" marL="0">
+              <a:spcAft>
+                <a:spcPts val="400"/>
+              </a:spcAft>
+              <a:buNone/>
+            </a:pPr>
+            <a:r>
+              <a:rPr lang="en-US" sz="1300" dirty="0">
+                <a:solidFill>
+                  <a:srgbClr val="3D3A36"/>
+                </a:solidFill>
+                <a:latin typeface="Calibri" pitchFamily="34" charset="0"/>
+                <a:ea typeface="Calibri" pitchFamily="34" charset="-122"/>
+                <a:cs typeface="Calibri" pitchFamily="34" charset="-120"/>
+              </a:rPr>
+              <a:t>Check: n=1: 3(1)+1=4 ✓, n=2: 3(2)+1=7 ✓</a:t>
+            </a:r>
+            <a:endParaRPr lang="en-US" sz="1600" dirty="0"/>
+          </a:p>
+          <a:p>
+            <a:pPr indent="0" marL="0">
+              <a:spcAft>
+                <a:spcPts val="400"/>
+              </a:spcAft>
+              <a:buNone/>
+            </a:pPr>
+            <a:r>
+              <a:rPr lang="en-US" sz="1300" dirty="0">
+                <a:solidFill>
+                  <a:srgbClr val="3D3A36"/>
+                </a:solidFill>
+                <a:latin typeface="Calibri" pitchFamily="34" charset="0"/>
+                <a:ea typeface="Calibri" pitchFamily="34" charset="-122"/>
+                <a:cs typeface="Calibri" pitchFamily="34" charset="-120"/>
+              </a:rPr>
+              <a:t>Common difference = coefficient of n</a:t>
+            </a:r>
+            <a:endParaRPr lang="en-US" sz="1600" dirty="0"/>
+          </a:p>
+          <a:p>
+            <a:pPr indent="0" marL="0">
+              <a:spcAft>
+                <a:spcPts val="400"/>
+              </a:spcAft>
+              <a:buNone/>
+            </a:pPr>
+            <a:r>
+              <a:rPr lang="en-US" sz="1300" dirty="0">
+                <a:solidFill>
+                  <a:srgbClr val="3D3A36"/>
+                </a:solidFill>
+                <a:latin typeface="Calibri" pitchFamily="34" charset="0"/>
+                <a:ea typeface="Calibri" pitchFamily="34" charset="-122"/>
+                <a:cs typeface="Calibri" pitchFamily="34" charset="-120"/>
+              </a:rPr>
+              <a:t>The +1 is found by: first term minus common difference: 4−3=1</a:t>
+            </a:r>
+            <a:endParaRPr lang="en-US" sz="1600" dirty="0"/>
           </a:p>
         </p:txBody>
       </p:sp>
@@ -1819,6 +2085,284 @@
 <file path=ppt/slides/slide4.xml><?xml version="1.0" encoding="utf-8"?>
 <p:sld xmlns:a="http://schemas.openxmlformats.org/drawingml/2006/main" xmlns:r="http://schemas.openxmlformats.org/officeDocument/2006/relationships" xmlns:p="http://schemas.openxmlformats.org/presentationml/2006/main">
   <p:cSld name="Slide 4">
+    <p:bg>
+      <p:bgPr>
+        <a:solidFill>
+          <a:srgbClr val="FAF8F5"/>
+        </a:solidFill>
+      </p:bgPr>
+    </p:bg>
+    <p:spTree>
+      <p:nvGrpSpPr>
+        <p:cNvPr id="1" name=""/>
+        <p:cNvGrpSpPr/>
+        <p:nvPr/>
+      </p:nvGrpSpPr>
+      <p:grpSpPr>
+        <a:xfrm>
+          <a:off x="0" y="0"/>
+          <a:ext cx="0" cy="0"/>
+          <a:chOff x="0" y="0"/>
+          <a:chExt cx="0" cy="0"/>
+        </a:xfrm>
+      </p:grpSpPr>
+      <p:sp>
+        <p:nvSpPr>
+          <p:cNvPr id="2" name="Shape 0"/>
+          <p:cNvSpPr/>
+          <p:nvPr/>
+        </p:nvSpPr>
+        <p:spPr>
+          <a:xfrm>
+            <a:off x="0" y="0"/>
+            <a:ext cx="9144000" cy="54864"/>
+          </a:xfrm>
+          <a:prstGeom prst="rect">
+            <a:avLst/>
+          </a:prstGeom>
+          <a:solidFill>
+            <a:srgbClr val="2A9D8F"/>
+          </a:solidFill>
+          <a:ln/>
+        </p:spPr>
+      </p:sp>
+      <p:sp>
+        <p:nvSpPr>
+          <p:cNvPr id="3" name="Text 1"/>
+          <p:cNvSpPr/>
+          <p:nvPr/>
+        </p:nvSpPr>
+        <p:spPr>
+          <a:xfrm>
+            <a:off x="7772400" y="4709160"/>
+            <a:ext cx="1097280" cy="320040"/>
+          </a:xfrm>
+          <a:prstGeom prst="rect">
+            <a:avLst/>
+          </a:prstGeom>
+          <a:noFill/>
+          <a:ln/>
+        </p:spPr>
+        <p:txBody>
+          <a:bodyPr wrap="square" rtlCol="0" anchor="ctr"/>
+          <a:lstStyle/>
+          <a:p>
+            <a:pPr algn="r" indent="0" marL="0">
+              <a:buNone/>
+            </a:pPr>
+            <a:r>
+              <a:rPr lang="en-US" sz="900" dirty="0">
+                <a:solidFill>
+                  <a:srgbClr val="6B6660"/>
+                </a:solidFill>
+                <a:latin typeface="Calibri" pitchFamily="34" charset="0"/>
+                <a:ea typeface="Calibri" pitchFamily="34" charset="-122"/>
+                <a:cs typeface="Calibri" pitchFamily="34" charset="-120"/>
+              </a:rPr>
+              <a:t>4 / 5</a:t>
+            </a:r>
+            <a:endParaRPr lang="en-US" sz="900" dirty="0"/>
+          </a:p>
+        </p:txBody>
+      </p:sp>
+      <p:sp>
+        <p:nvSpPr>
+          <p:cNvPr id="4" name="Text 2"/>
+          <p:cNvSpPr/>
+          <p:nvPr/>
+        </p:nvSpPr>
+        <p:spPr>
+          <a:xfrm>
+            <a:off x="457200" y="274320"/>
+            <a:ext cx="8229600" cy="640080"/>
+          </a:xfrm>
+          <a:prstGeom prst="rect">
+            <a:avLst/>
+          </a:prstGeom>
+          <a:noFill/>
+          <a:ln/>
+        </p:spPr>
+        <p:txBody>
+          <a:bodyPr wrap="square" rtlCol="0" anchor="ctr"/>
+          <a:lstStyle/>
+          <a:p>
+            <a:pPr indent="0" marL="0">
+              <a:buNone/>
+            </a:pPr>
+            <a:r>
+              <a:rPr lang="en-US" sz="2600" b="1" dirty="0">
+                <a:solidFill>
+                  <a:srgbClr val="1B2A4A"/>
+                </a:solidFill>
+                <a:latin typeface="Georgia" pitchFamily="34" charset="0"/>
+                <a:ea typeface="Georgia" pitchFamily="34" charset="-122"/>
+                <a:cs typeface="Georgia" pitchFamily="34" charset="-120"/>
+              </a:rPr>
+              <a:t>Finding the nth Term</a:t>
+            </a:r>
+            <a:endParaRPr lang="en-US" sz="2600" dirty="0"/>
+          </a:p>
+        </p:txBody>
+      </p:sp>
+      <p:sp>
+        <p:nvSpPr>
+          <p:cNvPr id="5" name="Text 3"/>
+          <p:cNvSpPr/>
+          <p:nvPr/>
+        </p:nvSpPr>
+        <p:spPr>
+          <a:xfrm>
+            <a:off x="457200" y="1097280"/>
+            <a:ext cx="8229600" cy="3657600"/>
+          </a:xfrm>
+          <a:prstGeom prst="rect">
+            <a:avLst/>
+          </a:prstGeom>
+          <a:noFill/>
+          <a:ln/>
+        </p:spPr>
+        <p:txBody>
+          <a:bodyPr wrap="square" rtlCol="0" anchor="t"/>
+          <a:lstStyle/>
+          <a:p>
+            <a:pPr marL="342900" indent="-342900">
+              <a:spcAft>
+                <a:spcPts val="800"/>
+              </a:spcAft>
+              <a:buSzPct val="100000"/>
+              <a:buChar char="•"/>
+            </a:pPr>
+            <a:r>
+              <a:rPr lang="en-US" sz="1400" dirty="0">
+                <a:solidFill>
+                  <a:srgbClr val="3D3A36"/>
+                </a:solidFill>
+                <a:latin typeface="Calibri" pitchFamily="34" charset="0"/>
+                <a:ea typeface="Calibri" pitchFamily="34" charset="-122"/>
+                <a:cs typeface="Calibri" pitchFamily="34" charset="-120"/>
+              </a:rPr>
+              <a:t>Step 1: Find the common difference (d)</a:t>
+            </a:r>
+            <a:endParaRPr lang="en-US" sz="1400" dirty="0"/>
+          </a:p>
+          <a:p>
+            <a:pPr marL="342900" indent="-342900">
+              <a:spcAft>
+                <a:spcPts val="800"/>
+              </a:spcAft>
+              <a:buSzPct val="100000"/>
+              <a:buChar char="•"/>
+            </a:pPr>
+            <a:r>
+              <a:rPr lang="en-US" sz="1400" dirty="0">
+                <a:solidFill>
+                  <a:srgbClr val="3D3A36"/>
+                </a:solidFill>
+                <a:latin typeface="Calibri" pitchFamily="34" charset="0"/>
+                <a:ea typeface="Calibri" pitchFamily="34" charset="-122"/>
+                <a:cs typeface="Calibri" pitchFamily="34" charset="-120"/>
+              </a:rPr>
+              <a:t>Step 2: The nth term starts with dn (d × n)</a:t>
+            </a:r>
+            <a:endParaRPr lang="en-US" sz="1400" dirty="0"/>
+          </a:p>
+          <a:p>
+            <a:pPr marL="342900" indent="-342900">
+              <a:spcAft>
+                <a:spcPts val="800"/>
+              </a:spcAft>
+              <a:buSzPct val="100000"/>
+              <a:buChar char="•"/>
+            </a:pPr>
+            <a:r>
+              <a:rPr lang="en-US" sz="1400" dirty="0">
+                <a:solidFill>
+                  <a:srgbClr val="3D3A36"/>
+                </a:solidFill>
+                <a:latin typeface="Calibri" pitchFamily="34" charset="0"/>
+                <a:ea typeface="Calibri" pitchFamily="34" charset="-122"/>
+                <a:cs typeface="Calibri" pitchFamily="34" charset="-120"/>
+              </a:rPr>
+              <a:t>Step 3: Check what you need to add or subtract to get the first term</a:t>
+            </a:r>
+            <a:endParaRPr lang="en-US" sz="1400" dirty="0"/>
+          </a:p>
+          <a:p>
+            <a:pPr marL="342900" indent="-342900">
+              <a:spcAft>
+                <a:spcPts val="800"/>
+              </a:spcAft>
+              <a:buSzPct val="100000"/>
+              <a:buChar char="•"/>
+            </a:pPr>
+            <a:r>
+              <a:rPr lang="en-US" sz="1400" dirty="0">
+                <a:solidFill>
+                  <a:srgbClr val="3D3A36"/>
+                </a:solidFill>
+                <a:latin typeface="Calibri" pitchFamily="34" charset="0"/>
+                <a:ea typeface="Calibri" pitchFamily="34" charset="-122"/>
+                <a:cs typeface="Calibri" pitchFamily="34" charset="-120"/>
+              </a:rPr>
+              <a:t>Example: 5, 9, 13, 17... → d = 4 → try 4n → 4(1) = 4, need +1 → nth term = 4n + 1</a:t>
+            </a:r>
+            <a:endParaRPr lang="en-US" sz="1400" dirty="0"/>
+          </a:p>
+          <a:p>
+            <a:pPr marL="342900" indent="-342900">
+              <a:spcAft>
+                <a:spcPts val="800"/>
+              </a:spcAft>
+              <a:buSzPct val="100000"/>
+              <a:buChar char="•"/>
+            </a:pPr>
+            <a:r>
+              <a:rPr lang="en-US" sz="1400" dirty="0">
+                <a:solidFill>
+                  <a:srgbClr val="3D3A36"/>
+                </a:solidFill>
+                <a:latin typeface="Calibri" pitchFamily="34" charset="0"/>
+                <a:ea typeface="Calibri" pitchFamily="34" charset="-122"/>
+                <a:cs typeface="Calibri" pitchFamily="34" charset="-120"/>
+              </a:rPr>
+              <a:t>Check: 4(2)+1 = 9 ✓, 4(3)+1 = 13 ✓</a:t>
+            </a:r>
+            <a:endParaRPr lang="en-US" sz="1400" dirty="0"/>
+          </a:p>
+          <a:p>
+            <a:pPr marL="342900" indent="-342900">
+              <a:spcAft>
+                <a:spcPts val="800"/>
+              </a:spcAft>
+              <a:buSzPct val="100000"/>
+              <a:buChar char="•"/>
+            </a:pPr>
+            <a:r>
+              <a:rPr lang="en-US" sz="1400" dirty="0">
+                <a:solidFill>
+                  <a:srgbClr val="3D3A36"/>
+                </a:solidFill>
+                <a:latin typeface="Calibri" pitchFamily="34" charset="0"/>
+                <a:ea typeface="Calibri" pitchFamily="34" charset="-122"/>
+                <a:cs typeface="Calibri" pitchFamily="34" charset="-120"/>
+              </a:rPr>
+              <a:t>To find the 50th term: 4(50)+1 = 201</a:t>
+            </a:r>
+            <a:endParaRPr lang="en-US" sz="1400" dirty="0"/>
+          </a:p>
+        </p:txBody>
+      </p:sp>
+    </p:spTree>
+  </p:cSld>
+  <p:clrMapOvr>
+    <a:masterClrMapping/>
+  </p:clrMapOvr>
+</p:sld>
+</file>
+
+<file path=ppt/slides/slide5.xml><?xml version="1.0" encoding="utf-8"?>
+<p:sld xmlns:a="http://schemas.openxmlformats.org/drawingml/2006/main" xmlns:r="http://schemas.openxmlformats.org/officeDocument/2006/relationships" xmlns:p="http://schemas.openxmlformats.org/presentationml/2006/main">
+  <p:cSld name="Slide 5">
     <p:bg>
       <p:bgPr>
         <a:solidFill>
@@ -1849,13 +2393,13 @@
         <p:spPr>
           <a:xfrm>
             <a:off x="0" y="0"/>
-            <a:ext cx="9144000" cy="54864"/>
-          </a:xfrm>
-          <a:prstGeom prst="rect">
-            <a:avLst/>
-          </a:prstGeom>
-          <a:solidFill>
-            <a:srgbClr val="2A9D8F"/>
+            <a:ext cx="109728" cy="5143500"/>
+          </a:xfrm>
+          <a:prstGeom prst="rect">
+            <a:avLst/>
+          </a:prstGeom>
+          <a:solidFill>
+            <a:srgbClr val="E9C46A"/>
           </a:solidFill>
           <a:ln/>
         </p:spPr>
@@ -1868,8 +2412,8 @@
         </p:nvSpPr>
         <p:spPr>
           <a:xfrm>
-            <a:off x="548640" y="457200"/>
-            <a:ext cx="8046720" cy="640080"/>
+            <a:off x="731520" y="457200"/>
+            <a:ext cx="7772400" cy="731520"/>
           </a:xfrm>
           <a:prstGeom prst="rect">
             <a:avLst/>
@@ -1885,7 +2429,7 @@
               <a:buNone/>
             </a:pPr>
             <a:r>
-              <a:rPr lang="en-US" sz="2800" b="1" dirty="0">
+              <a:rPr lang="en-US" sz="3200" b="1" dirty="0">
                 <a:solidFill>
                   <a:srgbClr val="FFFFFF"/>
                 </a:solidFill>
@@ -1895,7 +2439,7 @@
               </a:rPr>
               <a:t>Key Takeaways</a:t>
             </a:r>
-            <a:endParaRPr lang="en-US" sz="2800" dirty="0"/>
+            <a:endParaRPr lang="en-US" sz="3200" dirty="0"/>
           </a:p>
         </p:txBody>
       </p:sp>
@@ -1907,8 +2451,8 @@
         </p:nvSpPr>
         <p:spPr>
           <a:xfrm>
-            <a:off x="731520" y="1371600"/>
-            <a:ext cx="7680960" cy="3200400"/>
+            <a:off x="731520" y="1463040"/>
+            <a:ext cx="7772400" cy="3200400"/>
           </a:xfrm>
           <a:prstGeom prst="rect">
             <a:avLst/>
@@ -1928,7 +2472,7 @@
               <a:buChar char="•"/>
             </a:pPr>
             <a:r>
-              <a:rPr lang="en-US" sz="1600" dirty="0">
+              <a:rPr lang="en-US" sz="1500" dirty="0">
                 <a:solidFill>
                   <a:srgbClr val="CADCFC"/>
                 </a:solidFill>
@@ -1936,9 +2480,9 @@
                 <a:ea typeface="Calibri" pitchFamily="34" charset="-122"/>
                 <a:cs typeface="Calibri" pitchFamily="34" charset="-120"/>
               </a:rPr>
-              <a:t>Sequence = ordered list following a rule</a:t>
-            </a:r>
-            <a:endParaRPr lang="en-US" sz="1600" dirty="0"/>
+              <a:t>Sequence = list of numbers following a pattern</a:t>
+            </a:r>
+            <a:endParaRPr lang="en-US" sz="1500" dirty="0"/>
           </a:p>
           <a:p>
             <a:pPr marL="342900" indent="-342900">
@@ -1949,7 +2493,7 @@
               <a:buChar char="•"/>
             </a:pPr>
             <a:r>
-              <a:rPr lang="en-US" sz="1600" dirty="0">
+              <a:rPr lang="en-US" sz="1500" dirty="0">
                 <a:solidFill>
                   <a:srgbClr val="CADCFC"/>
                 </a:solidFill>
@@ -1957,9 +2501,9 @@
                 <a:ea typeface="Calibri" pitchFamily="34" charset="-122"/>
                 <a:cs typeface="Calibri" pitchFamily="34" charset="-120"/>
               </a:rPr>
-              <a:t>Find common difference by subtracting consecutive terms</a:t>
-            </a:r>
-            <a:endParaRPr lang="en-US" sz="1600" dirty="0"/>
+              <a:t>Common difference = what you add each time</a:t>
+            </a:r>
+            <a:endParaRPr lang="en-US" sz="1500" dirty="0"/>
           </a:p>
           <a:p>
             <a:pPr marL="342900" indent="-342900">
@@ -1970,7 +2514,7 @@
               <a:buChar char="•"/>
             </a:pPr>
             <a:r>
-              <a:rPr lang="en-US" sz="1600" dirty="0">
+              <a:rPr lang="en-US" sz="1500" dirty="0">
                 <a:solidFill>
                   <a:srgbClr val="CADCFC"/>
                 </a:solidFill>
@@ -1978,9 +2522,9 @@
                 <a:ea typeface="Calibri" pitchFamily="34" charset="-122"/>
                 <a:cs typeface="Calibri" pitchFamily="34" charset="-120"/>
               </a:rPr>
-              <a:t>nth term = first term + (n-1) × common difference</a:t>
-            </a:r>
-            <a:endParaRPr lang="en-US" sz="1600" dirty="0"/>
+              <a:t>nth term formula: dn + c, where d = common difference</a:t>
+            </a:r>
+            <a:endParaRPr lang="en-US" sz="1500" dirty="0"/>
           </a:p>
           <a:p>
             <a:pPr marL="342900" indent="-342900">
@@ -1991,7 +2535,7 @@
               <a:buChar char="•"/>
             </a:pPr>
             <a:r>
-              <a:rPr lang="en-US" sz="1600" dirty="0">
+              <a:rPr lang="en-US" sz="1500" dirty="0">
                 <a:solidFill>
                   <a:srgbClr val="CADCFC"/>
                 </a:solidFill>
@@ -1999,9 +2543,30 @@
                 <a:ea typeface="Calibri" pitchFamily="34" charset="-122"/>
                 <a:cs typeface="Calibri" pitchFamily="34" charset="-120"/>
               </a:rPr>
-              <a:t>The formula lets you find any term without listing them all</a:t>
-            </a:r>
-            <a:endParaRPr lang="en-US" sz="1600" dirty="0"/>
+              <a:t>Find c: first term minus d</a:t>
+            </a:r>
+            <a:endParaRPr lang="en-US" sz="1500" dirty="0"/>
+          </a:p>
+          <a:p>
+            <a:pPr marL="342900" indent="-342900">
+              <a:spcAft>
+                <a:spcPts val="1000"/>
+              </a:spcAft>
+              <a:buSzPct val="100000"/>
+              <a:buChar char="•"/>
+            </a:pPr>
+            <a:r>
+              <a:rPr lang="en-US" sz="1500" dirty="0">
+                <a:solidFill>
+                  <a:srgbClr val="CADCFC"/>
+                </a:solidFill>
+                <a:latin typeface="Calibri" pitchFamily="34" charset="0"/>
+                <a:ea typeface="Calibri" pitchFamily="34" charset="-122"/>
+                <a:cs typeface="Calibri" pitchFamily="34" charset="-120"/>
+              </a:rPr>
+              <a:t>Use the formula to find ANY term in the sequence</a:t>
+            </a:r>
+            <a:endParaRPr lang="en-US" sz="1500" dirty="0"/>
           </a:p>
         </p:txBody>
       </p:sp>
@@ -2013,8 +2578,8 @@
         </p:nvSpPr>
         <p:spPr>
           <a:xfrm>
-            <a:off x="548640" y="4572000"/>
-            <a:ext cx="3657600" cy="274320"/>
+            <a:off x="731520" y="4572000"/>
+            <a:ext cx="7772400" cy="365760"/>
           </a:xfrm>
           <a:prstGeom prst="rect">
             <a:avLst/>
@@ -2030,14 +2595,17 @@
               <a:buNone/>
             </a:pPr>
             <a:r>
-              <a:rPr lang="en-US" sz="1000" dirty="0">
-                <a:solidFill>
-                  <a:srgbClr val="6B6660"/>
-                </a:solidFill>
+              <a:rPr lang="en-US" sz="1100" dirty="0">
+                <a:solidFill>
+                  <a:srgbClr val="E9C46A"/>
+                </a:solidFill>
+                <a:latin typeface="Calibri" pitchFamily="34" charset="0"/>
+                <a:ea typeface="Calibri" pitchFamily="34" charset="-122"/>
+                <a:cs typeface="Calibri" pitchFamily="34" charset="-120"/>
               </a:rPr>
               <a:t>mrzocchi.com</a:t>
             </a:r>
-            <a:endParaRPr lang="en-US" sz="1000" dirty="0"/>
+            <a:endParaRPr lang="en-US" sz="1100" dirty="0"/>
           </a:p>
         </p:txBody>
       </p:sp>

--- a/static/ppts/G6_Math_T4_Sequences.pptx
+++ b/static/ppts/G6_Math_T4_Sequences.pptx
@@ -10,9 +10,13 @@
     <p:sldId id="258" r:id="rId4"/>
     <p:sldId id="259" r:id="rId5"/>
     <p:sldId id="260" r:id="rId6"/>
+    <p:sldId id="261" r:id="rId7"/>
+    <p:sldId id="262" r:id="rId8"/>
+    <p:sldId id="263" r:id="rId9"/>
+    <p:sldId id="264" r:id="rId10"/>
   </p:sldIdLst>
   <p:notesMasterIdLst>
-    <p:notesMasterId r:id="rId7"/>
+    <p:notesMasterId r:id="rId11"/>
   </p:notesMasterIdLst>
   <p:sldSz cx="9144000" cy="5143500"/>
   <p:notesSz cx="5143500" cy="9144000"/>
@@ -882,6 +886,358 @@
             <a:fld id="{F7021451-1387-4CA6-816F-3879F97B5CBC}" type="slidenum">
               <a:rPr lang="en-US"/>
               <a:t>5</a:t>
+            </a:fld>
+            <a:endParaRPr lang="en-US"/>
+          </a:p>
+        </p:txBody>
+      </p:sp>
+    </p:spTree>
+    <p:extLst>
+      <p:ext uri="{BB962C8B-B14F-4D97-AF65-F5344CB8AC3E}">
+        <p14:creationId xmlns:p14="http://schemas.microsoft.com/office/powerpoint/2010/main" val="1024086991"/>
+      </p:ext>
+    </p:extLst>
+  </p:cSld>
+  <p:clrMapOvr>
+    <a:masterClrMapping/>
+  </p:clrMapOvr>
+</p:notes>
+</file>
+
+<file path=ppt/notesSlides/notesSlide6.xml><?xml version="1.0" encoding="utf-8"?>
+<p:notes xmlns:a="http://schemas.openxmlformats.org/drawingml/2006/main" xmlns:r="http://schemas.openxmlformats.org/officeDocument/2006/relationships" xmlns:p="http://schemas.openxmlformats.org/presentationml/2006/main">
+  <p:cSld>
+    <p:spTree>
+      <p:nvGrpSpPr>
+        <p:cNvPr id="1" name=""/>
+        <p:cNvGrpSpPr/>
+        <p:nvPr/>
+      </p:nvGrpSpPr>
+      <p:grpSpPr>
+        <a:xfrm>
+          <a:off x="0" y="0"/>
+          <a:ext cx="0" cy="0"/>
+          <a:chOff x="0" y="0"/>
+          <a:chExt cx="0" cy="0"/>
+        </a:xfrm>
+      </p:grpSpPr>
+      <p:sp>
+        <p:nvSpPr>
+          <p:cNvPr id="2" name="Slide Image Placeholder 1"/>
+          <p:cNvSpPr>
+            <a:spLocks noGrp="1" noRot="1" noChangeAspect="1"/>
+          </p:cNvSpPr>
+          <p:nvPr>
+            <p:ph type="sldImg"/>
+          </p:nvPr>
+        </p:nvSpPr>
+        <p:spPr/>
+      </p:sp>
+      <p:sp>
+        <p:nvSpPr>
+          <p:cNvPr id="3" name="Notes Placeholder 2"/>
+          <p:cNvSpPr>
+            <a:spLocks noGrp="1"/>
+          </p:cNvSpPr>
+          <p:nvPr>
+            <p:ph type="body" idx="1"/>
+          </p:nvPr>
+        </p:nvSpPr>
+        <p:spPr/>
+        <p:txBody>
+          <a:bodyPr/>
+          <a:lstStyle/>
+          <a:p>
+            <a:r>
+              <a:rPr lang="en-US" dirty="0"/>
+              <a:t/>
+            </a:r>
+            <a:endParaRPr lang="en-US" dirty="0"/>
+          </a:p>
+        </p:txBody>
+      </p:sp>
+      <p:sp>
+        <p:nvSpPr>
+          <p:cNvPr id="4" name="Slide Number Placeholder 3"/>
+          <p:cNvSpPr>
+            <a:spLocks noGrp="1"/>
+          </p:cNvSpPr>
+          <p:nvPr>
+            <p:ph type="sldNum" sz="quarter" idx="10"/>
+          </p:nvPr>
+        </p:nvSpPr>
+        <p:spPr/>
+        <p:txBody>
+          <a:bodyPr/>
+          <a:lstStyle/>
+          <a:p>
+            <a:fld id="{F7021451-1387-4CA6-816F-3879F97B5CBC}" type="slidenum">
+              <a:rPr lang="en-US"/>
+              <a:t>6</a:t>
+            </a:fld>
+            <a:endParaRPr lang="en-US"/>
+          </a:p>
+        </p:txBody>
+      </p:sp>
+    </p:spTree>
+    <p:extLst>
+      <p:ext uri="{BB962C8B-B14F-4D97-AF65-F5344CB8AC3E}">
+        <p14:creationId xmlns:p14="http://schemas.microsoft.com/office/powerpoint/2010/main" val="1024086991"/>
+      </p:ext>
+    </p:extLst>
+  </p:cSld>
+  <p:clrMapOvr>
+    <a:masterClrMapping/>
+  </p:clrMapOvr>
+</p:notes>
+</file>
+
+<file path=ppt/notesSlides/notesSlide7.xml><?xml version="1.0" encoding="utf-8"?>
+<p:notes xmlns:a="http://schemas.openxmlformats.org/drawingml/2006/main" xmlns:r="http://schemas.openxmlformats.org/officeDocument/2006/relationships" xmlns:p="http://schemas.openxmlformats.org/presentationml/2006/main">
+  <p:cSld>
+    <p:spTree>
+      <p:nvGrpSpPr>
+        <p:cNvPr id="1" name=""/>
+        <p:cNvGrpSpPr/>
+        <p:nvPr/>
+      </p:nvGrpSpPr>
+      <p:grpSpPr>
+        <a:xfrm>
+          <a:off x="0" y="0"/>
+          <a:ext cx="0" cy="0"/>
+          <a:chOff x="0" y="0"/>
+          <a:chExt cx="0" cy="0"/>
+        </a:xfrm>
+      </p:grpSpPr>
+      <p:sp>
+        <p:nvSpPr>
+          <p:cNvPr id="2" name="Slide Image Placeholder 1"/>
+          <p:cNvSpPr>
+            <a:spLocks noGrp="1" noRot="1" noChangeAspect="1"/>
+          </p:cNvSpPr>
+          <p:nvPr>
+            <p:ph type="sldImg"/>
+          </p:nvPr>
+        </p:nvSpPr>
+        <p:spPr/>
+      </p:sp>
+      <p:sp>
+        <p:nvSpPr>
+          <p:cNvPr id="3" name="Notes Placeholder 2"/>
+          <p:cNvSpPr>
+            <a:spLocks noGrp="1"/>
+          </p:cNvSpPr>
+          <p:nvPr>
+            <p:ph type="body" idx="1"/>
+          </p:nvPr>
+        </p:nvSpPr>
+        <p:spPr/>
+        <p:txBody>
+          <a:bodyPr/>
+          <a:lstStyle/>
+          <a:p>
+            <a:r>
+              <a:rPr lang="en-US" dirty="0"/>
+              <a:t/>
+            </a:r>
+            <a:endParaRPr lang="en-US" dirty="0"/>
+          </a:p>
+        </p:txBody>
+      </p:sp>
+      <p:sp>
+        <p:nvSpPr>
+          <p:cNvPr id="4" name="Slide Number Placeholder 3"/>
+          <p:cNvSpPr>
+            <a:spLocks noGrp="1"/>
+          </p:cNvSpPr>
+          <p:nvPr>
+            <p:ph type="sldNum" sz="quarter" idx="10"/>
+          </p:nvPr>
+        </p:nvSpPr>
+        <p:spPr/>
+        <p:txBody>
+          <a:bodyPr/>
+          <a:lstStyle/>
+          <a:p>
+            <a:fld id="{F7021451-1387-4CA6-816F-3879F97B5CBC}" type="slidenum">
+              <a:rPr lang="en-US"/>
+              <a:t>7</a:t>
+            </a:fld>
+            <a:endParaRPr lang="en-US"/>
+          </a:p>
+        </p:txBody>
+      </p:sp>
+    </p:spTree>
+    <p:extLst>
+      <p:ext uri="{BB962C8B-B14F-4D97-AF65-F5344CB8AC3E}">
+        <p14:creationId xmlns:p14="http://schemas.microsoft.com/office/powerpoint/2010/main" val="1024086991"/>
+      </p:ext>
+    </p:extLst>
+  </p:cSld>
+  <p:clrMapOvr>
+    <a:masterClrMapping/>
+  </p:clrMapOvr>
+</p:notes>
+</file>
+
+<file path=ppt/notesSlides/notesSlide8.xml><?xml version="1.0" encoding="utf-8"?>
+<p:notes xmlns:a="http://schemas.openxmlformats.org/drawingml/2006/main" xmlns:r="http://schemas.openxmlformats.org/officeDocument/2006/relationships" xmlns:p="http://schemas.openxmlformats.org/presentationml/2006/main">
+  <p:cSld>
+    <p:spTree>
+      <p:nvGrpSpPr>
+        <p:cNvPr id="1" name=""/>
+        <p:cNvGrpSpPr/>
+        <p:nvPr/>
+      </p:nvGrpSpPr>
+      <p:grpSpPr>
+        <a:xfrm>
+          <a:off x="0" y="0"/>
+          <a:ext cx="0" cy="0"/>
+          <a:chOff x="0" y="0"/>
+          <a:chExt cx="0" cy="0"/>
+        </a:xfrm>
+      </p:grpSpPr>
+      <p:sp>
+        <p:nvSpPr>
+          <p:cNvPr id="2" name="Slide Image Placeholder 1"/>
+          <p:cNvSpPr>
+            <a:spLocks noGrp="1" noRot="1" noChangeAspect="1"/>
+          </p:cNvSpPr>
+          <p:nvPr>
+            <p:ph type="sldImg"/>
+          </p:nvPr>
+        </p:nvSpPr>
+        <p:spPr/>
+      </p:sp>
+      <p:sp>
+        <p:nvSpPr>
+          <p:cNvPr id="3" name="Notes Placeholder 2"/>
+          <p:cNvSpPr>
+            <a:spLocks noGrp="1"/>
+          </p:cNvSpPr>
+          <p:nvPr>
+            <p:ph type="body" idx="1"/>
+          </p:nvPr>
+        </p:nvSpPr>
+        <p:spPr/>
+        <p:txBody>
+          <a:bodyPr/>
+          <a:lstStyle/>
+          <a:p>
+            <a:r>
+              <a:rPr lang="en-US" dirty="0"/>
+              <a:t/>
+            </a:r>
+            <a:endParaRPr lang="en-US" dirty="0"/>
+          </a:p>
+        </p:txBody>
+      </p:sp>
+      <p:sp>
+        <p:nvSpPr>
+          <p:cNvPr id="4" name="Slide Number Placeholder 3"/>
+          <p:cNvSpPr>
+            <a:spLocks noGrp="1"/>
+          </p:cNvSpPr>
+          <p:nvPr>
+            <p:ph type="sldNum" sz="quarter" idx="10"/>
+          </p:nvPr>
+        </p:nvSpPr>
+        <p:spPr/>
+        <p:txBody>
+          <a:bodyPr/>
+          <a:lstStyle/>
+          <a:p>
+            <a:fld id="{F7021451-1387-4CA6-816F-3879F97B5CBC}" type="slidenum">
+              <a:rPr lang="en-US"/>
+              <a:t>8</a:t>
+            </a:fld>
+            <a:endParaRPr lang="en-US"/>
+          </a:p>
+        </p:txBody>
+      </p:sp>
+    </p:spTree>
+    <p:extLst>
+      <p:ext uri="{BB962C8B-B14F-4D97-AF65-F5344CB8AC3E}">
+        <p14:creationId xmlns:p14="http://schemas.microsoft.com/office/powerpoint/2010/main" val="1024086991"/>
+      </p:ext>
+    </p:extLst>
+  </p:cSld>
+  <p:clrMapOvr>
+    <a:masterClrMapping/>
+  </p:clrMapOvr>
+</p:notes>
+</file>
+
+<file path=ppt/notesSlides/notesSlide9.xml><?xml version="1.0" encoding="utf-8"?>
+<p:notes xmlns:a="http://schemas.openxmlformats.org/drawingml/2006/main" xmlns:r="http://schemas.openxmlformats.org/officeDocument/2006/relationships" xmlns:p="http://schemas.openxmlformats.org/presentationml/2006/main">
+  <p:cSld>
+    <p:spTree>
+      <p:nvGrpSpPr>
+        <p:cNvPr id="1" name=""/>
+        <p:cNvGrpSpPr/>
+        <p:nvPr/>
+      </p:nvGrpSpPr>
+      <p:grpSpPr>
+        <a:xfrm>
+          <a:off x="0" y="0"/>
+          <a:ext cx="0" cy="0"/>
+          <a:chOff x="0" y="0"/>
+          <a:chExt cx="0" cy="0"/>
+        </a:xfrm>
+      </p:grpSpPr>
+      <p:sp>
+        <p:nvSpPr>
+          <p:cNvPr id="2" name="Slide Image Placeholder 1"/>
+          <p:cNvSpPr>
+            <a:spLocks noGrp="1" noRot="1" noChangeAspect="1"/>
+          </p:cNvSpPr>
+          <p:nvPr>
+            <p:ph type="sldImg"/>
+          </p:nvPr>
+        </p:nvSpPr>
+        <p:spPr/>
+      </p:sp>
+      <p:sp>
+        <p:nvSpPr>
+          <p:cNvPr id="3" name="Notes Placeholder 2"/>
+          <p:cNvSpPr>
+            <a:spLocks noGrp="1"/>
+          </p:cNvSpPr>
+          <p:nvPr>
+            <p:ph type="body" idx="1"/>
+          </p:nvPr>
+        </p:nvSpPr>
+        <p:spPr/>
+        <p:txBody>
+          <a:bodyPr/>
+          <a:lstStyle/>
+          <a:p>
+            <a:r>
+              <a:rPr lang="en-US" dirty="0"/>
+              <a:t/>
+            </a:r>
+            <a:endParaRPr lang="en-US" dirty="0"/>
+          </a:p>
+        </p:txBody>
+      </p:sp>
+      <p:sp>
+        <p:nvSpPr>
+          <p:cNvPr id="4" name="Slide Number Placeholder 3"/>
+          <p:cNvSpPr>
+            <a:spLocks noGrp="1"/>
+          </p:cNvSpPr>
+          <p:nvPr>
+            <p:ph type="sldNum" sz="quarter" idx="10"/>
+          </p:nvPr>
+        </p:nvSpPr>
+        <p:spPr/>
+        <p:txBody>
+          <a:bodyPr/>
+          <a:lstStyle/>
+          <a:p>
+            <a:fld id="{F7021451-1387-4CA6-816F-3879F97B5CBC}" type="slidenum">
+              <a:rPr lang="en-US"/>
+              <a:t>9</a:t>
             </a:fld>
             <a:endParaRPr lang="en-US"/>
           </a:p>
@@ -1210,13 +1566,6 @@
 <file path=ppt/slides/slide1.xml><?xml version="1.0" encoding="utf-8"?>
 <p:sld xmlns:a="http://schemas.openxmlformats.org/drawingml/2006/main" xmlns:r="http://schemas.openxmlformats.org/officeDocument/2006/relationships" xmlns:p="http://schemas.openxmlformats.org/presentationml/2006/main">
   <p:cSld name="Slide 1">
-    <p:bg>
-      <p:bgPr>
-        <a:solidFill>
-          <a:srgbClr val="1B2A4A"/>
-        </a:solidFill>
-      </p:bgPr>
-    </p:bg>
     <p:spTree>
       <p:nvGrpSpPr>
         <p:cNvPr id="1" name=""/>
@@ -1240,7 +1589,27 @@
         <p:spPr>
           <a:xfrm>
             <a:off x="0" y="0"/>
-            <a:ext cx="109728" cy="5143500"/>
+            <a:ext cx="9144000" cy="5143500"/>
+          </a:xfrm>
+          <a:prstGeom prst="rect">
+            <a:avLst/>
+          </a:prstGeom>
+          <a:solidFill>
+            <a:srgbClr val="1B2A4A"/>
+          </a:solidFill>
+          <a:ln/>
+        </p:spPr>
+      </p:sp>
+      <p:sp>
+        <p:nvSpPr>
+          <p:cNvPr id="3" name="Shape 1"/>
+          <p:cNvSpPr/>
+          <p:nvPr/>
+        </p:nvSpPr>
+        <p:spPr>
+          <a:xfrm>
+            <a:off x="0" y="4777740"/>
+            <a:ext cx="9144000" cy="365760"/>
           </a:xfrm>
           <a:prstGeom prst="rect">
             <a:avLst/>
@@ -1253,14 +1622,14 @@
       </p:sp>
       <p:sp>
         <p:nvSpPr>
-          <p:cNvPr id="3" name="Text 1"/>
+          <p:cNvPr id="4" name="Text 2"/>
           <p:cNvSpPr/>
           <p:nvPr/>
         </p:nvSpPr>
         <p:spPr>
           <a:xfrm>
             <a:off x="731520" y="1097280"/>
-            <a:ext cx="7772400" cy="1371600"/>
+            <a:ext cx="7680960" cy="457200"/>
           </a:xfrm>
           <a:prstGeom prst="rect">
             <a:avLst/>
@@ -1270,6 +1639,45 @@
         </p:spPr>
         <p:txBody>
           <a:bodyPr wrap="square" rtlCol="0" anchor="ctr"/>
+          <a:lstStyle/>
+          <a:p>
+            <a:pPr indent="0" marL="0">
+              <a:buNone/>
+            </a:pPr>
+            <a:r>
+              <a:rPr lang="en-US" sz="1400" b="1" spc="400" kern="0" dirty="0">
+                <a:solidFill>
+                  <a:srgbClr val="2A9D8F"/>
+                </a:solidFill>
+                <a:latin typeface="Calibri" pitchFamily="34" charset="0"/>
+                <a:ea typeface="Calibri" pitchFamily="34" charset="-122"/>
+                <a:cs typeface="Calibri" pitchFamily="34" charset="-120"/>
+              </a:rPr>
+              <a:t>GRADE 6 MATHEMATICS</a:t>
+            </a:r>
+            <a:endParaRPr lang="en-US" sz="1400" dirty="0"/>
+          </a:p>
+        </p:txBody>
+      </p:sp>
+      <p:sp>
+        <p:nvSpPr>
+          <p:cNvPr id="5" name="Text 3"/>
+          <p:cNvSpPr/>
+          <p:nvPr/>
+        </p:nvSpPr>
+        <p:spPr>
+          <a:xfrm>
+            <a:off x="731520" y="1645920"/>
+            <a:ext cx="7680960" cy="1463040"/>
+          </a:xfrm>
+          <a:prstGeom prst="rect">
+            <a:avLst/>
+          </a:prstGeom>
+          <a:noFill/>
+          <a:ln/>
+        </p:spPr>
+        <p:txBody>
+          <a:bodyPr wrap="square" rtlCol="0" anchor="t"/>
           <a:lstStyle/>
           <a:p>
             <a:pPr indent="0" marL="0">
@@ -1284,22 +1692,39 @@
                 <a:ea typeface="Georgia" pitchFamily="34" charset="-122"/>
                 <a:cs typeface="Georgia" pitchFamily="34" charset="-120"/>
               </a:rPr>
-              <a:t>Number Sequences &amp; Patterns</a:t>
+              <a:t>Number Sequences</a:t>
             </a:r>
             <a:endParaRPr lang="en-US" sz="4000" dirty="0"/>
           </a:p>
+          <a:p>
+            <a:pPr indent="0" marL="0">
+              <a:buNone/>
+            </a:pPr>
+            <a:r>
+              <a:rPr lang="en-US" sz="4000" b="1" dirty="0">
+                <a:solidFill>
+                  <a:srgbClr val="FFFFFF"/>
+                </a:solidFill>
+                <a:latin typeface="Georgia" pitchFamily="34" charset="0"/>
+                <a:ea typeface="Georgia" pitchFamily="34" charset="-122"/>
+                <a:cs typeface="Georgia" pitchFamily="34" charset="-120"/>
+              </a:rPr>
+              <a:t>&amp; Patterns</a:t>
+            </a:r>
+            <a:endParaRPr lang="en-US" sz="4000" dirty="0"/>
+          </a:p>
         </p:txBody>
       </p:sp>
       <p:sp>
         <p:nvSpPr>
-          <p:cNvPr id="4" name="Text 2"/>
-          <p:cNvSpPr/>
-          <p:nvPr/>
-        </p:nvSpPr>
-        <p:spPr>
-          <a:xfrm>
-            <a:off x="731520" y="2560320"/>
-            <a:ext cx="7772400" cy="548640"/>
+          <p:cNvPr id="6" name="Text 4"/>
+          <p:cNvSpPr/>
+          <p:nvPr/>
+        </p:nvSpPr>
+        <p:spPr>
+          <a:xfrm>
+            <a:off x="731520" y="3200400"/>
+            <a:ext cx="7680960" cy="548640"/>
           </a:xfrm>
           <a:prstGeom prst="rect">
             <a:avLst/>
@@ -1315,15 +1740,15 @@
               <a:buNone/>
             </a:pPr>
             <a:r>
-              <a:rPr lang="en-US" sz="1600" dirty="0">
+              <a:rPr lang="en-US" sz="1600" i="1" dirty="0">
                 <a:solidFill>
-                  <a:srgbClr val="E9C46A"/>
+                  <a:srgbClr val="9B9690"/>
                 </a:solidFill>
                 <a:latin typeface="Calibri" pitchFamily="34" charset="0"/>
                 <a:ea typeface="Calibri" pitchFamily="34" charset="-122"/>
                 <a:cs typeface="Calibri" pitchFamily="34" charset="-120"/>
               </a:rPr>
-              <a:t>Grade 6 Mathematics · Mr Zocchi</a:t>
+              <a:t>Finding rules that predict any term</a:t>
             </a:r>
             <a:endParaRPr lang="en-US" sz="1600" dirty="0"/>
           </a:p>
@@ -1331,36 +1756,14 @@
       </p:sp>
       <p:sp>
         <p:nvSpPr>
-          <p:cNvPr id="5" name="Shape 3"/>
-          <p:cNvSpPr/>
-          <p:nvPr/>
-        </p:nvSpPr>
-        <p:spPr>
-          <a:xfrm>
-            <a:off x="731520" y="3474720"/>
-            <a:ext cx="2011680" cy="411480"/>
-          </a:xfrm>
-          <a:prstGeom prst="roundRect">
-            <a:avLst>
-              <a:gd name="adj" fmla="val 17778"/>
-            </a:avLst>
-          </a:prstGeom>
-          <a:solidFill>
-            <a:srgbClr val="2A9D8F"/>
-          </a:solidFill>
-          <a:ln/>
-        </p:spPr>
-      </p:sp>
-      <p:sp>
-        <p:nvSpPr>
-          <p:cNvPr id="6" name="Text 4"/>
-          <p:cNvSpPr/>
-          <p:nvPr/>
-        </p:nvSpPr>
-        <p:spPr>
-          <a:xfrm>
-            <a:off x="731520" y="3474720"/>
-            <a:ext cx="2011680" cy="411480"/>
+          <p:cNvPr id="7" name="Text 5"/>
+          <p:cNvSpPr/>
+          <p:nvPr/>
+        </p:nvSpPr>
+        <p:spPr>
+          <a:xfrm>
+            <a:off x="731520" y="4206240"/>
+            <a:ext cx="3657600" cy="365760"/>
           </a:xfrm>
           <a:prstGeom prst="rect">
             <a:avLst/>
@@ -1372,19 +1775,19 @@
           <a:bodyPr wrap="square" rtlCol="0" anchor="ctr"/>
           <a:lstStyle/>
           <a:p>
-            <a:pPr algn="ctr" indent="0" marL="0">
+            <a:pPr indent="0" marL="0">
               <a:buNone/>
             </a:pPr>
             <a:r>
-              <a:rPr lang="en-US" sz="1200" b="1" dirty="0">
+              <a:rPr lang="en-US" sz="1200" dirty="0">
                 <a:solidFill>
-                  <a:srgbClr val="FFFFFF"/>
+                  <a:srgbClr val="6B6660"/>
                 </a:solidFill>
                 <a:latin typeface="Calibri" pitchFamily="34" charset="0"/>
                 <a:ea typeface="Calibri" pitchFamily="34" charset="-122"/>
                 <a:cs typeface="Calibri" pitchFamily="34" charset="-120"/>
               </a:rPr>
-              <a:t>Term 4 · Algebra</a:t>
+              <a:t>Mr Zocchi</a:t>
             </a:r>
             <a:endParaRPr lang="en-US" sz="1200" dirty="0"/>
           </a:p>
@@ -1401,13 +1804,6 @@
 <file path=ppt/slides/slide2.xml><?xml version="1.0" encoding="utf-8"?>
 <p:sld xmlns:a="http://schemas.openxmlformats.org/drawingml/2006/main" xmlns:r="http://schemas.openxmlformats.org/officeDocument/2006/relationships" xmlns:p="http://schemas.openxmlformats.org/presentationml/2006/main">
   <p:cSld name="Slide 2">
-    <p:bg>
-      <p:bgPr>
-        <a:solidFill>
-          <a:srgbClr val="FAF8F5"/>
-        </a:solidFill>
-      </p:bgPr>
-    </p:bg>
     <p:spTree>
       <p:nvGrpSpPr>
         <p:cNvPr id="1" name=""/>
@@ -1431,13 +1827,13 @@
         <p:spPr>
           <a:xfrm>
             <a:off x="0" y="0"/>
-            <a:ext cx="9144000" cy="54864"/>
+            <a:ext cx="9144000" cy="5143500"/>
           </a:xfrm>
           <a:prstGeom prst="rect">
             <a:avLst/>
           </a:prstGeom>
           <a:solidFill>
-            <a:srgbClr val="2A9D8F"/>
+            <a:srgbClr val="111D35"/>
           </a:solidFill>
           <a:ln/>
         </p:spPr>
@@ -1450,8 +1846,8 @@
         </p:nvSpPr>
         <p:spPr>
           <a:xfrm>
-            <a:off x="7772400" y="4709160"/>
-            <a:ext cx="1097280" cy="320040"/>
+            <a:off x="6858000" y="182880"/>
+            <a:ext cx="2286000" cy="2743200"/>
           </a:xfrm>
           <a:prstGeom prst="rect">
             <a:avLst/>
@@ -1463,86 +1859,75 @@
           <a:bodyPr wrap="square" rtlCol="0" anchor="ctr"/>
           <a:lstStyle/>
           <a:p>
-            <a:pPr algn="r" indent="0" marL="0">
+            <a:pPr algn="ctr" indent="0" marL="0">
               <a:buNone/>
             </a:pPr>
             <a:r>
-              <a:rPr lang="en-US" sz="900" dirty="0">
+              <a:rPr lang="en-US" sz="16000" b="1" dirty="0">
                 <a:solidFill>
-                  <a:srgbClr val="6B6660"/>
+                  <a:srgbClr val="2A9D8F">
+                    <a:alpha val="80000"/>
+                  </a:srgbClr>
+                </a:solidFill>
+                <a:latin typeface="Georgia" pitchFamily="34" charset="0"/>
+                <a:ea typeface="Georgia" pitchFamily="34" charset="-122"/>
+                <a:cs typeface="Georgia" pitchFamily="34" charset="-120"/>
+              </a:rPr>
+              <a:t>?</a:t>
+            </a:r>
+            <a:endParaRPr lang="en-US" sz="16000" dirty="0"/>
+          </a:p>
+        </p:txBody>
+      </p:sp>
+      <p:sp>
+        <p:nvSpPr>
+          <p:cNvPr id="4" name="Text 2"/>
+          <p:cNvSpPr/>
+          <p:nvPr/>
+        </p:nvSpPr>
+        <p:spPr>
+          <a:xfrm>
+            <a:off x="731520" y="548640"/>
+            <a:ext cx="2743200" cy="365760"/>
+          </a:xfrm>
+          <a:prstGeom prst="rect">
+            <a:avLst/>
+          </a:prstGeom>
+          <a:noFill/>
+          <a:ln/>
+        </p:spPr>
+        <p:txBody>
+          <a:bodyPr wrap="square" rtlCol="0" anchor="ctr"/>
+          <a:lstStyle/>
+          <a:p>
+            <a:pPr indent="0" marL="0">
+              <a:buNone/>
+            </a:pPr>
+            <a:r>
+              <a:rPr lang="en-US" sz="1200" b="1" spc="400" kern="0" dirty="0">
+                <a:solidFill>
+                  <a:srgbClr val="2A9D8F"/>
                 </a:solidFill>
                 <a:latin typeface="Calibri" pitchFamily="34" charset="0"/>
                 <a:ea typeface="Calibri" pitchFamily="34" charset="-122"/>
                 <a:cs typeface="Calibri" pitchFamily="34" charset="-120"/>
               </a:rPr>
-              <a:t>2 / 5</a:t>
-            </a:r>
-            <a:endParaRPr lang="en-US" sz="900" dirty="0"/>
+              <a:t>INQUIRY</a:t>
+            </a:r>
+            <a:endParaRPr lang="en-US" sz="1200" dirty="0"/>
           </a:p>
         </p:txBody>
       </p:sp>
       <p:sp>
         <p:nvSpPr>
-          <p:cNvPr id="4" name="Shape 2"/>
-          <p:cNvSpPr/>
-          <p:nvPr/>
-        </p:nvSpPr>
-        <p:spPr>
-          <a:xfrm>
-            <a:off x="1371600" y="914400"/>
-            <a:ext cx="6400800" cy="3200400"/>
-          </a:xfrm>
-          <a:prstGeom prst="rect">
-            <a:avLst/>
-          </a:prstGeom>
-          <a:solidFill>
-            <a:srgbClr val="FFFFFF"/>
-          </a:solidFill>
-          <a:ln w="12700">
-            <a:solidFill>
-              <a:srgbClr val="E5E2DC"/>
-            </a:solidFill>
-            <a:prstDash val="solid"/>
-          </a:ln>
-          <a:effectLst>
-            <a:outerShdw sx="100000" sy="100000" kx="0" ky="0" algn="bl" rotWithShape="0" blurRad="50800" dist="25400" dir="8100000">
-              <a:srgbClr val="000000">
-                <a:alpha val="10000"/>
-              </a:srgbClr>
-            </a:outerShdw>
-          </a:effectLst>
-        </p:spPr>
-      </p:sp>
-      <p:sp>
-        <p:nvSpPr>
-          <p:cNvPr id="5" name="Shape 3"/>
-          <p:cNvSpPr/>
-          <p:nvPr/>
-        </p:nvSpPr>
-        <p:spPr>
-          <a:xfrm>
-            <a:off x="1371600" y="914400"/>
-            <a:ext cx="91440" cy="3200400"/>
-          </a:xfrm>
-          <a:prstGeom prst="rect">
-            <a:avLst/>
-          </a:prstGeom>
-          <a:solidFill>
-            <a:srgbClr val="2A9D8F"/>
-          </a:solidFill>
-          <a:ln/>
-        </p:spPr>
-      </p:sp>
-      <p:sp>
-        <p:nvSpPr>
-          <p:cNvPr id="6" name="Text 4"/>
-          <p:cNvSpPr/>
-          <p:nvPr/>
-        </p:nvSpPr>
-        <p:spPr>
-          <a:xfrm>
-            <a:off x="1828800" y="1097280"/>
-            <a:ext cx="5669280" cy="640080"/>
+          <p:cNvPr id="5" name="Text 3"/>
+          <p:cNvSpPr/>
+          <p:nvPr/>
+        </p:nvSpPr>
+        <p:spPr>
+          <a:xfrm>
+            <a:off x="731520" y="1005840"/>
+            <a:ext cx="6858000" cy="1463040"/>
           </a:xfrm>
           <a:prstGeom prst="rect">
             <a:avLst/>
@@ -1551,37 +1936,37 @@
           <a:ln/>
         </p:spPr>
         <p:txBody>
-          <a:bodyPr wrap="square" rtlCol="0" anchor="ctr"/>
+          <a:bodyPr wrap="square" rtlCol="0" anchor="t"/>
           <a:lstStyle/>
           <a:p>
             <a:pPr indent="0" marL="0">
               <a:buNone/>
             </a:pPr>
             <a:r>
-              <a:rPr lang="en-US" sz="2400" b="1" dirty="0">
+              <a:rPr lang="en-US" sz="2800" b="1" dirty="0">
                 <a:solidFill>
-                  <a:srgbClr val="1B2A4A"/>
+                  <a:srgbClr val="FFFFFF"/>
                 </a:solidFill>
                 <a:latin typeface="Georgia" pitchFamily="34" charset="0"/>
                 <a:ea typeface="Georgia" pitchFamily="34" charset="-122"/>
                 <a:cs typeface="Georgia" pitchFamily="34" charset="-120"/>
               </a:rPr>
-              <a:t>Patterns in Numbers</a:t>
-            </a:r>
-            <a:endParaRPr lang="en-US" sz="2400" dirty="0"/>
+              <a:t>The Seoul subway fare goes: 1350, 1450, 1550, 1650... Can you predict the fare for 20 km without listing every value?</a:t>
+            </a:r>
+            <a:endParaRPr lang="en-US" sz="2800" dirty="0"/>
           </a:p>
         </p:txBody>
       </p:sp>
       <p:sp>
         <p:nvSpPr>
-          <p:cNvPr id="7" name="Text 5"/>
-          <p:cNvSpPr/>
-          <p:nvPr/>
-        </p:nvSpPr>
-        <p:spPr>
-          <a:xfrm>
-            <a:off x="1828800" y="1828800"/>
-            <a:ext cx="5669280" cy="2011680"/>
+          <p:cNvPr id="6" name="Text 4"/>
+          <p:cNvSpPr/>
+          <p:nvPr/>
+        </p:nvSpPr>
+        <p:spPr>
+          <a:xfrm>
+            <a:off x="731520" y="2560320"/>
+            <a:ext cx="6858000" cy="548640"/>
           </a:xfrm>
           <a:prstGeom prst="rect">
             <a:avLst/>
@@ -1590,27 +1975,168 @@
           <a:ln/>
         </p:spPr>
         <p:txBody>
-          <a:bodyPr wrap="square" rtlCol="0" anchor="t"/>
+          <a:bodyPr wrap="square" rtlCol="0" anchor="ctr"/>
           <a:lstStyle/>
           <a:p>
             <a:pPr indent="0" marL="0">
-              <a:lnSpc>
-                <a:spcPct val="130000"/>
-              </a:lnSpc>
               <a:buNone/>
             </a:pPr>
             <a:r>
-              <a:rPr lang="en-US" sz="1500" dirty="0">
+              <a:rPr lang="en-US" sz="1400" i="1" dirty="0">
                 <a:solidFill>
-                  <a:srgbClr val="3D3A36"/>
+                  <a:srgbClr val="9B9690"/>
                 </a:solidFill>
                 <a:latin typeface="Calibri" pitchFamily="34" charset="0"/>
                 <a:ea typeface="Calibri" pitchFamily="34" charset="-122"/>
                 <a:cs typeface="Calibri" pitchFamily="34" charset="-120"/>
               </a:rPr>
-              <a:t>A sequence is a list of numbers that follows a pattern. The pattern is described by a rule — either a term-to-term rule (how to get from one term to the next) or a position-to-term rule (a formula using the term number). Finding and describing patterns is a key skill in algebra.</a:t>
-            </a:r>
-            <a:endParaRPr lang="en-US" sz="1500" dirty="0"/>
+              <a:t>Sequences follow rules. If you find the rule, you can predict any term — even the 1000th.</a:t>
+            </a:r>
+            <a:endParaRPr lang="en-US" sz="1400" dirty="0"/>
+          </a:p>
+        </p:txBody>
+      </p:sp>
+      <p:sp>
+        <p:nvSpPr>
+          <p:cNvPr id="7" name="Shape 5"/>
+          <p:cNvSpPr/>
+          <p:nvPr/>
+        </p:nvSpPr>
+        <p:spPr>
+          <a:xfrm>
+            <a:off x="548640" y="3200400"/>
+            <a:ext cx="7315200" cy="1645920"/>
+          </a:xfrm>
+          <a:prstGeom prst="rect">
+            <a:avLst/>
+          </a:prstGeom>
+          <a:solidFill>
+            <a:srgbClr val="243660"/>
+          </a:solidFill>
+          <a:ln/>
+        </p:spPr>
+      </p:sp>
+      <p:sp>
+        <p:nvSpPr>
+          <p:cNvPr id="8" name="Text 6"/>
+          <p:cNvSpPr/>
+          <p:nvPr/>
+        </p:nvSpPr>
+        <p:spPr>
+          <a:xfrm>
+            <a:off x="731520" y="3246120"/>
+            <a:ext cx="3657600" cy="320040"/>
+          </a:xfrm>
+          <a:prstGeom prst="rect">
+            <a:avLst/>
+          </a:prstGeom>
+          <a:noFill/>
+          <a:ln/>
+        </p:spPr>
+        <p:txBody>
+          <a:bodyPr wrap="square" rtlCol="0" anchor="ctr"/>
+          <a:lstStyle/>
+          <a:p>
+            <a:pPr indent="0" marL="0">
+              <a:buNone/>
+            </a:pPr>
+            <a:r>
+              <a:rPr lang="en-US" sz="1100" b="1" spc="200" kern="0" dirty="0">
+                <a:solidFill>
+                  <a:srgbClr val="2A9D8F"/>
+                </a:solidFill>
+                <a:latin typeface="Calibri" pitchFamily="34" charset="0"/>
+                <a:ea typeface="Calibri" pitchFamily="34" charset="-122"/>
+                <a:cs typeface="Calibri" pitchFamily="34" charset="-120"/>
+              </a:rPr>
+              <a:t>Think — Pair — Share</a:t>
+            </a:r>
+            <a:endParaRPr lang="en-US" sz="1100" dirty="0"/>
+          </a:p>
+        </p:txBody>
+      </p:sp>
+      <p:sp>
+        <p:nvSpPr>
+          <p:cNvPr id="9" name="Text 7"/>
+          <p:cNvSpPr/>
+          <p:nvPr/>
+        </p:nvSpPr>
+        <p:spPr>
+          <a:xfrm>
+            <a:off x="731520" y="3566160"/>
+            <a:ext cx="6949440" cy="1188720"/>
+          </a:xfrm>
+          <a:prstGeom prst="rect">
+            <a:avLst/>
+          </a:prstGeom>
+          <a:noFill/>
+          <a:ln/>
+        </p:spPr>
+        <p:txBody>
+          <a:bodyPr wrap="square" rtlCol="0" anchor="ctr"/>
+          <a:lstStyle/>
+          <a:p>
+            <a:pPr marL="342900" indent="-342900">
+              <a:spcAft>
+                <a:spcPts val="600"/>
+              </a:spcAft>
+              <a:buSzPct val="100000"/>
+              <a:buChar char="•"/>
+            </a:pPr>
+            <a:r>
+              <a:rPr lang="en-US" sz="1400" dirty="0">
+                <a:solidFill>
+                  <a:srgbClr val="E5E2DC"/>
+                </a:solidFill>
+                <a:latin typeface="Calibri" pitchFamily="34" charset="0"/>
+                <a:ea typeface="Calibri" pitchFamily="34" charset="-122"/>
+                <a:cs typeface="Calibri" pitchFamily="34" charset="-120"/>
+              </a:rPr>
+              <a:t>What's being added each time?</a:t>
+            </a:r>
+            <a:endParaRPr lang="en-US" sz="1400" dirty="0"/>
+          </a:p>
+          <a:p>
+            <a:pPr marL="342900" indent="-342900">
+              <a:spcAft>
+                <a:spcPts val="600"/>
+              </a:spcAft>
+              <a:buSzPct val="100000"/>
+              <a:buChar char="•"/>
+            </a:pPr>
+            <a:r>
+              <a:rPr lang="en-US" sz="1400" dirty="0">
+                <a:solidFill>
+                  <a:srgbClr val="E5E2DC"/>
+                </a:solidFill>
+                <a:latin typeface="Calibri" pitchFamily="34" charset="0"/>
+                <a:ea typeface="Calibri" pitchFamily="34" charset="-122"/>
+                <a:cs typeface="Calibri" pitchFamily="34" charset="-120"/>
+              </a:rPr>
+              <a:t>Can you write a formula using n (km)?</a:t>
+            </a:r>
+            <a:endParaRPr lang="en-US" sz="1400" dirty="0"/>
+          </a:p>
+          <a:p>
+            <a:pPr marL="342900" indent="-342900">
+              <a:spcAft>
+                <a:spcPts val="600"/>
+              </a:spcAft>
+              <a:buSzPct val="100000"/>
+              <a:buChar char="•"/>
+            </a:pPr>
+            <a:r>
+              <a:rPr lang="en-US" sz="1400" dirty="0">
+                <a:solidFill>
+                  <a:srgbClr val="E5E2DC"/>
+                </a:solidFill>
+                <a:latin typeface="Calibri" pitchFamily="34" charset="0"/>
+                <a:ea typeface="Calibri" pitchFamily="34" charset="-122"/>
+                <a:cs typeface="Calibri" pitchFamily="34" charset="-120"/>
+              </a:rPr>
+              <a:t>How is this different from just adding repeatedly?</a:t>
+            </a:r>
+            <a:endParaRPr lang="en-US" sz="1400" dirty="0"/>
           </a:p>
         </p:txBody>
       </p:sp>
@@ -1655,7 +2181,27 @@
         <p:spPr>
           <a:xfrm>
             <a:off x="0" y="0"/>
-            <a:ext cx="9144000" cy="54864"/>
+            <a:ext cx="9144000" cy="822960"/>
+          </a:xfrm>
+          <a:prstGeom prst="rect">
+            <a:avLst/>
+          </a:prstGeom>
+          <a:solidFill>
+            <a:srgbClr val="FFFFFF"/>
+          </a:solidFill>
+          <a:ln/>
+        </p:spPr>
+      </p:sp>
+      <p:sp>
+        <p:nvSpPr>
+          <p:cNvPr id="3" name="Shape 1"/>
+          <p:cNvSpPr/>
+          <p:nvPr/>
+        </p:nvSpPr>
+        <p:spPr>
+          <a:xfrm>
+            <a:off x="0" y="795528"/>
+            <a:ext cx="9144000" cy="27432"/>
           </a:xfrm>
           <a:prstGeom prst="rect">
             <a:avLst/>
@@ -1668,14 +2214,14 @@
       </p:sp>
       <p:sp>
         <p:nvSpPr>
-          <p:cNvPr id="3" name="Text 1"/>
-          <p:cNvSpPr/>
-          <p:nvPr/>
-        </p:nvSpPr>
-        <p:spPr>
-          <a:xfrm>
-            <a:off x="7772400" y="4709160"/>
-            <a:ext cx="1097280" cy="320040"/>
+          <p:cNvPr id="4" name="Text 2"/>
+          <p:cNvSpPr/>
+          <p:nvPr/>
+        </p:nvSpPr>
+        <p:spPr>
+          <a:xfrm>
+            <a:off x="640080" y="91440"/>
+            <a:ext cx="7863840" cy="640080"/>
           </a:xfrm>
           <a:prstGeom prst="rect">
             <a:avLst/>
@@ -1684,53 +2230,14 @@
           <a:ln/>
         </p:spPr>
         <p:txBody>
-          <a:bodyPr wrap="square" rtlCol="0" anchor="ctr"/>
-          <a:lstStyle/>
-          <a:p>
-            <a:pPr algn="r" indent="0" marL="0">
-              <a:buNone/>
-            </a:pPr>
-            <a:r>
-              <a:rPr lang="en-US" sz="900" dirty="0">
-                <a:solidFill>
-                  <a:srgbClr val="6B6660"/>
-                </a:solidFill>
-                <a:latin typeface="Calibri" pitchFamily="34" charset="0"/>
-                <a:ea typeface="Calibri" pitchFamily="34" charset="-122"/>
-                <a:cs typeface="Calibri" pitchFamily="34" charset="-120"/>
-              </a:rPr>
-              <a:t>3 / 5</a:t>
-            </a:r>
-            <a:endParaRPr lang="en-US" sz="900" dirty="0"/>
-          </a:p>
-        </p:txBody>
-      </p:sp>
-      <p:sp>
-        <p:nvSpPr>
-          <p:cNvPr id="4" name="Text 2"/>
-          <p:cNvSpPr/>
-          <p:nvPr/>
-        </p:nvSpPr>
-        <p:spPr>
-          <a:xfrm>
-            <a:off x="457200" y="274320"/>
-            <a:ext cx="8229600" cy="640080"/>
-          </a:xfrm>
-          <a:prstGeom prst="rect">
-            <a:avLst/>
-          </a:prstGeom>
-          <a:noFill/>
-          <a:ln/>
-        </p:spPr>
-        <p:txBody>
-          <a:bodyPr wrap="square" rtlCol="0" anchor="ctr"/>
+          <a:bodyPr wrap="square" lIns="0" tIns="0" rIns="0" bIns="0" rtlCol="0" anchor="ctr"/>
           <a:lstStyle/>
           <a:p>
             <a:pPr indent="0" marL="0">
               <a:buNone/>
             </a:pPr>
             <a:r>
-              <a:rPr lang="en-US" sz="2600" b="1" dirty="0">
+              <a:rPr lang="en-US" sz="2200" b="1" dirty="0">
                 <a:solidFill>
                   <a:srgbClr val="1B2A4A"/>
                 </a:solidFill>
@@ -1738,9 +2245,9 @@
                 <a:ea typeface="Georgia" pitchFamily="34" charset="-122"/>
                 <a:cs typeface="Georgia" pitchFamily="34" charset="-120"/>
               </a:rPr>
-              <a:t>Term-to-Term Rules</a:t>
-            </a:r>
-            <a:endParaRPr lang="en-US" sz="2600" dirty="0"/>
+              <a:t>What Is a Sequence?</a:t>
+            </a:r>
+            <a:endParaRPr lang="en-US" sz="2200" dirty="0"/>
           </a:p>
         </p:txBody>
       </p:sp>
@@ -1752,8 +2259,8 @@
         </p:nvSpPr>
         <p:spPr>
           <a:xfrm>
-            <a:off x="457200" y="1188720"/>
-            <a:ext cx="3840480" cy="3474720"/>
+            <a:off x="640080" y="1005840"/>
+            <a:ext cx="7863840" cy="2926080"/>
           </a:xfrm>
           <a:prstGeom prst="rect">
             <a:avLst/>
@@ -1762,18 +2269,18 @@
           <a:ln/>
         </p:spPr>
         <p:txBody>
-          <a:bodyPr wrap="square" rtlCol="0" anchor="t"/>
+          <a:bodyPr wrap="square" rtlCol="0" anchor="ctr"/>
           <a:lstStyle/>
           <a:p>
             <a:pPr marL="342900" indent="-342900">
               <a:spcAft>
-                <a:spcPts val="600"/>
+                <a:spcPts val="800"/>
               </a:spcAft>
               <a:buSzPct val="100000"/>
               <a:buChar char="•"/>
             </a:pPr>
             <a:r>
-              <a:rPr lang="en-US" sz="1400" dirty="0">
+              <a:rPr lang="en-US" sz="1600" dirty="0">
                 <a:solidFill>
                   <a:srgbClr val="3D3A36"/>
                 </a:solidFill>
@@ -1781,20 +2288,20 @@
                 <a:ea typeface="Calibri" pitchFamily="34" charset="-122"/>
                 <a:cs typeface="Calibri" pitchFamily="34" charset="-120"/>
               </a:rPr>
-              <a:t>Add a constant: 3, 7, 11, 15, 19... (add 4)</a:t>
-            </a:r>
-            <a:endParaRPr lang="en-US" sz="1400" dirty="0"/>
+              <a:t>An ordered list of numbers following a rule.</a:t>
+            </a:r>
+            <a:endParaRPr lang="en-US" sz="1600" dirty="0"/>
           </a:p>
           <a:p>
             <a:pPr marL="342900" indent="-342900">
               <a:spcAft>
-                <a:spcPts val="600"/>
+                <a:spcPts val="800"/>
               </a:spcAft>
               <a:buSzPct val="100000"/>
               <a:buChar char="•"/>
             </a:pPr>
             <a:r>
-              <a:rPr lang="en-US" sz="1400" dirty="0">
+              <a:rPr lang="en-US" sz="1600" dirty="0">
                 <a:solidFill>
                   <a:srgbClr val="3D3A36"/>
                 </a:solidFill>
@@ -1802,20 +2309,20 @@
                 <a:ea typeface="Calibri" pitchFamily="34" charset="-122"/>
                 <a:cs typeface="Calibri" pitchFamily="34" charset="-120"/>
               </a:rPr>
-              <a:t>Subtract: 20, 17, 14, 11... (subtract 3)</a:t>
-            </a:r>
-            <a:endParaRPr lang="en-US" sz="1400" dirty="0"/>
+              <a:t>Each number is called a TERM.</a:t>
+            </a:r>
+            <a:endParaRPr lang="en-US" sz="1600" dirty="0"/>
           </a:p>
           <a:p>
             <a:pPr marL="342900" indent="-342900">
               <a:spcAft>
-                <a:spcPts val="600"/>
+                <a:spcPts val="800"/>
               </a:spcAft>
               <a:buSzPct val="100000"/>
               <a:buChar char="•"/>
             </a:pPr>
             <a:r>
-              <a:rPr lang="en-US" sz="1400" dirty="0">
+              <a:rPr lang="en-US" sz="1600" dirty="0">
                 <a:solidFill>
                   <a:srgbClr val="3D3A36"/>
                 </a:solidFill>
@@ -1823,20 +2330,20 @@
                 <a:ea typeface="Calibri" pitchFamily="34" charset="-122"/>
                 <a:cs typeface="Calibri" pitchFamily="34" charset="-120"/>
               </a:rPr>
-              <a:t>Multiply: 2, 6, 18, 54... (multiply by 3)</a:t>
-            </a:r>
-            <a:endParaRPr lang="en-US" sz="1400" dirty="0"/>
+              <a:t>Arithmetic sequence: same amount added each time.</a:t>
+            </a:r>
+            <a:endParaRPr lang="en-US" sz="1600" dirty="0"/>
           </a:p>
           <a:p>
             <a:pPr marL="342900" indent="-342900">
               <a:spcAft>
-                <a:spcPts val="600"/>
+                <a:spcPts val="800"/>
               </a:spcAft>
               <a:buSzPct val="100000"/>
               <a:buChar char="•"/>
             </a:pPr>
             <a:r>
-              <a:rPr lang="en-US" sz="1400" dirty="0">
+              <a:rPr lang="en-US" sz="1600" dirty="0">
                 <a:solidFill>
                   <a:srgbClr val="3D3A36"/>
                 </a:solidFill>
@@ -1844,20 +2351,85 @@
                 <a:ea typeface="Calibri" pitchFamily="34" charset="-122"/>
                 <a:cs typeface="Calibri" pitchFamily="34" charset="-120"/>
               </a:rPr>
-              <a:t>The common difference = what you add/subtract each time</a:t>
-            </a:r>
-            <a:endParaRPr lang="en-US" sz="1400" dirty="0"/>
-          </a:p>
-          <a:p>
-            <a:pPr marL="342900" indent="-342900">
-              <a:spcAft>
-                <a:spcPts val="600"/>
-              </a:spcAft>
-              <a:buSzPct val="100000"/>
-              <a:buChar char="•"/>
+              <a:t>The amount added = common difference (d).</a:t>
+            </a:r>
+            <a:endParaRPr lang="en-US" sz="1600" dirty="0"/>
+          </a:p>
+        </p:txBody>
+      </p:sp>
+      <p:sp>
+        <p:nvSpPr>
+          <p:cNvPr id="6" name="Shape 4"/>
+          <p:cNvSpPr/>
+          <p:nvPr/>
+        </p:nvSpPr>
+        <p:spPr>
+          <a:xfrm>
+            <a:off x="640080" y="4114800"/>
+            <a:ext cx="7863840" cy="731520"/>
+          </a:xfrm>
+          <a:prstGeom prst="rect">
+            <a:avLst/>
+          </a:prstGeom>
+          <a:solidFill>
+            <a:srgbClr val="E8F5F3"/>
+          </a:solidFill>
+          <a:ln/>
+          <a:effectLst>
+            <a:outerShdw sx="100000" sy="100000" kx="0" ky="0" algn="bl" rotWithShape="0" blurRad="76200" dist="25400" dir="8100000">
+              <a:srgbClr val="000000">
+                <a:alpha val="12000"/>
+              </a:srgbClr>
+            </a:outerShdw>
+          </a:effectLst>
+        </p:spPr>
+      </p:sp>
+      <p:sp>
+        <p:nvSpPr>
+          <p:cNvPr id="7" name="Shape 5"/>
+          <p:cNvSpPr/>
+          <p:nvPr/>
+        </p:nvSpPr>
+        <p:spPr>
+          <a:xfrm>
+            <a:off x="640080" y="4114800"/>
+            <a:ext cx="64008" cy="731520"/>
+          </a:xfrm>
+          <a:prstGeom prst="rect">
+            <a:avLst/>
+          </a:prstGeom>
+          <a:solidFill>
+            <a:srgbClr val="2A9D8F"/>
+          </a:solidFill>
+          <a:ln/>
+        </p:spPr>
+      </p:sp>
+      <p:sp>
+        <p:nvSpPr>
+          <p:cNvPr id="8" name="Text 6"/>
+          <p:cNvSpPr/>
+          <p:nvPr/>
+        </p:nvSpPr>
+        <p:spPr>
+          <a:xfrm>
+            <a:off x="914400" y="4160520"/>
+            <a:ext cx="7406640" cy="640080"/>
+          </a:xfrm>
+          <a:prstGeom prst="rect">
+            <a:avLst/>
+          </a:prstGeom>
+          <a:noFill/>
+          <a:ln/>
+        </p:spPr>
+        <p:txBody>
+          <a:bodyPr wrap="square" rtlCol="0" anchor="ctr"/>
+          <a:lstStyle/>
+          <a:p>
+            <a:pPr indent="0" marL="0">
+              <a:buNone/>
             </a:pPr>
             <a:r>
-              <a:rPr lang="en-US" sz="1400" dirty="0">
+              <a:rPr lang="en-US" sz="1300" i="1" dirty="0">
                 <a:solidFill>
                   <a:srgbClr val="3D3A36"/>
                 </a:solidFill>
@@ -1865,212 +2437,9 @@
                 <a:ea typeface="Calibri" pitchFamily="34" charset="-122"/>
                 <a:cs typeface="Calibri" pitchFamily="34" charset="-120"/>
               </a:rPr>
-              <a:t>Example: 5, 8, 11, 14 → common difference = +3</a:t>
-            </a:r>
-            <a:endParaRPr lang="en-US" sz="1400" dirty="0"/>
-          </a:p>
-        </p:txBody>
-      </p:sp>
-      <p:sp>
-        <p:nvSpPr>
-          <p:cNvPr id="6" name="Shape 4"/>
-          <p:cNvSpPr/>
-          <p:nvPr/>
-        </p:nvSpPr>
-        <p:spPr>
-          <a:xfrm>
-            <a:off x="4846320" y="1188720"/>
-            <a:ext cx="3840480" cy="3474720"/>
-          </a:xfrm>
-          <a:prstGeom prst="rect">
-            <a:avLst/>
-          </a:prstGeom>
-          <a:solidFill>
-            <a:srgbClr val="FFFFFF"/>
-          </a:solidFill>
-          <a:ln w="12700">
-            <a:solidFill>
-              <a:srgbClr val="E5E2DC"/>
-            </a:solidFill>
-            <a:prstDash val="solid"/>
-          </a:ln>
-          <a:effectLst>
-            <a:outerShdw sx="100000" sy="100000" kx="0" ky="0" algn="bl" rotWithShape="0" blurRad="50800" dist="25400" dir="8100000">
-              <a:srgbClr val="000000">
-                <a:alpha val="10000"/>
-              </a:srgbClr>
-            </a:outerShdw>
-          </a:effectLst>
-        </p:spPr>
-      </p:sp>
-      <p:sp>
-        <p:nvSpPr>
-          <p:cNvPr id="7" name="Shape 5"/>
-          <p:cNvSpPr/>
-          <p:nvPr/>
-        </p:nvSpPr>
-        <p:spPr>
-          <a:xfrm>
-            <a:off x="4846320" y="1188720"/>
-            <a:ext cx="3840480" cy="54864"/>
-          </a:xfrm>
-          <a:prstGeom prst="rect">
-            <a:avLst/>
-          </a:prstGeom>
-          <a:solidFill>
-            <a:srgbClr val="2A9D8F"/>
-          </a:solidFill>
-          <a:ln/>
-        </p:spPr>
-      </p:sp>
-      <p:sp>
-        <p:nvSpPr>
-          <p:cNvPr id="8" name="Text 6"/>
-          <p:cNvSpPr/>
-          <p:nvPr/>
-        </p:nvSpPr>
-        <p:spPr>
-          <a:xfrm>
-            <a:off x="5120640" y="1371600"/>
-            <a:ext cx="3291840" cy="3108960"/>
-          </a:xfrm>
-          <a:prstGeom prst="rect">
-            <a:avLst/>
-          </a:prstGeom>
-          <a:noFill/>
-          <a:ln/>
-        </p:spPr>
-        <p:txBody>
-          <a:bodyPr wrap="square" rtlCol="0" anchor="t"/>
-          <a:lstStyle/>
-          <a:p>
-            <a:pPr indent="0" marL="0">
-              <a:spcAft>
-                <a:spcPts val="400"/>
-              </a:spcAft>
-              <a:buNone/>
-            </a:pPr>
-            <a:r>
-              <a:rPr lang="en-US" sz="1600" b="1" dirty="0">
-                <a:solidFill>
-                  <a:srgbClr val="1B2A4A"/>
-                </a:solidFill>
-                <a:latin typeface="Calibri" pitchFamily="34" charset="0"/>
-                <a:ea typeface="Calibri" pitchFamily="34" charset="-122"/>
-                <a:cs typeface="Calibri" pitchFamily="34" charset="-120"/>
-              </a:rPr>
-              <a:t>Position-to-Term Rules (nth term)</a:t>
-            </a:r>
-            <a:endParaRPr lang="en-US" sz="1600" dirty="0"/>
-          </a:p>
-          <a:p>
-            <a:pPr indent="0" marL="0">
-              <a:spcAft>
-                <a:spcPts val="400"/>
-              </a:spcAft>
-              <a:buNone/>
-            </a:pPr>
-            <a:endParaRPr lang="en-US" sz="1600" dirty="0"/>
-          </a:p>
-          <a:p>
-            <a:pPr indent="0" marL="0">
-              <a:spcAft>
-                <a:spcPts val="400"/>
-              </a:spcAft>
-              <a:buNone/>
-            </a:pPr>
-            <a:r>
-              <a:rPr lang="en-US" sz="1300" dirty="0">
-                <a:solidFill>
-                  <a:srgbClr val="3D3A36"/>
-                </a:solidFill>
-                <a:latin typeface="Calibri" pitchFamily="34" charset="0"/>
-                <a:ea typeface="Calibri" pitchFamily="34" charset="-122"/>
-                <a:cs typeface="Calibri" pitchFamily="34" charset="-120"/>
-              </a:rPr>
-              <a:t>A formula that gives any term from its position number (n)</a:t>
-            </a:r>
-            <a:endParaRPr lang="en-US" sz="1600" dirty="0"/>
-          </a:p>
-          <a:p>
-            <a:pPr indent="0" marL="0">
-              <a:spcAft>
-                <a:spcPts val="400"/>
-              </a:spcAft>
-              <a:buNone/>
-            </a:pPr>
-            <a:r>
-              <a:rPr lang="en-US" sz="1300" dirty="0">
-                <a:solidFill>
-                  <a:srgbClr val="3D3A36"/>
-                </a:solidFill>
-                <a:latin typeface="Calibri" pitchFamily="34" charset="0"/>
-                <a:ea typeface="Calibri" pitchFamily="34" charset="-122"/>
-                <a:cs typeface="Calibri" pitchFamily="34" charset="-120"/>
-              </a:rPr>
-              <a:t>Sequence: 4, 7, 10, 13... → rule: 3n + 1</a:t>
-            </a:r>
-            <a:endParaRPr lang="en-US" sz="1600" dirty="0"/>
-          </a:p>
-          <a:p>
-            <a:pPr indent="0" marL="0">
-              <a:spcAft>
-                <a:spcPts val="400"/>
-              </a:spcAft>
-              <a:buNone/>
-            </a:pPr>
-            <a:r>
-              <a:rPr lang="en-US" sz="1300" dirty="0">
-                <a:solidFill>
-                  <a:srgbClr val="3D3A36"/>
-                </a:solidFill>
-                <a:latin typeface="Calibri" pitchFamily="34" charset="0"/>
-                <a:ea typeface="Calibri" pitchFamily="34" charset="-122"/>
-                <a:cs typeface="Calibri" pitchFamily="34" charset="-120"/>
-              </a:rPr>
-              <a:t>Check: n=1: 3(1)+1=4 ✓, n=2: 3(2)+1=7 ✓</a:t>
-            </a:r>
-            <a:endParaRPr lang="en-US" sz="1600" dirty="0"/>
-          </a:p>
-          <a:p>
-            <a:pPr indent="0" marL="0">
-              <a:spcAft>
-                <a:spcPts val="400"/>
-              </a:spcAft>
-              <a:buNone/>
-            </a:pPr>
-            <a:r>
-              <a:rPr lang="en-US" sz="1300" dirty="0">
-                <a:solidFill>
-                  <a:srgbClr val="3D3A36"/>
-                </a:solidFill>
-                <a:latin typeface="Calibri" pitchFamily="34" charset="0"/>
-                <a:ea typeface="Calibri" pitchFamily="34" charset="-122"/>
-                <a:cs typeface="Calibri" pitchFamily="34" charset="-120"/>
-              </a:rPr>
-              <a:t>Common difference = coefficient of n</a:t>
-            </a:r>
-            <a:endParaRPr lang="en-US" sz="1600" dirty="0"/>
-          </a:p>
-          <a:p>
-            <a:pPr indent="0" marL="0">
-              <a:spcAft>
-                <a:spcPts val="400"/>
-              </a:spcAft>
-              <a:buNone/>
-            </a:pPr>
-            <a:r>
-              <a:rPr lang="en-US" sz="1300" dirty="0">
-                <a:solidFill>
-                  <a:srgbClr val="3D3A36"/>
-                </a:solidFill>
-                <a:latin typeface="Calibri" pitchFamily="34" charset="0"/>
-                <a:ea typeface="Calibri" pitchFamily="34" charset="-122"/>
-                <a:cs typeface="Calibri" pitchFamily="34" charset="-120"/>
-              </a:rPr>
-              <a:t>The +1 is found by: first term minus common difference: 4−3=1</a:t>
-            </a:r>
-            <a:endParaRPr lang="en-US" sz="1600" dirty="0"/>
+              <a:t>5, 8, 11, 14, 17... → common difference = 3</a:t>
+            </a:r>
+            <a:endParaRPr lang="en-US" sz="1300" dirty="0"/>
           </a:p>
         </p:txBody>
       </p:sp>
@@ -2115,7 +2484,27 @@
         <p:spPr>
           <a:xfrm>
             <a:off x="0" y="0"/>
-            <a:ext cx="9144000" cy="54864"/>
+            <a:ext cx="9144000" cy="822960"/>
+          </a:xfrm>
+          <a:prstGeom prst="rect">
+            <a:avLst/>
+          </a:prstGeom>
+          <a:solidFill>
+            <a:srgbClr val="FFFFFF"/>
+          </a:solidFill>
+          <a:ln/>
+        </p:spPr>
+      </p:sp>
+      <p:sp>
+        <p:nvSpPr>
+          <p:cNvPr id="3" name="Shape 1"/>
+          <p:cNvSpPr/>
+          <p:nvPr/>
+        </p:nvSpPr>
+        <p:spPr>
+          <a:xfrm>
+            <a:off x="0" y="795528"/>
+            <a:ext cx="9144000" cy="27432"/>
           </a:xfrm>
           <a:prstGeom prst="rect">
             <a:avLst/>
@@ -2128,14 +2517,14 @@
       </p:sp>
       <p:sp>
         <p:nvSpPr>
-          <p:cNvPr id="3" name="Text 1"/>
-          <p:cNvSpPr/>
-          <p:nvPr/>
-        </p:nvSpPr>
-        <p:spPr>
-          <a:xfrm>
-            <a:off x="7772400" y="4709160"/>
-            <a:ext cx="1097280" cy="320040"/>
+          <p:cNvPr id="4" name="Text 2"/>
+          <p:cNvSpPr/>
+          <p:nvPr/>
+        </p:nvSpPr>
+        <p:spPr>
+          <a:xfrm>
+            <a:off x="640080" y="91440"/>
+            <a:ext cx="7863840" cy="640080"/>
           </a:xfrm>
           <a:prstGeom prst="rect">
             <a:avLst/>
@@ -2144,53 +2533,14 @@
           <a:ln/>
         </p:spPr>
         <p:txBody>
-          <a:bodyPr wrap="square" rtlCol="0" anchor="ctr"/>
-          <a:lstStyle/>
-          <a:p>
-            <a:pPr algn="r" indent="0" marL="0">
-              <a:buNone/>
-            </a:pPr>
-            <a:r>
-              <a:rPr lang="en-US" sz="900" dirty="0">
-                <a:solidFill>
-                  <a:srgbClr val="6B6660"/>
-                </a:solidFill>
-                <a:latin typeface="Calibri" pitchFamily="34" charset="0"/>
-                <a:ea typeface="Calibri" pitchFamily="34" charset="-122"/>
-                <a:cs typeface="Calibri" pitchFamily="34" charset="-120"/>
-              </a:rPr>
-              <a:t>4 / 5</a:t>
-            </a:r>
-            <a:endParaRPr lang="en-US" sz="900" dirty="0"/>
-          </a:p>
-        </p:txBody>
-      </p:sp>
-      <p:sp>
-        <p:nvSpPr>
-          <p:cNvPr id="4" name="Text 2"/>
-          <p:cNvSpPr/>
-          <p:nvPr/>
-        </p:nvSpPr>
-        <p:spPr>
-          <a:xfrm>
-            <a:off x="457200" y="274320"/>
-            <a:ext cx="8229600" cy="640080"/>
-          </a:xfrm>
-          <a:prstGeom prst="rect">
-            <a:avLst/>
-          </a:prstGeom>
-          <a:noFill/>
-          <a:ln/>
-        </p:spPr>
-        <p:txBody>
-          <a:bodyPr wrap="square" rtlCol="0" anchor="ctr"/>
+          <a:bodyPr wrap="square" lIns="0" tIns="0" rIns="0" bIns="0" rtlCol="0" anchor="ctr"/>
           <a:lstStyle/>
           <a:p>
             <a:pPr indent="0" marL="0">
               <a:buNone/>
             </a:pPr>
             <a:r>
-              <a:rPr lang="en-US" sz="2600" b="1" dirty="0">
+              <a:rPr lang="en-US" sz="2200" b="1" dirty="0">
                 <a:solidFill>
                   <a:srgbClr val="1B2A4A"/>
                 </a:solidFill>
@@ -2198,9 +2548,9 @@
                 <a:ea typeface="Georgia" pitchFamily="34" charset="-122"/>
                 <a:cs typeface="Georgia" pitchFamily="34" charset="-120"/>
               </a:rPr>
-              <a:t>Finding the nth Term</a:t>
-            </a:r>
-            <a:endParaRPr lang="en-US" sz="2600" dirty="0"/>
+              <a:t>Finding the nth Term Rule</a:t>
+            </a:r>
+            <a:endParaRPr lang="en-US" sz="2200" dirty="0"/>
           </a:p>
         </p:txBody>
       </p:sp>
@@ -2212,8 +2562,8 @@
         </p:nvSpPr>
         <p:spPr>
           <a:xfrm>
-            <a:off x="457200" y="1097280"/>
-            <a:ext cx="8229600" cy="3657600"/>
+            <a:off x="640080" y="1005840"/>
+            <a:ext cx="7863840" cy="2926080"/>
           </a:xfrm>
           <a:prstGeom prst="rect">
             <a:avLst/>
@@ -2222,7 +2572,7 @@
           <a:ln/>
         </p:spPr>
         <p:txBody>
-          <a:bodyPr wrap="square" rtlCol="0" anchor="t"/>
+          <a:bodyPr wrap="square" rtlCol="0" anchor="ctr"/>
           <a:lstStyle/>
           <a:p>
             <a:pPr marL="342900" indent="-342900">
@@ -2233,7 +2583,7 @@
               <a:buChar char="•"/>
             </a:pPr>
             <a:r>
-              <a:rPr lang="en-US" sz="1400" dirty="0">
+              <a:rPr lang="en-US" sz="1600" dirty="0">
                 <a:solidFill>
                   <a:srgbClr val="3D3A36"/>
                 </a:solidFill>
@@ -2241,9 +2591,9 @@
                 <a:ea typeface="Calibri" pitchFamily="34" charset="-122"/>
                 <a:cs typeface="Calibri" pitchFamily="34" charset="-120"/>
               </a:rPr>
-              <a:t>Step 1: Find the common difference (d)</a:t>
-            </a:r>
-            <a:endParaRPr lang="en-US" sz="1400" dirty="0"/>
+              <a:t>Step 1: Find the common difference (d).</a:t>
+            </a:r>
+            <a:endParaRPr lang="en-US" sz="1600" dirty="0"/>
           </a:p>
           <a:p>
             <a:pPr marL="342900" indent="-342900">
@@ -2254,7 +2604,7 @@
               <a:buChar char="•"/>
             </a:pPr>
             <a:r>
-              <a:rPr lang="en-US" sz="1400" dirty="0">
+              <a:rPr lang="en-US" sz="1600" dirty="0">
                 <a:solidFill>
                   <a:srgbClr val="3D3A36"/>
                 </a:solidFill>
@@ -2262,9 +2612,9 @@
                 <a:ea typeface="Calibri" pitchFamily="34" charset="-122"/>
                 <a:cs typeface="Calibri" pitchFamily="34" charset="-120"/>
               </a:rPr>
-              <a:t>Step 2: The nth term starts with dn (d × n)</a:t>
-            </a:r>
-            <a:endParaRPr lang="en-US" sz="1400" dirty="0"/>
+              <a:t>Step 2: The coefficient of n = d.</a:t>
+            </a:r>
+            <a:endParaRPr lang="en-US" sz="1600" dirty="0"/>
           </a:p>
           <a:p>
             <a:pPr marL="342900" indent="-342900">
@@ -2275,7 +2625,7 @@
               <a:buChar char="•"/>
             </a:pPr>
             <a:r>
-              <a:rPr lang="en-US" sz="1400" dirty="0">
+              <a:rPr lang="en-US" sz="1600" dirty="0">
                 <a:solidFill>
                   <a:srgbClr val="3D3A36"/>
                 </a:solidFill>
@@ -2283,9 +2633,9 @@
                 <a:ea typeface="Calibri" pitchFamily="34" charset="-122"/>
                 <a:cs typeface="Calibri" pitchFamily="34" charset="-120"/>
               </a:rPr>
-              <a:t>Step 3: Check what you need to add or subtract to get the first term</a:t>
-            </a:r>
-            <a:endParaRPr lang="en-US" sz="1400" dirty="0"/>
+              <a:t>Step 3: Work out what to add or subtract.</a:t>
+            </a:r>
+            <a:endParaRPr lang="en-US" sz="1600" dirty="0"/>
           </a:p>
           <a:p>
             <a:pPr marL="342900" indent="-342900">
@@ -2296,7 +2646,7 @@
               <a:buChar char="•"/>
             </a:pPr>
             <a:r>
-              <a:rPr lang="en-US" sz="1400" dirty="0">
+              <a:rPr lang="en-US" sz="1600" dirty="0">
                 <a:solidFill>
                   <a:srgbClr val="3D3A36"/>
                 </a:solidFill>
@@ -2304,9 +2654,9 @@
                 <a:ea typeface="Calibri" pitchFamily="34" charset="-122"/>
                 <a:cs typeface="Calibri" pitchFamily="34" charset="-120"/>
               </a:rPr>
-              <a:t>Example: 5, 9, 13, 17... → d = 4 → try 4n → 4(1) = 4, need +1 → nth term = 4n + 1</a:t>
-            </a:r>
-            <a:endParaRPr lang="en-US" sz="1400" dirty="0"/>
+              <a:t>Step 4: Write the rule as T = dn + c.</a:t>
+            </a:r>
+            <a:endParaRPr lang="en-US" sz="1600" dirty="0"/>
           </a:p>
           <a:p>
             <a:pPr marL="342900" indent="-342900">
@@ -2317,7 +2667,7 @@
               <a:buChar char="•"/>
             </a:pPr>
             <a:r>
-              <a:rPr lang="en-US" sz="1400" dirty="0">
+              <a:rPr lang="en-US" sz="1600" dirty="0">
                 <a:solidFill>
                   <a:srgbClr val="3D3A36"/>
                 </a:solidFill>
@@ -2325,30 +2675,9 @@
                 <a:ea typeface="Calibri" pitchFamily="34" charset="-122"/>
                 <a:cs typeface="Calibri" pitchFamily="34" charset="-120"/>
               </a:rPr>
-              <a:t>Check: 4(2)+1 = 9 ✓, 4(3)+1 = 13 ✓</a:t>
-            </a:r>
-            <a:endParaRPr lang="en-US" sz="1400" dirty="0"/>
-          </a:p>
-          <a:p>
-            <a:pPr marL="342900" indent="-342900">
-              <a:spcAft>
-                <a:spcPts val="800"/>
-              </a:spcAft>
-              <a:buSzPct val="100000"/>
-              <a:buChar char="•"/>
-            </a:pPr>
-            <a:r>
-              <a:rPr lang="en-US" sz="1400" dirty="0">
-                <a:solidFill>
-                  <a:srgbClr val="3D3A36"/>
-                </a:solidFill>
-                <a:latin typeface="Calibri" pitchFamily="34" charset="0"/>
-                <a:ea typeface="Calibri" pitchFamily="34" charset="-122"/>
-                <a:cs typeface="Calibri" pitchFamily="34" charset="-120"/>
-              </a:rPr>
-              <a:t>To find the 50th term: 4(50)+1 = 201</a:t>
-            </a:r>
-            <a:endParaRPr lang="en-US" sz="1400" dirty="0"/>
+              <a:t>Example: 5, 8, 11, 14 → d=3. 3(1)=3, need 5, so +2. Rule: 3n + 2</a:t>
+            </a:r>
+            <a:endParaRPr lang="en-US" sz="1600" dirty="0"/>
           </a:p>
         </p:txBody>
       </p:sp>
@@ -2366,7 +2695,7 @@
     <p:bg>
       <p:bgPr>
         <a:solidFill>
-          <a:srgbClr val="1B2A4A"/>
+          <a:srgbClr val="FAF8F5"/>
         </a:solidFill>
       </p:bgPr>
     </p:bg>
@@ -2393,7 +2722,2032 @@
         <p:spPr>
           <a:xfrm>
             <a:off x="0" y="0"/>
-            <a:ext cx="109728" cy="5143500"/>
+            <a:ext cx="9144000" cy="822960"/>
+          </a:xfrm>
+          <a:prstGeom prst="rect">
+            <a:avLst/>
+          </a:prstGeom>
+          <a:solidFill>
+            <a:srgbClr val="FFFFFF"/>
+          </a:solidFill>
+          <a:ln/>
+        </p:spPr>
+      </p:sp>
+      <p:sp>
+        <p:nvSpPr>
+          <p:cNvPr id="3" name="Shape 1"/>
+          <p:cNvSpPr/>
+          <p:nvPr/>
+        </p:nvSpPr>
+        <p:spPr>
+          <a:xfrm>
+            <a:off x="0" y="795528"/>
+            <a:ext cx="9144000" cy="27432"/>
+          </a:xfrm>
+          <a:prstGeom prst="rect">
+            <a:avLst/>
+          </a:prstGeom>
+          <a:solidFill>
+            <a:srgbClr val="2A9D8F"/>
+          </a:solidFill>
+          <a:ln/>
+        </p:spPr>
+      </p:sp>
+      <p:sp>
+        <p:nvSpPr>
+          <p:cNvPr id="4" name="Text 2"/>
+          <p:cNvSpPr/>
+          <p:nvPr/>
+        </p:nvSpPr>
+        <p:spPr>
+          <a:xfrm>
+            <a:off x="640080" y="91440"/>
+            <a:ext cx="7863840" cy="640080"/>
+          </a:xfrm>
+          <a:prstGeom prst="rect">
+            <a:avLst/>
+          </a:prstGeom>
+          <a:noFill/>
+          <a:ln/>
+        </p:spPr>
+        <p:txBody>
+          <a:bodyPr wrap="square" lIns="0" tIns="0" rIns="0" bIns="0" rtlCol="0" anchor="ctr"/>
+          <a:lstStyle/>
+          <a:p>
+            <a:pPr indent="0" marL="0">
+              <a:buNone/>
+            </a:pPr>
+            <a:r>
+              <a:rPr lang="en-US" sz="2200" b="1" dirty="0">
+                <a:solidFill>
+                  <a:srgbClr val="1B2A4A"/>
+                </a:solidFill>
+                <a:latin typeface="Georgia" pitchFamily="34" charset="0"/>
+                <a:ea typeface="Georgia" pitchFamily="34" charset="-122"/>
+                <a:cs typeface="Georgia" pitchFamily="34" charset="-120"/>
+              </a:rPr>
+              <a:t>Worked Example</a:t>
+            </a:r>
+            <a:endParaRPr lang="en-US" sz="2200" dirty="0"/>
+          </a:p>
+        </p:txBody>
+      </p:sp>
+      <p:graphicFrame>
+        <p:nvGraphicFramePr>
+          <p:cNvPr id="6" name="Table 0"/>
+          <p:cNvGraphicFramePr>
+            <a:graphicFrameLocks noGrp="1"/>
+          </p:cNvGraphicFramePr>
+          <p:nvPr>
+            <p:extLst>
+              <p:ext uri="{D42A27DB-BD31-4B8C-83A1-F6EECF244321}">
+                <p14:modId xmlns:p14="http://schemas.microsoft.com/office/powerpoint/2010/main" val="1579011935"/>
+              </p:ext>
+            </p:extLst>
+          </p:nvPr>
+        </p:nvGraphicFramePr>
+        <p:xfrm>
+          <a:off x="640080" y="1051560"/>
+          <a:ext cx="7863840" cy="914400"/>
+        </p:xfrm>
+        <a:graphic>
+          <a:graphicData uri="http://schemas.openxmlformats.org/drawingml/2006/table">
+            <a:tbl>
+              <a:tblPr/>
+              <a:tblGrid>
+                <a:gridCol w="1965960"/>
+                <a:gridCol w="1965960"/>
+                <a:gridCol w="1965960"/>
+                <a:gridCol w="1965960"/>
+              </a:tblGrid>
+              <a:tr h="502920">
+                <a:tc>
+                  <a:txBody>
+                    <a:bodyPr/>
+                    <a:lstStyle/>
+                    <a:p>
+                      <a:pPr indent="0" marL="0">
+                        <a:buNone/>
+                      </a:pPr>
+                      <a:r>
+                        <a:rPr lang="en-US" sz="1300" b="1" dirty="0">
+                          <a:solidFill>
+                            <a:srgbClr val="FFFFFF"/>
+                          </a:solidFill>
+                          <a:latin typeface="Calibri" pitchFamily="34" charset="0"/>
+                          <a:ea typeface="Calibri" pitchFamily="34" charset="-122"/>
+                          <a:cs typeface="Calibri" pitchFamily="34" charset="-120"/>
+                        </a:rPr>
+                        <a:t>Position (n)</a:t>
+                      </a:r>
+                      <a:endParaRPr lang="en-US" sz="1300" dirty="0">
+                        <a:latin typeface="Calibri" charset="0"/>
+                        <a:ea typeface="Calibri" charset="0"/>
+                        <a:cs typeface="Calibri" charset="0"/>
+                      </a:endParaRPr>
+                    </a:p>
+                  </a:txBody>
+                  <a:tcPr marL="91440" marR="91440" marT="45720" marB="45720">
+                    <a:lnL w="6350" cap="flat" cmpd="sng" algn="ctr">
+                      <a:solidFill>
+                        <a:srgbClr val="E5E2DC"/>
+                      </a:solidFill>
+                      <a:prstDash val="solid"/>
+                      <a:round/>
+                      <a:headEnd type="none" w="med" len="med"/>
+                      <a:tailEnd type="none" w="med" len="med"/>
+                    </a:lnL>
+                    <a:lnR w="6350" cap="flat" cmpd="sng" algn="ctr">
+                      <a:solidFill>
+                        <a:srgbClr val="E5E2DC"/>
+                      </a:solidFill>
+                      <a:prstDash val="solid"/>
+                      <a:round/>
+                      <a:headEnd type="none" w="med" len="med"/>
+                      <a:tailEnd type="none" w="med" len="med"/>
+                    </a:lnR>
+                    <a:lnT w="6350" cap="flat" cmpd="sng" algn="ctr">
+                      <a:solidFill>
+                        <a:srgbClr val="E5E2DC"/>
+                      </a:solidFill>
+                      <a:prstDash val="solid"/>
+                      <a:round/>
+                      <a:headEnd type="none" w="med" len="med"/>
+                      <a:tailEnd type="none" w="med" len="med"/>
+                    </a:lnT>
+                    <a:lnB w="6350" cap="flat" cmpd="sng" algn="ctr">
+                      <a:solidFill>
+                        <a:srgbClr val="E5E2DC"/>
+                      </a:solidFill>
+                      <a:prstDash val="solid"/>
+                      <a:round/>
+                      <a:headEnd type="none" w="med" len="med"/>
+                      <a:tailEnd type="none" w="med" len="med"/>
+                    </a:lnB>
+                    <a:solidFill>
+                      <a:srgbClr val="2A9D8F"/>
+                    </a:solidFill>
+                  </a:tcPr>
+                </a:tc>
+                <a:tc>
+                  <a:txBody>
+                    <a:bodyPr/>
+                    <a:lstStyle/>
+                    <a:p>
+                      <a:pPr indent="0" marL="0">
+                        <a:buNone/>
+                      </a:pPr>
+                      <a:r>
+                        <a:rPr lang="en-US" sz="1300" b="1" dirty="0">
+                          <a:solidFill>
+                            <a:srgbClr val="FFFFFF"/>
+                          </a:solidFill>
+                          <a:latin typeface="Calibri" pitchFamily="34" charset="0"/>
+                          <a:ea typeface="Calibri" pitchFamily="34" charset="-122"/>
+                          <a:cs typeface="Calibri" pitchFamily="34" charset="-120"/>
+                        </a:rPr>
+                        <a:t>Term</a:t>
+                      </a:r>
+                      <a:endParaRPr lang="en-US" sz="1300" dirty="0">
+                        <a:latin typeface="Calibri" charset="0"/>
+                        <a:ea typeface="Calibri" charset="0"/>
+                        <a:cs typeface="Calibri" charset="0"/>
+                      </a:endParaRPr>
+                    </a:p>
+                  </a:txBody>
+                  <a:tcPr marL="91440" marR="91440" marT="45720" marB="45720">
+                    <a:lnL w="6350" cap="flat" cmpd="sng" algn="ctr">
+                      <a:solidFill>
+                        <a:srgbClr val="E5E2DC"/>
+                      </a:solidFill>
+                      <a:prstDash val="solid"/>
+                      <a:round/>
+                      <a:headEnd type="none" w="med" len="med"/>
+                      <a:tailEnd type="none" w="med" len="med"/>
+                    </a:lnL>
+                    <a:lnR w="6350" cap="flat" cmpd="sng" algn="ctr">
+                      <a:solidFill>
+                        <a:srgbClr val="E5E2DC"/>
+                      </a:solidFill>
+                      <a:prstDash val="solid"/>
+                      <a:round/>
+                      <a:headEnd type="none" w="med" len="med"/>
+                      <a:tailEnd type="none" w="med" len="med"/>
+                    </a:lnR>
+                    <a:lnT w="6350" cap="flat" cmpd="sng" algn="ctr">
+                      <a:solidFill>
+                        <a:srgbClr val="E5E2DC"/>
+                      </a:solidFill>
+                      <a:prstDash val="solid"/>
+                      <a:round/>
+                      <a:headEnd type="none" w="med" len="med"/>
+                      <a:tailEnd type="none" w="med" len="med"/>
+                    </a:lnT>
+                    <a:lnB w="6350" cap="flat" cmpd="sng" algn="ctr">
+                      <a:solidFill>
+                        <a:srgbClr val="E5E2DC"/>
+                      </a:solidFill>
+                      <a:prstDash val="solid"/>
+                      <a:round/>
+                      <a:headEnd type="none" w="med" len="med"/>
+                      <a:tailEnd type="none" w="med" len="med"/>
+                    </a:lnB>
+                    <a:solidFill>
+                      <a:srgbClr val="2A9D8F"/>
+                    </a:solidFill>
+                  </a:tcPr>
+                </a:tc>
+                <a:tc>
+                  <a:txBody>
+                    <a:bodyPr/>
+                    <a:lstStyle/>
+                    <a:p>
+                      <a:pPr indent="0" marL="0">
+                        <a:buNone/>
+                      </a:pPr>
+                      <a:r>
+                        <a:rPr lang="en-US" sz="1300" b="1" dirty="0">
+                          <a:solidFill>
+                            <a:srgbClr val="FFFFFF"/>
+                          </a:solidFill>
+                          <a:latin typeface="Calibri" pitchFamily="34" charset="0"/>
+                          <a:ea typeface="Calibri" pitchFamily="34" charset="-122"/>
+                          <a:cs typeface="Calibri" pitchFamily="34" charset="-120"/>
+                        </a:rPr>
+                        <a:t>3n</a:t>
+                      </a:r>
+                      <a:endParaRPr lang="en-US" sz="1300" dirty="0">
+                        <a:latin typeface="Calibri" charset="0"/>
+                        <a:ea typeface="Calibri" charset="0"/>
+                        <a:cs typeface="Calibri" charset="0"/>
+                      </a:endParaRPr>
+                    </a:p>
+                  </a:txBody>
+                  <a:tcPr marL="91440" marR="91440" marT="45720" marB="45720">
+                    <a:lnL w="6350" cap="flat" cmpd="sng" algn="ctr">
+                      <a:solidFill>
+                        <a:srgbClr val="E5E2DC"/>
+                      </a:solidFill>
+                      <a:prstDash val="solid"/>
+                      <a:round/>
+                      <a:headEnd type="none" w="med" len="med"/>
+                      <a:tailEnd type="none" w="med" len="med"/>
+                    </a:lnL>
+                    <a:lnR w="6350" cap="flat" cmpd="sng" algn="ctr">
+                      <a:solidFill>
+                        <a:srgbClr val="E5E2DC"/>
+                      </a:solidFill>
+                      <a:prstDash val="solid"/>
+                      <a:round/>
+                      <a:headEnd type="none" w="med" len="med"/>
+                      <a:tailEnd type="none" w="med" len="med"/>
+                    </a:lnR>
+                    <a:lnT w="6350" cap="flat" cmpd="sng" algn="ctr">
+                      <a:solidFill>
+                        <a:srgbClr val="E5E2DC"/>
+                      </a:solidFill>
+                      <a:prstDash val="solid"/>
+                      <a:round/>
+                      <a:headEnd type="none" w="med" len="med"/>
+                      <a:tailEnd type="none" w="med" len="med"/>
+                    </a:lnT>
+                    <a:lnB w="6350" cap="flat" cmpd="sng" algn="ctr">
+                      <a:solidFill>
+                        <a:srgbClr val="E5E2DC"/>
+                      </a:solidFill>
+                      <a:prstDash val="solid"/>
+                      <a:round/>
+                      <a:headEnd type="none" w="med" len="med"/>
+                      <a:tailEnd type="none" w="med" len="med"/>
+                    </a:lnB>
+                    <a:solidFill>
+                      <a:srgbClr val="2A9D8F"/>
+                    </a:solidFill>
+                  </a:tcPr>
+                </a:tc>
+                <a:tc>
+                  <a:txBody>
+                    <a:bodyPr/>
+                    <a:lstStyle/>
+                    <a:p>
+                      <a:pPr indent="0" marL="0">
+                        <a:buNone/>
+                      </a:pPr>
+                      <a:r>
+                        <a:rPr lang="en-US" sz="1300" b="1" dirty="0">
+                          <a:solidFill>
+                            <a:srgbClr val="FFFFFF"/>
+                          </a:solidFill>
+                          <a:latin typeface="Calibri" pitchFamily="34" charset="0"/>
+                          <a:ea typeface="Calibri" pitchFamily="34" charset="-122"/>
+                          <a:cs typeface="Calibri" pitchFamily="34" charset="-120"/>
+                        </a:rPr>
+                        <a:t>Adjustment</a:t>
+                      </a:r>
+                      <a:endParaRPr lang="en-US" sz="1300" dirty="0">
+                        <a:latin typeface="Calibri" charset="0"/>
+                        <a:ea typeface="Calibri" charset="0"/>
+                        <a:cs typeface="Calibri" charset="0"/>
+                      </a:endParaRPr>
+                    </a:p>
+                  </a:txBody>
+                  <a:tcPr marL="91440" marR="91440" marT="45720" marB="45720">
+                    <a:lnL w="6350" cap="flat" cmpd="sng" algn="ctr">
+                      <a:solidFill>
+                        <a:srgbClr val="E5E2DC"/>
+                      </a:solidFill>
+                      <a:prstDash val="solid"/>
+                      <a:round/>
+                      <a:headEnd type="none" w="med" len="med"/>
+                      <a:tailEnd type="none" w="med" len="med"/>
+                    </a:lnL>
+                    <a:lnR w="6350" cap="flat" cmpd="sng" algn="ctr">
+                      <a:solidFill>
+                        <a:srgbClr val="E5E2DC"/>
+                      </a:solidFill>
+                      <a:prstDash val="solid"/>
+                      <a:round/>
+                      <a:headEnd type="none" w="med" len="med"/>
+                      <a:tailEnd type="none" w="med" len="med"/>
+                    </a:lnR>
+                    <a:lnT w="6350" cap="flat" cmpd="sng" algn="ctr">
+                      <a:solidFill>
+                        <a:srgbClr val="E5E2DC"/>
+                      </a:solidFill>
+                      <a:prstDash val="solid"/>
+                      <a:round/>
+                      <a:headEnd type="none" w="med" len="med"/>
+                      <a:tailEnd type="none" w="med" len="med"/>
+                    </a:lnT>
+                    <a:lnB w="6350" cap="flat" cmpd="sng" algn="ctr">
+                      <a:solidFill>
+                        <a:srgbClr val="E5E2DC"/>
+                      </a:solidFill>
+                      <a:prstDash val="solid"/>
+                      <a:round/>
+                      <a:headEnd type="none" w="med" len="med"/>
+                      <a:tailEnd type="none" w="med" len="med"/>
+                    </a:lnB>
+                    <a:solidFill>
+                      <a:srgbClr val="2A9D8F"/>
+                    </a:solidFill>
+                  </a:tcPr>
+                </a:tc>
+              </a:tr>
+              <a:tr h="502920">
+                <a:tc>
+                  <a:txBody>
+                    <a:bodyPr/>
+                    <a:lstStyle/>
+                    <a:p>
+                      <a:pPr indent="0" marL="0">
+                        <a:buNone/>
+                      </a:pPr>
+                      <a:r>
+                        <a:rPr lang="en-US" sz="1300" dirty="0">
+                          <a:solidFill>
+                            <a:srgbClr val="3D3A36"/>
+                          </a:solidFill>
+                          <a:latin typeface="Calibri" pitchFamily="34" charset="0"/>
+                          <a:ea typeface="Calibri" pitchFamily="34" charset="-122"/>
+                          <a:cs typeface="Calibri" pitchFamily="34" charset="-120"/>
+                        </a:rPr>
+                        <a:t>1</a:t>
+                      </a:r>
+                      <a:endParaRPr lang="en-US" sz="1300" dirty="0">
+                        <a:latin typeface="Calibri" charset="0"/>
+                        <a:ea typeface="Calibri" charset="0"/>
+                        <a:cs typeface="Calibri" charset="0"/>
+                      </a:endParaRPr>
+                    </a:p>
+                  </a:txBody>
+                  <a:tcPr marL="91440" marR="91440" marT="45720" marB="45720">
+                    <a:lnL w="6350" cap="flat" cmpd="sng" algn="ctr">
+                      <a:solidFill>
+                        <a:srgbClr val="E5E2DC"/>
+                      </a:solidFill>
+                      <a:prstDash val="solid"/>
+                      <a:round/>
+                      <a:headEnd type="none" w="med" len="med"/>
+                      <a:tailEnd type="none" w="med" len="med"/>
+                    </a:lnL>
+                    <a:lnR w="6350" cap="flat" cmpd="sng" algn="ctr">
+                      <a:solidFill>
+                        <a:srgbClr val="E5E2DC"/>
+                      </a:solidFill>
+                      <a:prstDash val="solid"/>
+                      <a:round/>
+                      <a:headEnd type="none" w="med" len="med"/>
+                      <a:tailEnd type="none" w="med" len="med"/>
+                    </a:lnR>
+                    <a:lnT w="6350" cap="flat" cmpd="sng" algn="ctr">
+                      <a:solidFill>
+                        <a:srgbClr val="E5E2DC"/>
+                      </a:solidFill>
+                      <a:prstDash val="solid"/>
+                      <a:round/>
+                      <a:headEnd type="none" w="med" len="med"/>
+                      <a:tailEnd type="none" w="med" len="med"/>
+                    </a:lnT>
+                    <a:lnB w="6350" cap="flat" cmpd="sng" algn="ctr">
+                      <a:solidFill>
+                        <a:srgbClr val="E5E2DC"/>
+                      </a:solidFill>
+                      <a:prstDash val="solid"/>
+                      <a:round/>
+                      <a:headEnd type="none" w="med" len="med"/>
+                      <a:tailEnd type="none" w="med" len="med"/>
+                    </a:lnB>
+                  </a:tcPr>
+                </a:tc>
+                <a:tc>
+                  <a:txBody>
+                    <a:bodyPr/>
+                    <a:lstStyle/>
+                    <a:p>
+                      <a:pPr indent="0" marL="0">
+                        <a:buNone/>
+                      </a:pPr>
+                      <a:r>
+                        <a:rPr lang="en-US" sz="1300" dirty="0">
+                          <a:solidFill>
+                            <a:srgbClr val="3D3A36"/>
+                          </a:solidFill>
+                          <a:latin typeface="Calibri" pitchFamily="34" charset="0"/>
+                          <a:ea typeface="Calibri" pitchFamily="34" charset="-122"/>
+                          <a:cs typeface="Calibri" pitchFamily="34" charset="-120"/>
+                        </a:rPr>
+                        <a:t>5</a:t>
+                      </a:r>
+                      <a:endParaRPr lang="en-US" sz="1300" dirty="0">
+                        <a:latin typeface="Calibri" charset="0"/>
+                        <a:ea typeface="Calibri" charset="0"/>
+                        <a:cs typeface="Calibri" charset="0"/>
+                      </a:endParaRPr>
+                    </a:p>
+                  </a:txBody>
+                  <a:tcPr marL="91440" marR="91440" marT="45720" marB="45720">
+                    <a:lnL w="6350" cap="flat" cmpd="sng" algn="ctr">
+                      <a:solidFill>
+                        <a:srgbClr val="E5E2DC"/>
+                      </a:solidFill>
+                      <a:prstDash val="solid"/>
+                      <a:round/>
+                      <a:headEnd type="none" w="med" len="med"/>
+                      <a:tailEnd type="none" w="med" len="med"/>
+                    </a:lnL>
+                    <a:lnR w="6350" cap="flat" cmpd="sng" algn="ctr">
+                      <a:solidFill>
+                        <a:srgbClr val="E5E2DC"/>
+                      </a:solidFill>
+                      <a:prstDash val="solid"/>
+                      <a:round/>
+                      <a:headEnd type="none" w="med" len="med"/>
+                      <a:tailEnd type="none" w="med" len="med"/>
+                    </a:lnR>
+                    <a:lnT w="6350" cap="flat" cmpd="sng" algn="ctr">
+                      <a:solidFill>
+                        <a:srgbClr val="E5E2DC"/>
+                      </a:solidFill>
+                      <a:prstDash val="solid"/>
+                      <a:round/>
+                      <a:headEnd type="none" w="med" len="med"/>
+                      <a:tailEnd type="none" w="med" len="med"/>
+                    </a:lnT>
+                    <a:lnB w="6350" cap="flat" cmpd="sng" algn="ctr">
+                      <a:solidFill>
+                        <a:srgbClr val="E5E2DC"/>
+                      </a:solidFill>
+                      <a:prstDash val="solid"/>
+                      <a:round/>
+                      <a:headEnd type="none" w="med" len="med"/>
+                      <a:tailEnd type="none" w="med" len="med"/>
+                    </a:lnB>
+                  </a:tcPr>
+                </a:tc>
+                <a:tc>
+                  <a:txBody>
+                    <a:bodyPr/>
+                    <a:lstStyle/>
+                    <a:p>
+                      <a:pPr indent="0" marL="0">
+                        <a:buNone/>
+                      </a:pPr>
+                      <a:r>
+                        <a:rPr lang="en-US" sz="1300" dirty="0">
+                          <a:solidFill>
+                            <a:srgbClr val="3D3A36"/>
+                          </a:solidFill>
+                          <a:latin typeface="Calibri" pitchFamily="34" charset="0"/>
+                          <a:ea typeface="Calibri" pitchFamily="34" charset="-122"/>
+                          <a:cs typeface="Calibri" pitchFamily="34" charset="-120"/>
+                        </a:rPr>
+                        <a:t>3</a:t>
+                      </a:r>
+                      <a:endParaRPr lang="en-US" sz="1300" dirty="0">
+                        <a:latin typeface="Calibri" charset="0"/>
+                        <a:ea typeface="Calibri" charset="0"/>
+                        <a:cs typeface="Calibri" charset="0"/>
+                      </a:endParaRPr>
+                    </a:p>
+                  </a:txBody>
+                  <a:tcPr marL="91440" marR="91440" marT="45720" marB="45720">
+                    <a:lnL w="6350" cap="flat" cmpd="sng" algn="ctr">
+                      <a:solidFill>
+                        <a:srgbClr val="E5E2DC"/>
+                      </a:solidFill>
+                      <a:prstDash val="solid"/>
+                      <a:round/>
+                      <a:headEnd type="none" w="med" len="med"/>
+                      <a:tailEnd type="none" w="med" len="med"/>
+                    </a:lnL>
+                    <a:lnR w="6350" cap="flat" cmpd="sng" algn="ctr">
+                      <a:solidFill>
+                        <a:srgbClr val="E5E2DC"/>
+                      </a:solidFill>
+                      <a:prstDash val="solid"/>
+                      <a:round/>
+                      <a:headEnd type="none" w="med" len="med"/>
+                      <a:tailEnd type="none" w="med" len="med"/>
+                    </a:lnR>
+                    <a:lnT w="6350" cap="flat" cmpd="sng" algn="ctr">
+                      <a:solidFill>
+                        <a:srgbClr val="E5E2DC"/>
+                      </a:solidFill>
+                      <a:prstDash val="solid"/>
+                      <a:round/>
+                      <a:headEnd type="none" w="med" len="med"/>
+                      <a:tailEnd type="none" w="med" len="med"/>
+                    </a:lnT>
+                    <a:lnB w="6350" cap="flat" cmpd="sng" algn="ctr">
+                      <a:solidFill>
+                        <a:srgbClr val="E5E2DC"/>
+                      </a:solidFill>
+                      <a:prstDash val="solid"/>
+                      <a:round/>
+                      <a:headEnd type="none" w="med" len="med"/>
+                      <a:tailEnd type="none" w="med" len="med"/>
+                    </a:lnB>
+                  </a:tcPr>
+                </a:tc>
+                <a:tc>
+                  <a:txBody>
+                    <a:bodyPr/>
+                    <a:lstStyle/>
+                    <a:p>
+                      <a:pPr indent="0" marL="0">
+                        <a:buNone/>
+                      </a:pPr>
+                      <a:r>
+                        <a:rPr lang="en-US" sz="1300" dirty="0">
+                          <a:solidFill>
+                            <a:srgbClr val="3D3A36"/>
+                          </a:solidFill>
+                          <a:latin typeface="Calibri" pitchFamily="34" charset="0"/>
+                          <a:ea typeface="Calibri" pitchFamily="34" charset="-122"/>
+                          <a:cs typeface="Calibri" pitchFamily="34" charset="-120"/>
+                        </a:rPr>
+                        <a:t>+2</a:t>
+                      </a:r>
+                      <a:endParaRPr lang="en-US" sz="1300" dirty="0">
+                        <a:latin typeface="Calibri" charset="0"/>
+                        <a:ea typeface="Calibri" charset="0"/>
+                        <a:cs typeface="Calibri" charset="0"/>
+                      </a:endParaRPr>
+                    </a:p>
+                  </a:txBody>
+                  <a:tcPr marL="91440" marR="91440" marT="45720" marB="45720">
+                    <a:lnL w="6350" cap="flat" cmpd="sng" algn="ctr">
+                      <a:solidFill>
+                        <a:srgbClr val="E5E2DC"/>
+                      </a:solidFill>
+                      <a:prstDash val="solid"/>
+                      <a:round/>
+                      <a:headEnd type="none" w="med" len="med"/>
+                      <a:tailEnd type="none" w="med" len="med"/>
+                    </a:lnL>
+                    <a:lnR w="6350" cap="flat" cmpd="sng" algn="ctr">
+                      <a:solidFill>
+                        <a:srgbClr val="E5E2DC"/>
+                      </a:solidFill>
+                      <a:prstDash val="solid"/>
+                      <a:round/>
+                      <a:headEnd type="none" w="med" len="med"/>
+                      <a:tailEnd type="none" w="med" len="med"/>
+                    </a:lnR>
+                    <a:lnT w="6350" cap="flat" cmpd="sng" algn="ctr">
+                      <a:solidFill>
+                        <a:srgbClr val="E5E2DC"/>
+                      </a:solidFill>
+                      <a:prstDash val="solid"/>
+                      <a:round/>
+                      <a:headEnd type="none" w="med" len="med"/>
+                      <a:tailEnd type="none" w="med" len="med"/>
+                    </a:lnT>
+                    <a:lnB w="6350" cap="flat" cmpd="sng" algn="ctr">
+                      <a:solidFill>
+                        <a:srgbClr val="E5E2DC"/>
+                      </a:solidFill>
+                      <a:prstDash val="solid"/>
+                      <a:round/>
+                      <a:headEnd type="none" w="med" len="med"/>
+                      <a:tailEnd type="none" w="med" len="med"/>
+                    </a:lnB>
+                  </a:tcPr>
+                </a:tc>
+              </a:tr>
+              <a:tr h="502920">
+                <a:tc>
+                  <a:txBody>
+                    <a:bodyPr/>
+                    <a:lstStyle/>
+                    <a:p>
+                      <a:pPr indent="0" marL="0">
+                        <a:buNone/>
+                      </a:pPr>
+                      <a:r>
+                        <a:rPr lang="en-US" sz="1300" dirty="0">
+                          <a:solidFill>
+                            <a:srgbClr val="3D3A36"/>
+                          </a:solidFill>
+                          <a:latin typeface="Calibri" pitchFamily="34" charset="0"/>
+                          <a:ea typeface="Calibri" pitchFamily="34" charset="-122"/>
+                          <a:cs typeface="Calibri" pitchFamily="34" charset="-120"/>
+                        </a:rPr>
+                        <a:t>2</a:t>
+                      </a:r>
+                      <a:endParaRPr lang="en-US" sz="1300" dirty="0">
+                        <a:latin typeface="Calibri" charset="0"/>
+                        <a:ea typeface="Calibri" charset="0"/>
+                        <a:cs typeface="Calibri" charset="0"/>
+                      </a:endParaRPr>
+                    </a:p>
+                  </a:txBody>
+                  <a:tcPr marL="91440" marR="91440" marT="45720" marB="45720">
+                    <a:lnL w="6350" cap="flat" cmpd="sng" algn="ctr">
+                      <a:solidFill>
+                        <a:srgbClr val="E5E2DC"/>
+                      </a:solidFill>
+                      <a:prstDash val="solid"/>
+                      <a:round/>
+                      <a:headEnd type="none" w="med" len="med"/>
+                      <a:tailEnd type="none" w="med" len="med"/>
+                    </a:lnL>
+                    <a:lnR w="6350" cap="flat" cmpd="sng" algn="ctr">
+                      <a:solidFill>
+                        <a:srgbClr val="E5E2DC"/>
+                      </a:solidFill>
+                      <a:prstDash val="solid"/>
+                      <a:round/>
+                      <a:headEnd type="none" w="med" len="med"/>
+                      <a:tailEnd type="none" w="med" len="med"/>
+                    </a:lnR>
+                    <a:lnT w="6350" cap="flat" cmpd="sng" algn="ctr">
+                      <a:solidFill>
+                        <a:srgbClr val="E5E2DC"/>
+                      </a:solidFill>
+                      <a:prstDash val="solid"/>
+                      <a:round/>
+                      <a:headEnd type="none" w="med" len="med"/>
+                      <a:tailEnd type="none" w="med" len="med"/>
+                    </a:lnT>
+                    <a:lnB w="6350" cap="flat" cmpd="sng" algn="ctr">
+                      <a:solidFill>
+                        <a:srgbClr val="E5E2DC"/>
+                      </a:solidFill>
+                      <a:prstDash val="solid"/>
+                      <a:round/>
+                      <a:headEnd type="none" w="med" len="med"/>
+                      <a:tailEnd type="none" w="med" len="med"/>
+                    </a:lnB>
+                  </a:tcPr>
+                </a:tc>
+                <a:tc>
+                  <a:txBody>
+                    <a:bodyPr/>
+                    <a:lstStyle/>
+                    <a:p>
+                      <a:pPr indent="0" marL="0">
+                        <a:buNone/>
+                      </a:pPr>
+                      <a:r>
+                        <a:rPr lang="en-US" sz="1300" dirty="0">
+                          <a:solidFill>
+                            <a:srgbClr val="3D3A36"/>
+                          </a:solidFill>
+                          <a:latin typeface="Calibri" pitchFamily="34" charset="0"/>
+                          <a:ea typeface="Calibri" pitchFamily="34" charset="-122"/>
+                          <a:cs typeface="Calibri" pitchFamily="34" charset="-120"/>
+                        </a:rPr>
+                        <a:t>8</a:t>
+                      </a:r>
+                      <a:endParaRPr lang="en-US" sz="1300" dirty="0">
+                        <a:latin typeface="Calibri" charset="0"/>
+                        <a:ea typeface="Calibri" charset="0"/>
+                        <a:cs typeface="Calibri" charset="0"/>
+                      </a:endParaRPr>
+                    </a:p>
+                  </a:txBody>
+                  <a:tcPr marL="91440" marR="91440" marT="45720" marB="45720">
+                    <a:lnL w="6350" cap="flat" cmpd="sng" algn="ctr">
+                      <a:solidFill>
+                        <a:srgbClr val="E5E2DC"/>
+                      </a:solidFill>
+                      <a:prstDash val="solid"/>
+                      <a:round/>
+                      <a:headEnd type="none" w="med" len="med"/>
+                      <a:tailEnd type="none" w="med" len="med"/>
+                    </a:lnL>
+                    <a:lnR w="6350" cap="flat" cmpd="sng" algn="ctr">
+                      <a:solidFill>
+                        <a:srgbClr val="E5E2DC"/>
+                      </a:solidFill>
+                      <a:prstDash val="solid"/>
+                      <a:round/>
+                      <a:headEnd type="none" w="med" len="med"/>
+                      <a:tailEnd type="none" w="med" len="med"/>
+                    </a:lnR>
+                    <a:lnT w="6350" cap="flat" cmpd="sng" algn="ctr">
+                      <a:solidFill>
+                        <a:srgbClr val="E5E2DC"/>
+                      </a:solidFill>
+                      <a:prstDash val="solid"/>
+                      <a:round/>
+                      <a:headEnd type="none" w="med" len="med"/>
+                      <a:tailEnd type="none" w="med" len="med"/>
+                    </a:lnT>
+                    <a:lnB w="6350" cap="flat" cmpd="sng" algn="ctr">
+                      <a:solidFill>
+                        <a:srgbClr val="E5E2DC"/>
+                      </a:solidFill>
+                      <a:prstDash val="solid"/>
+                      <a:round/>
+                      <a:headEnd type="none" w="med" len="med"/>
+                      <a:tailEnd type="none" w="med" len="med"/>
+                    </a:lnB>
+                  </a:tcPr>
+                </a:tc>
+                <a:tc>
+                  <a:txBody>
+                    <a:bodyPr/>
+                    <a:lstStyle/>
+                    <a:p>
+                      <a:pPr indent="0" marL="0">
+                        <a:buNone/>
+                      </a:pPr>
+                      <a:r>
+                        <a:rPr lang="en-US" sz="1300" dirty="0">
+                          <a:solidFill>
+                            <a:srgbClr val="3D3A36"/>
+                          </a:solidFill>
+                          <a:latin typeface="Calibri" pitchFamily="34" charset="0"/>
+                          <a:ea typeface="Calibri" pitchFamily="34" charset="-122"/>
+                          <a:cs typeface="Calibri" pitchFamily="34" charset="-120"/>
+                        </a:rPr>
+                        <a:t>6</a:t>
+                      </a:r>
+                      <a:endParaRPr lang="en-US" sz="1300" dirty="0">
+                        <a:latin typeface="Calibri" charset="0"/>
+                        <a:ea typeface="Calibri" charset="0"/>
+                        <a:cs typeface="Calibri" charset="0"/>
+                      </a:endParaRPr>
+                    </a:p>
+                  </a:txBody>
+                  <a:tcPr marL="91440" marR="91440" marT="45720" marB="45720">
+                    <a:lnL w="6350" cap="flat" cmpd="sng" algn="ctr">
+                      <a:solidFill>
+                        <a:srgbClr val="E5E2DC"/>
+                      </a:solidFill>
+                      <a:prstDash val="solid"/>
+                      <a:round/>
+                      <a:headEnd type="none" w="med" len="med"/>
+                      <a:tailEnd type="none" w="med" len="med"/>
+                    </a:lnL>
+                    <a:lnR w="6350" cap="flat" cmpd="sng" algn="ctr">
+                      <a:solidFill>
+                        <a:srgbClr val="E5E2DC"/>
+                      </a:solidFill>
+                      <a:prstDash val="solid"/>
+                      <a:round/>
+                      <a:headEnd type="none" w="med" len="med"/>
+                      <a:tailEnd type="none" w="med" len="med"/>
+                    </a:lnR>
+                    <a:lnT w="6350" cap="flat" cmpd="sng" algn="ctr">
+                      <a:solidFill>
+                        <a:srgbClr val="E5E2DC"/>
+                      </a:solidFill>
+                      <a:prstDash val="solid"/>
+                      <a:round/>
+                      <a:headEnd type="none" w="med" len="med"/>
+                      <a:tailEnd type="none" w="med" len="med"/>
+                    </a:lnT>
+                    <a:lnB w="6350" cap="flat" cmpd="sng" algn="ctr">
+                      <a:solidFill>
+                        <a:srgbClr val="E5E2DC"/>
+                      </a:solidFill>
+                      <a:prstDash val="solid"/>
+                      <a:round/>
+                      <a:headEnd type="none" w="med" len="med"/>
+                      <a:tailEnd type="none" w="med" len="med"/>
+                    </a:lnB>
+                  </a:tcPr>
+                </a:tc>
+                <a:tc>
+                  <a:txBody>
+                    <a:bodyPr/>
+                    <a:lstStyle/>
+                    <a:p>
+                      <a:pPr indent="0" marL="0">
+                        <a:buNone/>
+                      </a:pPr>
+                      <a:r>
+                        <a:rPr lang="en-US" sz="1300" dirty="0">
+                          <a:solidFill>
+                            <a:srgbClr val="3D3A36"/>
+                          </a:solidFill>
+                          <a:latin typeface="Calibri" pitchFamily="34" charset="0"/>
+                          <a:ea typeface="Calibri" pitchFamily="34" charset="-122"/>
+                          <a:cs typeface="Calibri" pitchFamily="34" charset="-120"/>
+                        </a:rPr>
+                        <a:t>+2</a:t>
+                      </a:r>
+                      <a:endParaRPr lang="en-US" sz="1300" dirty="0">
+                        <a:latin typeface="Calibri" charset="0"/>
+                        <a:ea typeface="Calibri" charset="0"/>
+                        <a:cs typeface="Calibri" charset="0"/>
+                      </a:endParaRPr>
+                    </a:p>
+                  </a:txBody>
+                  <a:tcPr marL="91440" marR="91440" marT="45720" marB="45720">
+                    <a:lnL w="6350" cap="flat" cmpd="sng" algn="ctr">
+                      <a:solidFill>
+                        <a:srgbClr val="E5E2DC"/>
+                      </a:solidFill>
+                      <a:prstDash val="solid"/>
+                      <a:round/>
+                      <a:headEnd type="none" w="med" len="med"/>
+                      <a:tailEnd type="none" w="med" len="med"/>
+                    </a:lnL>
+                    <a:lnR w="6350" cap="flat" cmpd="sng" algn="ctr">
+                      <a:solidFill>
+                        <a:srgbClr val="E5E2DC"/>
+                      </a:solidFill>
+                      <a:prstDash val="solid"/>
+                      <a:round/>
+                      <a:headEnd type="none" w="med" len="med"/>
+                      <a:tailEnd type="none" w="med" len="med"/>
+                    </a:lnR>
+                    <a:lnT w="6350" cap="flat" cmpd="sng" algn="ctr">
+                      <a:solidFill>
+                        <a:srgbClr val="E5E2DC"/>
+                      </a:solidFill>
+                      <a:prstDash val="solid"/>
+                      <a:round/>
+                      <a:headEnd type="none" w="med" len="med"/>
+                      <a:tailEnd type="none" w="med" len="med"/>
+                    </a:lnT>
+                    <a:lnB w="6350" cap="flat" cmpd="sng" algn="ctr">
+                      <a:solidFill>
+                        <a:srgbClr val="E5E2DC"/>
+                      </a:solidFill>
+                      <a:prstDash val="solid"/>
+                      <a:round/>
+                      <a:headEnd type="none" w="med" len="med"/>
+                      <a:tailEnd type="none" w="med" len="med"/>
+                    </a:lnB>
+                  </a:tcPr>
+                </a:tc>
+              </a:tr>
+              <a:tr h="502920">
+                <a:tc>
+                  <a:txBody>
+                    <a:bodyPr/>
+                    <a:lstStyle/>
+                    <a:p>
+                      <a:pPr indent="0" marL="0">
+                        <a:buNone/>
+                      </a:pPr>
+                      <a:r>
+                        <a:rPr lang="en-US" sz="1300" dirty="0">
+                          <a:solidFill>
+                            <a:srgbClr val="3D3A36"/>
+                          </a:solidFill>
+                          <a:latin typeface="Calibri" pitchFamily="34" charset="0"/>
+                          <a:ea typeface="Calibri" pitchFamily="34" charset="-122"/>
+                          <a:cs typeface="Calibri" pitchFamily="34" charset="-120"/>
+                        </a:rPr>
+                        <a:t>3</a:t>
+                      </a:r>
+                      <a:endParaRPr lang="en-US" sz="1300" dirty="0">
+                        <a:latin typeface="Calibri" charset="0"/>
+                        <a:ea typeface="Calibri" charset="0"/>
+                        <a:cs typeface="Calibri" charset="0"/>
+                      </a:endParaRPr>
+                    </a:p>
+                  </a:txBody>
+                  <a:tcPr marL="91440" marR="91440" marT="45720" marB="45720">
+                    <a:lnL w="6350" cap="flat" cmpd="sng" algn="ctr">
+                      <a:solidFill>
+                        <a:srgbClr val="E5E2DC"/>
+                      </a:solidFill>
+                      <a:prstDash val="solid"/>
+                      <a:round/>
+                      <a:headEnd type="none" w="med" len="med"/>
+                      <a:tailEnd type="none" w="med" len="med"/>
+                    </a:lnL>
+                    <a:lnR w="6350" cap="flat" cmpd="sng" algn="ctr">
+                      <a:solidFill>
+                        <a:srgbClr val="E5E2DC"/>
+                      </a:solidFill>
+                      <a:prstDash val="solid"/>
+                      <a:round/>
+                      <a:headEnd type="none" w="med" len="med"/>
+                      <a:tailEnd type="none" w="med" len="med"/>
+                    </a:lnR>
+                    <a:lnT w="6350" cap="flat" cmpd="sng" algn="ctr">
+                      <a:solidFill>
+                        <a:srgbClr val="E5E2DC"/>
+                      </a:solidFill>
+                      <a:prstDash val="solid"/>
+                      <a:round/>
+                      <a:headEnd type="none" w="med" len="med"/>
+                      <a:tailEnd type="none" w="med" len="med"/>
+                    </a:lnT>
+                    <a:lnB w="6350" cap="flat" cmpd="sng" algn="ctr">
+                      <a:solidFill>
+                        <a:srgbClr val="E5E2DC"/>
+                      </a:solidFill>
+                      <a:prstDash val="solid"/>
+                      <a:round/>
+                      <a:headEnd type="none" w="med" len="med"/>
+                      <a:tailEnd type="none" w="med" len="med"/>
+                    </a:lnB>
+                  </a:tcPr>
+                </a:tc>
+                <a:tc>
+                  <a:txBody>
+                    <a:bodyPr/>
+                    <a:lstStyle/>
+                    <a:p>
+                      <a:pPr indent="0" marL="0">
+                        <a:buNone/>
+                      </a:pPr>
+                      <a:r>
+                        <a:rPr lang="en-US" sz="1300" dirty="0">
+                          <a:solidFill>
+                            <a:srgbClr val="3D3A36"/>
+                          </a:solidFill>
+                          <a:latin typeface="Calibri" pitchFamily="34" charset="0"/>
+                          <a:ea typeface="Calibri" pitchFamily="34" charset="-122"/>
+                          <a:cs typeface="Calibri" pitchFamily="34" charset="-120"/>
+                        </a:rPr>
+                        <a:t>11</a:t>
+                      </a:r>
+                      <a:endParaRPr lang="en-US" sz="1300" dirty="0">
+                        <a:latin typeface="Calibri" charset="0"/>
+                        <a:ea typeface="Calibri" charset="0"/>
+                        <a:cs typeface="Calibri" charset="0"/>
+                      </a:endParaRPr>
+                    </a:p>
+                  </a:txBody>
+                  <a:tcPr marL="91440" marR="91440" marT="45720" marB="45720">
+                    <a:lnL w="6350" cap="flat" cmpd="sng" algn="ctr">
+                      <a:solidFill>
+                        <a:srgbClr val="E5E2DC"/>
+                      </a:solidFill>
+                      <a:prstDash val="solid"/>
+                      <a:round/>
+                      <a:headEnd type="none" w="med" len="med"/>
+                      <a:tailEnd type="none" w="med" len="med"/>
+                    </a:lnL>
+                    <a:lnR w="6350" cap="flat" cmpd="sng" algn="ctr">
+                      <a:solidFill>
+                        <a:srgbClr val="E5E2DC"/>
+                      </a:solidFill>
+                      <a:prstDash val="solid"/>
+                      <a:round/>
+                      <a:headEnd type="none" w="med" len="med"/>
+                      <a:tailEnd type="none" w="med" len="med"/>
+                    </a:lnR>
+                    <a:lnT w="6350" cap="flat" cmpd="sng" algn="ctr">
+                      <a:solidFill>
+                        <a:srgbClr val="E5E2DC"/>
+                      </a:solidFill>
+                      <a:prstDash val="solid"/>
+                      <a:round/>
+                      <a:headEnd type="none" w="med" len="med"/>
+                      <a:tailEnd type="none" w="med" len="med"/>
+                    </a:lnT>
+                    <a:lnB w="6350" cap="flat" cmpd="sng" algn="ctr">
+                      <a:solidFill>
+                        <a:srgbClr val="E5E2DC"/>
+                      </a:solidFill>
+                      <a:prstDash val="solid"/>
+                      <a:round/>
+                      <a:headEnd type="none" w="med" len="med"/>
+                      <a:tailEnd type="none" w="med" len="med"/>
+                    </a:lnB>
+                  </a:tcPr>
+                </a:tc>
+                <a:tc>
+                  <a:txBody>
+                    <a:bodyPr/>
+                    <a:lstStyle/>
+                    <a:p>
+                      <a:pPr indent="0" marL="0">
+                        <a:buNone/>
+                      </a:pPr>
+                      <a:r>
+                        <a:rPr lang="en-US" sz="1300" dirty="0">
+                          <a:solidFill>
+                            <a:srgbClr val="3D3A36"/>
+                          </a:solidFill>
+                          <a:latin typeface="Calibri" pitchFamily="34" charset="0"/>
+                          <a:ea typeface="Calibri" pitchFamily="34" charset="-122"/>
+                          <a:cs typeface="Calibri" pitchFamily="34" charset="-120"/>
+                        </a:rPr>
+                        <a:t>9</a:t>
+                      </a:r>
+                      <a:endParaRPr lang="en-US" sz="1300" dirty="0">
+                        <a:latin typeface="Calibri" charset="0"/>
+                        <a:ea typeface="Calibri" charset="0"/>
+                        <a:cs typeface="Calibri" charset="0"/>
+                      </a:endParaRPr>
+                    </a:p>
+                  </a:txBody>
+                  <a:tcPr marL="91440" marR="91440" marT="45720" marB="45720">
+                    <a:lnL w="6350" cap="flat" cmpd="sng" algn="ctr">
+                      <a:solidFill>
+                        <a:srgbClr val="E5E2DC"/>
+                      </a:solidFill>
+                      <a:prstDash val="solid"/>
+                      <a:round/>
+                      <a:headEnd type="none" w="med" len="med"/>
+                      <a:tailEnd type="none" w="med" len="med"/>
+                    </a:lnL>
+                    <a:lnR w="6350" cap="flat" cmpd="sng" algn="ctr">
+                      <a:solidFill>
+                        <a:srgbClr val="E5E2DC"/>
+                      </a:solidFill>
+                      <a:prstDash val="solid"/>
+                      <a:round/>
+                      <a:headEnd type="none" w="med" len="med"/>
+                      <a:tailEnd type="none" w="med" len="med"/>
+                    </a:lnR>
+                    <a:lnT w="6350" cap="flat" cmpd="sng" algn="ctr">
+                      <a:solidFill>
+                        <a:srgbClr val="E5E2DC"/>
+                      </a:solidFill>
+                      <a:prstDash val="solid"/>
+                      <a:round/>
+                      <a:headEnd type="none" w="med" len="med"/>
+                      <a:tailEnd type="none" w="med" len="med"/>
+                    </a:lnT>
+                    <a:lnB w="6350" cap="flat" cmpd="sng" algn="ctr">
+                      <a:solidFill>
+                        <a:srgbClr val="E5E2DC"/>
+                      </a:solidFill>
+                      <a:prstDash val="solid"/>
+                      <a:round/>
+                      <a:headEnd type="none" w="med" len="med"/>
+                      <a:tailEnd type="none" w="med" len="med"/>
+                    </a:lnB>
+                  </a:tcPr>
+                </a:tc>
+                <a:tc>
+                  <a:txBody>
+                    <a:bodyPr/>
+                    <a:lstStyle/>
+                    <a:p>
+                      <a:pPr indent="0" marL="0">
+                        <a:buNone/>
+                      </a:pPr>
+                      <a:r>
+                        <a:rPr lang="en-US" sz="1300" dirty="0">
+                          <a:solidFill>
+                            <a:srgbClr val="3D3A36"/>
+                          </a:solidFill>
+                          <a:latin typeface="Calibri" pitchFamily="34" charset="0"/>
+                          <a:ea typeface="Calibri" pitchFamily="34" charset="-122"/>
+                          <a:cs typeface="Calibri" pitchFamily="34" charset="-120"/>
+                        </a:rPr>
+                        <a:t>+2</a:t>
+                      </a:r>
+                      <a:endParaRPr lang="en-US" sz="1300" dirty="0">
+                        <a:latin typeface="Calibri" charset="0"/>
+                        <a:ea typeface="Calibri" charset="0"/>
+                        <a:cs typeface="Calibri" charset="0"/>
+                      </a:endParaRPr>
+                    </a:p>
+                  </a:txBody>
+                  <a:tcPr marL="91440" marR="91440" marT="45720" marB="45720">
+                    <a:lnL w="6350" cap="flat" cmpd="sng" algn="ctr">
+                      <a:solidFill>
+                        <a:srgbClr val="E5E2DC"/>
+                      </a:solidFill>
+                      <a:prstDash val="solid"/>
+                      <a:round/>
+                      <a:headEnd type="none" w="med" len="med"/>
+                      <a:tailEnd type="none" w="med" len="med"/>
+                    </a:lnL>
+                    <a:lnR w="6350" cap="flat" cmpd="sng" algn="ctr">
+                      <a:solidFill>
+                        <a:srgbClr val="E5E2DC"/>
+                      </a:solidFill>
+                      <a:prstDash val="solid"/>
+                      <a:round/>
+                      <a:headEnd type="none" w="med" len="med"/>
+                      <a:tailEnd type="none" w="med" len="med"/>
+                    </a:lnR>
+                    <a:lnT w="6350" cap="flat" cmpd="sng" algn="ctr">
+                      <a:solidFill>
+                        <a:srgbClr val="E5E2DC"/>
+                      </a:solidFill>
+                      <a:prstDash val="solid"/>
+                      <a:round/>
+                      <a:headEnd type="none" w="med" len="med"/>
+                      <a:tailEnd type="none" w="med" len="med"/>
+                    </a:lnT>
+                    <a:lnB w="6350" cap="flat" cmpd="sng" algn="ctr">
+                      <a:solidFill>
+                        <a:srgbClr val="E5E2DC"/>
+                      </a:solidFill>
+                      <a:prstDash val="solid"/>
+                      <a:round/>
+                      <a:headEnd type="none" w="med" len="med"/>
+                      <a:tailEnd type="none" w="med" len="med"/>
+                    </a:lnB>
+                  </a:tcPr>
+                </a:tc>
+              </a:tr>
+              <a:tr h="502920">
+                <a:tc>
+                  <a:txBody>
+                    <a:bodyPr/>
+                    <a:lstStyle/>
+                    <a:p>
+                      <a:pPr indent="0" marL="0">
+                        <a:buNone/>
+                      </a:pPr>
+                      <a:r>
+                        <a:rPr lang="en-US" sz="1300" dirty="0">
+                          <a:solidFill>
+                            <a:srgbClr val="3D3A36"/>
+                          </a:solidFill>
+                          <a:latin typeface="Calibri" pitchFamily="34" charset="0"/>
+                          <a:ea typeface="Calibri" pitchFamily="34" charset="-122"/>
+                          <a:cs typeface="Calibri" pitchFamily="34" charset="-120"/>
+                        </a:rPr>
+                        <a:t>4</a:t>
+                      </a:r>
+                      <a:endParaRPr lang="en-US" sz="1300" dirty="0">
+                        <a:latin typeface="Calibri" charset="0"/>
+                        <a:ea typeface="Calibri" charset="0"/>
+                        <a:cs typeface="Calibri" charset="0"/>
+                      </a:endParaRPr>
+                    </a:p>
+                  </a:txBody>
+                  <a:tcPr marL="91440" marR="91440" marT="45720" marB="45720">
+                    <a:lnL w="6350" cap="flat" cmpd="sng" algn="ctr">
+                      <a:solidFill>
+                        <a:srgbClr val="E5E2DC"/>
+                      </a:solidFill>
+                      <a:prstDash val="solid"/>
+                      <a:round/>
+                      <a:headEnd type="none" w="med" len="med"/>
+                      <a:tailEnd type="none" w="med" len="med"/>
+                    </a:lnL>
+                    <a:lnR w="6350" cap="flat" cmpd="sng" algn="ctr">
+                      <a:solidFill>
+                        <a:srgbClr val="E5E2DC"/>
+                      </a:solidFill>
+                      <a:prstDash val="solid"/>
+                      <a:round/>
+                      <a:headEnd type="none" w="med" len="med"/>
+                      <a:tailEnd type="none" w="med" len="med"/>
+                    </a:lnR>
+                    <a:lnT w="6350" cap="flat" cmpd="sng" algn="ctr">
+                      <a:solidFill>
+                        <a:srgbClr val="E5E2DC"/>
+                      </a:solidFill>
+                      <a:prstDash val="solid"/>
+                      <a:round/>
+                      <a:headEnd type="none" w="med" len="med"/>
+                      <a:tailEnd type="none" w="med" len="med"/>
+                    </a:lnT>
+                    <a:lnB w="6350" cap="flat" cmpd="sng" algn="ctr">
+                      <a:solidFill>
+                        <a:srgbClr val="E5E2DC"/>
+                      </a:solidFill>
+                      <a:prstDash val="solid"/>
+                      <a:round/>
+                      <a:headEnd type="none" w="med" len="med"/>
+                      <a:tailEnd type="none" w="med" len="med"/>
+                    </a:lnB>
+                  </a:tcPr>
+                </a:tc>
+                <a:tc>
+                  <a:txBody>
+                    <a:bodyPr/>
+                    <a:lstStyle/>
+                    <a:p>
+                      <a:pPr indent="0" marL="0">
+                        <a:buNone/>
+                      </a:pPr>
+                      <a:r>
+                        <a:rPr lang="en-US" sz="1300" dirty="0">
+                          <a:solidFill>
+                            <a:srgbClr val="3D3A36"/>
+                          </a:solidFill>
+                          <a:latin typeface="Calibri" pitchFamily="34" charset="0"/>
+                          <a:ea typeface="Calibri" pitchFamily="34" charset="-122"/>
+                          <a:cs typeface="Calibri" pitchFamily="34" charset="-120"/>
+                        </a:rPr>
+                        <a:t>14</a:t>
+                      </a:r>
+                      <a:endParaRPr lang="en-US" sz="1300" dirty="0">
+                        <a:latin typeface="Calibri" charset="0"/>
+                        <a:ea typeface="Calibri" charset="0"/>
+                        <a:cs typeface="Calibri" charset="0"/>
+                      </a:endParaRPr>
+                    </a:p>
+                  </a:txBody>
+                  <a:tcPr marL="91440" marR="91440" marT="45720" marB="45720">
+                    <a:lnL w="6350" cap="flat" cmpd="sng" algn="ctr">
+                      <a:solidFill>
+                        <a:srgbClr val="E5E2DC"/>
+                      </a:solidFill>
+                      <a:prstDash val="solid"/>
+                      <a:round/>
+                      <a:headEnd type="none" w="med" len="med"/>
+                      <a:tailEnd type="none" w="med" len="med"/>
+                    </a:lnL>
+                    <a:lnR w="6350" cap="flat" cmpd="sng" algn="ctr">
+                      <a:solidFill>
+                        <a:srgbClr val="E5E2DC"/>
+                      </a:solidFill>
+                      <a:prstDash val="solid"/>
+                      <a:round/>
+                      <a:headEnd type="none" w="med" len="med"/>
+                      <a:tailEnd type="none" w="med" len="med"/>
+                    </a:lnR>
+                    <a:lnT w="6350" cap="flat" cmpd="sng" algn="ctr">
+                      <a:solidFill>
+                        <a:srgbClr val="E5E2DC"/>
+                      </a:solidFill>
+                      <a:prstDash val="solid"/>
+                      <a:round/>
+                      <a:headEnd type="none" w="med" len="med"/>
+                      <a:tailEnd type="none" w="med" len="med"/>
+                    </a:lnT>
+                    <a:lnB w="6350" cap="flat" cmpd="sng" algn="ctr">
+                      <a:solidFill>
+                        <a:srgbClr val="E5E2DC"/>
+                      </a:solidFill>
+                      <a:prstDash val="solid"/>
+                      <a:round/>
+                      <a:headEnd type="none" w="med" len="med"/>
+                      <a:tailEnd type="none" w="med" len="med"/>
+                    </a:lnB>
+                  </a:tcPr>
+                </a:tc>
+                <a:tc>
+                  <a:txBody>
+                    <a:bodyPr/>
+                    <a:lstStyle/>
+                    <a:p>
+                      <a:pPr indent="0" marL="0">
+                        <a:buNone/>
+                      </a:pPr>
+                      <a:r>
+                        <a:rPr lang="en-US" sz="1300" dirty="0">
+                          <a:solidFill>
+                            <a:srgbClr val="3D3A36"/>
+                          </a:solidFill>
+                          <a:latin typeface="Calibri" pitchFamily="34" charset="0"/>
+                          <a:ea typeface="Calibri" pitchFamily="34" charset="-122"/>
+                          <a:cs typeface="Calibri" pitchFamily="34" charset="-120"/>
+                        </a:rPr>
+                        <a:t>12</a:t>
+                      </a:r>
+                      <a:endParaRPr lang="en-US" sz="1300" dirty="0">
+                        <a:latin typeface="Calibri" charset="0"/>
+                        <a:ea typeface="Calibri" charset="0"/>
+                        <a:cs typeface="Calibri" charset="0"/>
+                      </a:endParaRPr>
+                    </a:p>
+                  </a:txBody>
+                  <a:tcPr marL="91440" marR="91440" marT="45720" marB="45720">
+                    <a:lnL w="6350" cap="flat" cmpd="sng" algn="ctr">
+                      <a:solidFill>
+                        <a:srgbClr val="E5E2DC"/>
+                      </a:solidFill>
+                      <a:prstDash val="solid"/>
+                      <a:round/>
+                      <a:headEnd type="none" w="med" len="med"/>
+                      <a:tailEnd type="none" w="med" len="med"/>
+                    </a:lnL>
+                    <a:lnR w="6350" cap="flat" cmpd="sng" algn="ctr">
+                      <a:solidFill>
+                        <a:srgbClr val="E5E2DC"/>
+                      </a:solidFill>
+                      <a:prstDash val="solid"/>
+                      <a:round/>
+                      <a:headEnd type="none" w="med" len="med"/>
+                      <a:tailEnd type="none" w="med" len="med"/>
+                    </a:lnR>
+                    <a:lnT w="6350" cap="flat" cmpd="sng" algn="ctr">
+                      <a:solidFill>
+                        <a:srgbClr val="E5E2DC"/>
+                      </a:solidFill>
+                      <a:prstDash val="solid"/>
+                      <a:round/>
+                      <a:headEnd type="none" w="med" len="med"/>
+                      <a:tailEnd type="none" w="med" len="med"/>
+                    </a:lnT>
+                    <a:lnB w="6350" cap="flat" cmpd="sng" algn="ctr">
+                      <a:solidFill>
+                        <a:srgbClr val="E5E2DC"/>
+                      </a:solidFill>
+                      <a:prstDash val="solid"/>
+                      <a:round/>
+                      <a:headEnd type="none" w="med" len="med"/>
+                      <a:tailEnd type="none" w="med" len="med"/>
+                    </a:lnB>
+                  </a:tcPr>
+                </a:tc>
+                <a:tc>
+                  <a:txBody>
+                    <a:bodyPr/>
+                    <a:lstStyle/>
+                    <a:p>
+                      <a:pPr indent="0" marL="0">
+                        <a:buNone/>
+                      </a:pPr>
+                      <a:r>
+                        <a:rPr lang="en-US" sz="1300" dirty="0">
+                          <a:solidFill>
+                            <a:srgbClr val="3D3A36"/>
+                          </a:solidFill>
+                          <a:latin typeface="Calibri" pitchFamily="34" charset="0"/>
+                          <a:ea typeface="Calibri" pitchFamily="34" charset="-122"/>
+                          <a:cs typeface="Calibri" pitchFamily="34" charset="-120"/>
+                        </a:rPr>
+                        <a:t>+2</a:t>
+                      </a:r>
+                      <a:endParaRPr lang="en-US" sz="1300" dirty="0">
+                        <a:latin typeface="Calibri" charset="0"/>
+                        <a:ea typeface="Calibri" charset="0"/>
+                        <a:cs typeface="Calibri" charset="0"/>
+                      </a:endParaRPr>
+                    </a:p>
+                  </a:txBody>
+                  <a:tcPr marL="91440" marR="91440" marT="45720" marB="45720">
+                    <a:lnL w="6350" cap="flat" cmpd="sng" algn="ctr">
+                      <a:solidFill>
+                        <a:srgbClr val="E5E2DC"/>
+                      </a:solidFill>
+                      <a:prstDash val="solid"/>
+                      <a:round/>
+                      <a:headEnd type="none" w="med" len="med"/>
+                      <a:tailEnd type="none" w="med" len="med"/>
+                    </a:lnL>
+                    <a:lnR w="6350" cap="flat" cmpd="sng" algn="ctr">
+                      <a:solidFill>
+                        <a:srgbClr val="E5E2DC"/>
+                      </a:solidFill>
+                      <a:prstDash val="solid"/>
+                      <a:round/>
+                      <a:headEnd type="none" w="med" len="med"/>
+                      <a:tailEnd type="none" w="med" len="med"/>
+                    </a:lnR>
+                    <a:lnT w="6350" cap="flat" cmpd="sng" algn="ctr">
+                      <a:solidFill>
+                        <a:srgbClr val="E5E2DC"/>
+                      </a:solidFill>
+                      <a:prstDash val="solid"/>
+                      <a:round/>
+                      <a:headEnd type="none" w="med" len="med"/>
+                      <a:tailEnd type="none" w="med" len="med"/>
+                    </a:lnT>
+                    <a:lnB w="6350" cap="flat" cmpd="sng" algn="ctr">
+                      <a:solidFill>
+                        <a:srgbClr val="E5E2DC"/>
+                      </a:solidFill>
+                      <a:prstDash val="solid"/>
+                      <a:round/>
+                      <a:headEnd type="none" w="med" len="med"/>
+                      <a:tailEnd type="none" w="med" len="med"/>
+                    </a:lnB>
+                  </a:tcPr>
+                </a:tc>
+              </a:tr>
+              <a:tr h="502920">
+                <a:tc>
+                  <a:txBody>
+                    <a:bodyPr/>
+                    <a:lstStyle/>
+                    <a:p>
+                      <a:pPr indent="0" marL="0">
+                        <a:buNone/>
+                      </a:pPr>
+                      <a:r>
+                        <a:rPr lang="en-US" sz="1300" dirty="0">
+                          <a:solidFill>
+                            <a:srgbClr val="3D3A36"/>
+                          </a:solidFill>
+                          <a:latin typeface="Calibri" pitchFamily="34" charset="0"/>
+                          <a:ea typeface="Calibri" pitchFamily="34" charset="-122"/>
+                          <a:cs typeface="Calibri" pitchFamily="34" charset="-120"/>
+                        </a:rPr>
+                        <a:t>n</a:t>
+                      </a:r>
+                      <a:endParaRPr lang="en-US" sz="1300" dirty="0">
+                        <a:latin typeface="Calibri" charset="0"/>
+                        <a:ea typeface="Calibri" charset="0"/>
+                        <a:cs typeface="Calibri" charset="0"/>
+                      </a:endParaRPr>
+                    </a:p>
+                  </a:txBody>
+                  <a:tcPr marL="91440" marR="91440" marT="45720" marB="45720">
+                    <a:lnL w="6350" cap="flat" cmpd="sng" algn="ctr">
+                      <a:solidFill>
+                        <a:srgbClr val="E5E2DC"/>
+                      </a:solidFill>
+                      <a:prstDash val="solid"/>
+                      <a:round/>
+                      <a:headEnd type="none" w="med" len="med"/>
+                      <a:tailEnd type="none" w="med" len="med"/>
+                    </a:lnL>
+                    <a:lnR w="6350" cap="flat" cmpd="sng" algn="ctr">
+                      <a:solidFill>
+                        <a:srgbClr val="E5E2DC"/>
+                      </a:solidFill>
+                      <a:prstDash val="solid"/>
+                      <a:round/>
+                      <a:headEnd type="none" w="med" len="med"/>
+                      <a:tailEnd type="none" w="med" len="med"/>
+                    </a:lnR>
+                    <a:lnT w="6350" cap="flat" cmpd="sng" algn="ctr">
+                      <a:solidFill>
+                        <a:srgbClr val="E5E2DC"/>
+                      </a:solidFill>
+                      <a:prstDash val="solid"/>
+                      <a:round/>
+                      <a:headEnd type="none" w="med" len="med"/>
+                      <a:tailEnd type="none" w="med" len="med"/>
+                    </a:lnT>
+                    <a:lnB w="6350" cap="flat" cmpd="sng" algn="ctr">
+                      <a:solidFill>
+                        <a:srgbClr val="E5E2DC"/>
+                      </a:solidFill>
+                      <a:prstDash val="solid"/>
+                      <a:round/>
+                      <a:headEnd type="none" w="med" len="med"/>
+                      <a:tailEnd type="none" w="med" len="med"/>
+                    </a:lnB>
+                  </a:tcPr>
+                </a:tc>
+                <a:tc>
+                  <a:txBody>
+                    <a:bodyPr/>
+                    <a:lstStyle/>
+                    <a:p>
+                      <a:pPr indent="0" marL="0">
+                        <a:buNone/>
+                      </a:pPr>
+                      <a:r>
+                        <a:rPr lang="en-US" sz="1300" dirty="0">
+                          <a:solidFill>
+                            <a:srgbClr val="3D3A36"/>
+                          </a:solidFill>
+                          <a:latin typeface="Calibri" pitchFamily="34" charset="0"/>
+                          <a:ea typeface="Calibri" pitchFamily="34" charset="-122"/>
+                          <a:cs typeface="Calibri" pitchFamily="34" charset="-120"/>
+                        </a:rPr>
+                        <a:t>3n + 2</a:t>
+                      </a:r>
+                      <a:endParaRPr lang="en-US" sz="1300" dirty="0">
+                        <a:latin typeface="Calibri" charset="0"/>
+                        <a:ea typeface="Calibri" charset="0"/>
+                        <a:cs typeface="Calibri" charset="0"/>
+                      </a:endParaRPr>
+                    </a:p>
+                  </a:txBody>
+                  <a:tcPr marL="91440" marR="91440" marT="45720" marB="45720">
+                    <a:lnL w="6350" cap="flat" cmpd="sng" algn="ctr">
+                      <a:solidFill>
+                        <a:srgbClr val="E5E2DC"/>
+                      </a:solidFill>
+                      <a:prstDash val="solid"/>
+                      <a:round/>
+                      <a:headEnd type="none" w="med" len="med"/>
+                      <a:tailEnd type="none" w="med" len="med"/>
+                    </a:lnL>
+                    <a:lnR w="6350" cap="flat" cmpd="sng" algn="ctr">
+                      <a:solidFill>
+                        <a:srgbClr val="E5E2DC"/>
+                      </a:solidFill>
+                      <a:prstDash val="solid"/>
+                      <a:round/>
+                      <a:headEnd type="none" w="med" len="med"/>
+                      <a:tailEnd type="none" w="med" len="med"/>
+                    </a:lnR>
+                    <a:lnT w="6350" cap="flat" cmpd="sng" algn="ctr">
+                      <a:solidFill>
+                        <a:srgbClr val="E5E2DC"/>
+                      </a:solidFill>
+                      <a:prstDash val="solid"/>
+                      <a:round/>
+                      <a:headEnd type="none" w="med" len="med"/>
+                      <a:tailEnd type="none" w="med" len="med"/>
+                    </a:lnT>
+                    <a:lnB w="6350" cap="flat" cmpd="sng" algn="ctr">
+                      <a:solidFill>
+                        <a:srgbClr val="E5E2DC"/>
+                      </a:solidFill>
+                      <a:prstDash val="solid"/>
+                      <a:round/>
+                      <a:headEnd type="none" w="med" len="med"/>
+                      <a:tailEnd type="none" w="med" len="med"/>
+                    </a:lnB>
+                  </a:tcPr>
+                </a:tc>
+                <a:tc>
+                  <a:txBody>
+                    <a:bodyPr/>
+                    <a:lstStyle/>
+                    <a:p>
+                      <a:pPr indent="0" marL="0">
+                        <a:buNone/>
+                      </a:pPr>
+                      <a:r>
+                        <a:rPr lang="en-US" sz="1300" dirty="0">
+                          <a:solidFill>
+                            <a:srgbClr val="3D3A36"/>
+                          </a:solidFill>
+                          <a:latin typeface="Calibri" pitchFamily="34" charset="0"/>
+                          <a:ea typeface="Calibri" pitchFamily="34" charset="-122"/>
+                          <a:cs typeface="Calibri" pitchFamily="34" charset="-120"/>
+                        </a:rPr>
+                        <a:t>—</a:t>
+                      </a:r>
+                      <a:endParaRPr lang="en-US" sz="1300" dirty="0">
+                        <a:latin typeface="Calibri" charset="0"/>
+                        <a:ea typeface="Calibri" charset="0"/>
+                        <a:cs typeface="Calibri" charset="0"/>
+                      </a:endParaRPr>
+                    </a:p>
+                  </a:txBody>
+                  <a:tcPr marL="91440" marR="91440" marT="45720" marB="45720">
+                    <a:lnL w="6350" cap="flat" cmpd="sng" algn="ctr">
+                      <a:solidFill>
+                        <a:srgbClr val="E5E2DC"/>
+                      </a:solidFill>
+                      <a:prstDash val="solid"/>
+                      <a:round/>
+                      <a:headEnd type="none" w="med" len="med"/>
+                      <a:tailEnd type="none" w="med" len="med"/>
+                    </a:lnL>
+                    <a:lnR w="6350" cap="flat" cmpd="sng" algn="ctr">
+                      <a:solidFill>
+                        <a:srgbClr val="E5E2DC"/>
+                      </a:solidFill>
+                      <a:prstDash val="solid"/>
+                      <a:round/>
+                      <a:headEnd type="none" w="med" len="med"/>
+                      <a:tailEnd type="none" w="med" len="med"/>
+                    </a:lnR>
+                    <a:lnT w="6350" cap="flat" cmpd="sng" algn="ctr">
+                      <a:solidFill>
+                        <a:srgbClr val="E5E2DC"/>
+                      </a:solidFill>
+                      <a:prstDash val="solid"/>
+                      <a:round/>
+                      <a:headEnd type="none" w="med" len="med"/>
+                      <a:tailEnd type="none" w="med" len="med"/>
+                    </a:lnT>
+                    <a:lnB w="6350" cap="flat" cmpd="sng" algn="ctr">
+                      <a:solidFill>
+                        <a:srgbClr val="E5E2DC"/>
+                      </a:solidFill>
+                      <a:prstDash val="solid"/>
+                      <a:round/>
+                      <a:headEnd type="none" w="med" len="med"/>
+                      <a:tailEnd type="none" w="med" len="med"/>
+                    </a:lnB>
+                  </a:tcPr>
+                </a:tc>
+                <a:tc>
+                  <a:txBody>
+                    <a:bodyPr/>
+                    <a:lstStyle/>
+                    <a:p>
+                      <a:pPr indent="0" marL="0">
+                        <a:buNone/>
+                      </a:pPr>
+                      <a:r>
+                        <a:rPr lang="en-US" sz="1300" dirty="0">
+                          <a:solidFill>
+                            <a:srgbClr val="3D3A36"/>
+                          </a:solidFill>
+                          <a:latin typeface="Calibri" pitchFamily="34" charset="0"/>
+                          <a:ea typeface="Calibri" pitchFamily="34" charset="-122"/>
+                          <a:cs typeface="Calibri" pitchFamily="34" charset="-120"/>
+                        </a:rPr>
+                        <a:t>Rule: T = 3n + 2</a:t>
+                      </a:r>
+                      <a:endParaRPr lang="en-US" sz="1300" dirty="0">
+                        <a:latin typeface="Calibri" charset="0"/>
+                        <a:ea typeface="Calibri" charset="0"/>
+                        <a:cs typeface="Calibri" charset="0"/>
+                      </a:endParaRPr>
+                    </a:p>
+                  </a:txBody>
+                  <a:tcPr marL="91440" marR="91440" marT="45720" marB="45720">
+                    <a:lnL w="6350" cap="flat" cmpd="sng" algn="ctr">
+                      <a:solidFill>
+                        <a:srgbClr val="E5E2DC"/>
+                      </a:solidFill>
+                      <a:prstDash val="solid"/>
+                      <a:round/>
+                      <a:headEnd type="none" w="med" len="med"/>
+                      <a:tailEnd type="none" w="med" len="med"/>
+                    </a:lnL>
+                    <a:lnR w="6350" cap="flat" cmpd="sng" algn="ctr">
+                      <a:solidFill>
+                        <a:srgbClr val="E5E2DC"/>
+                      </a:solidFill>
+                      <a:prstDash val="solid"/>
+                      <a:round/>
+                      <a:headEnd type="none" w="med" len="med"/>
+                      <a:tailEnd type="none" w="med" len="med"/>
+                    </a:lnR>
+                    <a:lnT w="6350" cap="flat" cmpd="sng" algn="ctr">
+                      <a:solidFill>
+                        <a:srgbClr val="E5E2DC"/>
+                      </a:solidFill>
+                      <a:prstDash val="solid"/>
+                      <a:round/>
+                      <a:headEnd type="none" w="med" len="med"/>
+                      <a:tailEnd type="none" w="med" len="med"/>
+                    </a:lnT>
+                    <a:lnB w="6350" cap="flat" cmpd="sng" algn="ctr">
+                      <a:solidFill>
+                        <a:srgbClr val="E5E2DC"/>
+                      </a:solidFill>
+                      <a:prstDash val="solid"/>
+                      <a:round/>
+                      <a:headEnd type="none" w="med" len="med"/>
+                      <a:tailEnd type="none" w="med" len="med"/>
+                    </a:lnB>
+                  </a:tcPr>
+                </a:tc>
+              </a:tr>
+            </a:tbl>
+          </a:graphicData>
+        </a:graphic>
+      </p:graphicFrame>
+    </p:spTree>
+  </p:cSld>
+  <p:clrMapOvr>
+    <a:masterClrMapping/>
+  </p:clrMapOvr>
+</p:sld>
+</file>
+
+<file path=ppt/slides/slide6.xml><?xml version="1.0" encoding="utf-8"?>
+<p:sld xmlns:a="http://schemas.openxmlformats.org/drawingml/2006/main" xmlns:r="http://schemas.openxmlformats.org/officeDocument/2006/relationships" xmlns:p="http://schemas.openxmlformats.org/presentationml/2006/main">
+  <p:cSld name="Slide 6">
+    <p:bg>
+      <p:bgPr>
+        <a:solidFill>
+          <a:srgbClr val="FAF8F5"/>
+        </a:solidFill>
+      </p:bgPr>
+    </p:bg>
+    <p:spTree>
+      <p:nvGrpSpPr>
+        <p:cNvPr id="1" name=""/>
+        <p:cNvGrpSpPr/>
+        <p:nvPr/>
+      </p:nvGrpSpPr>
+      <p:grpSpPr>
+        <a:xfrm>
+          <a:off x="0" y="0"/>
+          <a:ext cx="0" cy="0"/>
+          <a:chOff x="0" y="0"/>
+          <a:chExt cx="0" cy="0"/>
+        </a:xfrm>
+      </p:grpSpPr>
+      <p:sp>
+        <p:nvSpPr>
+          <p:cNvPr id="2" name="Shape 0"/>
+          <p:cNvSpPr/>
+          <p:nvPr/>
+        </p:nvSpPr>
+        <p:spPr>
+          <a:xfrm>
+            <a:off x="0" y="0"/>
+            <a:ext cx="9144000" cy="822960"/>
+          </a:xfrm>
+          <a:prstGeom prst="rect">
+            <a:avLst/>
+          </a:prstGeom>
+          <a:solidFill>
+            <a:srgbClr val="FFFFFF"/>
+          </a:solidFill>
+          <a:ln/>
+        </p:spPr>
+      </p:sp>
+      <p:sp>
+        <p:nvSpPr>
+          <p:cNvPr id="3" name="Shape 1"/>
+          <p:cNvSpPr/>
+          <p:nvPr/>
+        </p:nvSpPr>
+        <p:spPr>
+          <a:xfrm>
+            <a:off x="0" y="795528"/>
+            <a:ext cx="9144000" cy="27432"/>
+          </a:xfrm>
+          <a:prstGeom prst="rect">
+            <a:avLst/>
+          </a:prstGeom>
+          <a:solidFill>
+            <a:srgbClr val="2A9D8F"/>
+          </a:solidFill>
+          <a:ln/>
+        </p:spPr>
+      </p:sp>
+      <p:sp>
+        <p:nvSpPr>
+          <p:cNvPr id="4" name="Text 2"/>
+          <p:cNvSpPr/>
+          <p:nvPr/>
+        </p:nvSpPr>
+        <p:spPr>
+          <a:xfrm>
+            <a:off x="640080" y="91440"/>
+            <a:ext cx="7863840" cy="640080"/>
+          </a:xfrm>
+          <a:prstGeom prst="rect">
+            <a:avLst/>
+          </a:prstGeom>
+          <a:noFill/>
+          <a:ln/>
+        </p:spPr>
+        <p:txBody>
+          <a:bodyPr wrap="square" lIns="0" tIns="0" rIns="0" bIns="0" rtlCol="0" anchor="ctr"/>
+          <a:lstStyle/>
+          <a:p>
+            <a:pPr indent="0" marL="0">
+              <a:buNone/>
+            </a:pPr>
+            <a:r>
+              <a:rPr lang="en-US" sz="2200" b="1" dirty="0">
+                <a:solidFill>
+                  <a:srgbClr val="1B2A4A"/>
+                </a:solidFill>
+                <a:latin typeface="Georgia" pitchFamily="34" charset="0"/>
+                <a:ea typeface="Georgia" pitchFamily="34" charset="-122"/>
+                <a:cs typeface="Georgia" pitchFamily="34" charset="-120"/>
+              </a:rPr>
+              <a:t>Using the Rule</a:t>
+            </a:r>
+            <a:endParaRPr lang="en-US" sz="2200" dirty="0"/>
+          </a:p>
+        </p:txBody>
+      </p:sp>
+      <p:sp>
+        <p:nvSpPr>
+          <p:cNvPr id="5" name="Shape 3"/>
+          <p:cNvSpPr/>
+          <p:nvPr/>
+        </p:nvSpPr>
+        <p:spPr>
+          <a:xfrm>
+            <a:off x="457200" y="1005840"/>
+            <a:ext cx="3931920" cy="3657600"/>
+          </a:xfrm>
+          <a:prstGeom prst="rect">
+            <a:avLst/>
+          </a:prstGeom>
+          <a:solidFill>
+            <a:srgbClr val="FFFFFF"/>
+          </a:solidFill>
+          <a:ln/>
+          <a:effectLst>
+            <a:outerShdw sx="100000" sy="100000" kx="0" ky="0" algn="bl" rotWithShape="0" blurRad="76200" dist="25400" dir="8100000">
+              <a:srgbClr val="000000">
+                <a:alpha val="12000"/>
+              </a:srgbClr>
+            </a:outerShdw>
+          </a:effectLst>
+        </p:spPr>
+      </p:sp>
+      <p:sp>
+        <p:nvSpPr>
+          <p:cNvPr id="6" name="Shape 4"/>
+          <p:cNvSpPr/>
+          <p:nvPr/>
+        </p:nvSpPr>
+        <p:spPr>
+          <a:xfrm>
+            <a:off x="457200" y="1005840"/>
+            <a:ext cx="3931920" cy="64008"/>
+          </a:xfrm>
+          <a:prstGeom prst="rect">
+            <a:avLst/>
+          </a:prstGeom>
+          <a:solidFill>
+            <a:srgbClr val="2A9D8F"/>
+          </a:solidFill>
+          <a:ln/>
+        </p:spPr>
+      </p:sp>
+      <p:sp>
+        <p:nvSpPr>
+          <p:cNvPr id="7" name="Text 5"/>
+          <p:cNvSpPr/>
+          <p:nvPr/>
+        </p:nvSpPr>
+        <p:spPr>
+          <a:xfrm>
+            <a:off x="640080" y="1188720"/>
+            <a:ext cx="3566160" cy="457200"/>
+          </a:xfrm>
+          <a:prstGeom prst="rect">
+            <a:avLst/>
+          </a:prstGeom>
+          <a:noFill/>
+          <a:ln/>
+        </p:spPr>
+        <p:txBody>
+          <a:bodyPr wrap="square" rtlCol="0" anchor="ctr"/>
+          <a:lstStyle/>
+          <a:p>
+            <a:pPr indent="0" marL="0">
+              <a:buNone/>
+            </a:pPr>
+            <a:r>
+              <a:rPr lang="en-US" sz="1600" b="1" dirty="0">
+                <a:solidFill>
+                  <a:srgbClr val="2A9D8F"/>
+                </a:solidFill>
+                <a:latin typeface="Calibri" pitchFamily="34" charset="0"/>
+                <a:ea typeface="Calibri" pitchFamily="34" charset="-122"/>
+                <a:cs typeface="Calibri" pitchFamily="34" charset="-120"/>
+              </a:rPr>
+              <a:t>Predict Any Term</a:t>
+            </a:r>
+            <a:endParaRPr lang="en-US" sz="1600" dirty="0"/>
+          </a:p>
+        </p:txBody>
+      </p:sp>
+      <p:sp>
+        <p:nvSpPr>
+          <p:cNvPr id="8" name="Text 6"/>
+          <p:cNvSpPr/>
+          <p:nvPr/>
+        </p:nvSpPr>
+        <p:spPr>
+          <a:xfrm>
+            <a:off x="640080" y="1691640"/>
+            <a:ext cx="3566160" cy="2743200"/>
+          </a:xfrm>
+          <a:prstGeom prst="rect">
+            <a:avLst/>
+          </a:prstGeom>
+          <a:noFill/>
+          <a:ln/>
+        </p:spPr>
+        <p:txBody>
+          <a:bodyPr wrap="square" rtlCol="0" anchor="ctr"/>
+          <a:lstStyle/>
+          <a:p>
+            <a:pPr marL="342900" indent="-342900">
+              <a:spcAft>
+                <a:spcPts val="600"/>
+              </a:spcAft>
+              <a:buSzPct val="100000"/>
+              <a:buChar char="•"/>
+            </a:pPr>
+            <a:r>
+              <a:rPr lang="en-US" sz="1400" dirty="0">
+                <a:solidFill>
+                  <a:srgbClr val="3D3A36"/>
+                </a:solidFill>
+                <a:latin typeface="Calibri" pitchFamily="34" charset="0"/>
+                <a:ea typeface="Calibri" pitchFamily="34" charset="-122"/>
+                <a:cs typeface="Calibri" pitchFamily="34" charset="-120"/>
+              </a:rPr>
+              <a:t>Rule: 3n + 2</a:t>
+            </a:r>
+            <a:endParaRPr lang="en-US" sz="1400" dirty="0"/>
+          </a:p>
+          <a:p>
+            <a:pPr marL="342900" indent="-342900">
+              <a:spcAft>
+                <a:spcPts val="600"/>
+              </a:spcAft>
+              <a:buSzPct val="100000"/>
+              <a:buChar char="•"/>
+            </a:pPr>
+            <a:r>
+              <a:rPr lang="en-US" sz="1400" dirty="0">
+                <a:solidFill>
+                  <a:srgbClr val="3D3A36"/>
+                </a:solidFill>
+                <a:latin typeface="Calibri" pitchFamily="34" charset="0"/>
+                <a:ea typeface="Calibri" pitchFamily="34" charset="-122"/>
+                <a:cs typeface="Calibri" pitchFamily="34" charset="-120"/>
+              </a:rPr>
+              <a:t>10th term: 3(10)+2 = 32</a:t>
+            </a:r>
+            <a:endParaRPr lang="en-US" sz="1400" dirty="0"/>
+          </a:p>
+          <a:p>
+            <a:pPr marL="342900" indent="-342900">
+              <a:spcAft>
+                <a:spcPts val="600"/>
+              </a:spcAft>
+              <a:buSzPct val="100000"/>
+              <a:buChar char="•"/>
+            </a:pPr>
+            <a:r>
+              <a:rPr lang="en-US" sz="1400" dirty="0">
+                <a:solidFill>
+                  <a:srgbClr val="3D3A36"/>
+                </a:solidFill>
+                <a:latin typeface="Calibri" pitchFamily="34" charset="0"/>
+                <a:ea typeface="Calibri" pitchFamily="34" charset="-122"/>
+                <a:cs typeface="Calibri" pitchFamily="34" charset="-120"/>
+              </a:rPr>
+              <a:t>50th term: 3(50)+2 = 152</a:t>
+            </a:r>
+            <a:endParaRPr lang="en-US" sz="1400" dirty="0"/>
+          </a:p>
+          <a:p>
+            <a:pPr marL="342900" indent="-342900">
+              <a:spcAft>
+                <a:spcPts val="600"/>
+              </a:spcAft>
+              <a:buSzPct val="100000"/>
+              <a:buChar char="•"/>
+            </a:pPr>
+            <a:r>
+              <a:rPr lang="en-US" sz="1400" dirty="0">
+                <a:solidFill>
+                  <a:srgbClr val="3D3A36"/>
+                </a:solidFill>
+                <a:latin typeface="Calibri" pitchFamily="34" charset="0"/>
+                <a:ea typeface="Calibri" pitchFamily="34" charset="-122"/>
+                <a:cs typeface="Calibri" pitchFamily="34" charset="-120"/>
+              </a:rPr>
+              <a:t>100th term: 3(100)+2 = 302</a:t>
+            </a:r>
+            <a:endParaRPr lang="en-US" sz="1400" dirty="0"/>
+          </a:p>
+        </p:txBody>
+      </p:sp>
+      <p:sp>
+        <p:nvSpPr>
+          <p:cNvPr id="9" name="Shape 7"/>
+          <p:cNvSpPr/>
+          <p:nvPr/>
+        </p:nvSpPr>
+        <p:spPr>
+          <a:xfrm>
+            <a:off x="4754880" y="1005840"/>
+            <a:ext cx="3931920" cy="3657600"/>
+          </a:xfrm>
+          <a:prstGeom prst="rect">
+            <a:avLst/>
+          </a:prstGeom>
+          <a:solidFill>
+            <a:srgbClr val="FFFFFF"/>
+          </a:solidFill>
+          <a:ln/>
+          <a:effectLst>
+            <a:outerShdw sx="100000" sy="100000" kx="0" ky="0" algn="bl" rotWithShape="0" blurRad="76200" dist="25400" dir="8100000">
+              <a:srgbClr val="000000">
+                <a:alpha val="12000"/>
+              </a:srgbClr>
+            </a:outerShdw>
+          </a:effectLst>
+        </p:spPr>
+      </p:sp>
+      <p:sp>
+        <p:nvSpPr>
+          <p:cNvPr id="10" name="Shape 8"/>
+          <p:cNvSpPr/>
+          <p:nvPr/>
+        </p:nvSpPr>
+        <p:spPr>
+          <a:xfrm>
+            <a:off x="4754880" y="1005840"/>
+            <a:ext cx="3931920" cy="64008"/>
           </a:xfrm>
           <a:prstGeom prst="rect">
             <a:avLst/>
@@ -2406,14 +4760,14 @@
       </p:sp>
       <p:sp>
         <p:nvSpPr>
-          <p:cNvPr id="3" name="Text 1"/>
-          <p:cNvSpPr/>
-          <p:nvPr/>
-        </p:nvSpPr>
-        <p:spPr>
-          <a:xfrm>
-            <a:off x="731520" y="457200"/>
-            <a:ext cx="7772400" cy="731520"/>
+          <p:cNvPr id="11" name="Text 9"/>
+          <p:cNvSpPr/>
+          <p:nvPr/>
+        </p:nvSpPr>
+        <p:spPr>
+          <a:xfrm>
+            <a:off x="4937760" y="1188720"/>
+            <a:ext cx="3566160" cy="457200"/>
           </a:xfrm>
           <a:prstGeom prst="rect">
             <a:avLst/>
@@ -2429,7 +4783,1162 @@
               <a:buNone/>
             </a:pPr>
             <a:r>
-              <a:rPr lang="en-US" sz="3200" b="1" dirty="0">
+              <a:rPr lang="en-US" sz="1600" b="1" dirty="0">
+                <a:solidFill>
+                  <a:srgbClr val="E9C46A"/>
+                </a:solidFill>
+                <a:latin typeface="Calibri" pitchFamily="34" charset="0"/>
+                <a:ea typeface="Calibri" pitchFamily="34" charset="-122"/>
+                <a:cs typeface="Calibri" pitchFamily="34" charset="-120"/>
+              </a:rPr>
+              <a:t>Real-World Sequences</a:t>
+            </a:r>
+            <a:endParaRPr lang="en-US" sz="1600" dirty="0"/>
+          </a:p>
+        </p:txBody>
+      </p:sp>
+      <p:sp>
+        <p:nvSpPr>
+          <p:cNvPr id="12" name="Text 10"/>
+          <p:cNvSpPr/>
+          <p:nvPr/>
+        </p:nvSpPr>
+        <p:spPr>
+          <a:xfrm>
+            <a:off x="4937760" y="1691640"/>
+            <a:ext cx="3566160" cy="2743200"/>
+          </a:xfrm>
+          <a:prstGeom prst="rect">
+            <a:avLst/>
+          </a:prstGeom>
+          <a:noFill/>
+          <a:ln/>
+        </p:spPr>
+        <p:txBody>
+          <a:bodyPr wrap="square" rtlCol="0" anchor="ctr"/>
+          <a:lstStyle/>
+          <a:p>
+            <a:pPr marL="342900" indent="-342900">
+              <a:spcAft>
+                <a:spcPts val="600"/>
+              </a:spcAft>
+              <a:buSzPct val="100000"/>
+              <a:buChar char="•"/>
+            </a:pPr>
+            <a:r>
+              <a:rPr lang="en-US" sz="1400" dirty="0">
+                <a:solidFill>
+                  <a:srgbClr val="3D3A36"/>
+                </a:solidFill>
+                <a:latin typeface="Calibri" pitchFamily="34" charset="0"/>
+                <a:ea typeface="Calibri" pitchFamily="34" charset="-122"/>
+                <a:cs typeface="Calibri" pitchFamily="34" charset="-120"/>
+              </a:rPr>
+              <a:t>Seoul subway: T = 1250 + 100n</a:t>
+            </a:r>
+            <a:endParaRPr lang="en-US" sz="1400" dirty="0"/>
+          </a:p>
+          <a:p>
+            <a:pPr marL="342900" indent="-342900">
+              <a:spcAft>
+                <a:spcPts val="600"/>
+              </a:spcAft>
+              <a:buSzPct val="100000"/>
+              <a:buChar char="•"/>
+            </a:pPr>
+            <a:r>
+              <a:rPr lang="en-US" sz="1400" dirty="0">
+                <a:solidFill>
+                  <a:srgbClr val="3D3A36"/>
+                </a:solidFill>
+                <a:latin typeface="Calibri" pitchFamily="34" charset="0"/>
+                <a:ea typeface="Calibri" pitchFamily="34" charset="-122"/>
+                <a:cs typeface="Calibri" pitchFamily="34" charset="-120"/>
+              </a:rPr>
+              <a:t>Nanjing taxi: T = 11 + 2.4(n−3)</a:t>
+            </a:r>
+            <a:endParaRPr lang="en-US" sz="1400" dirty="0"/>
+          </a:p>
+          <a:p>
+            <a:pPr marL="342900" indent="-342900">
+              <a:spcAft>
+                <a:spcPts val="600"/>
+              </a:spcAft>
+              <a:buSzPct val="100000"/>
+              <a:buChar char="•"/>
+            </a:pPr>
+            <a:r>
+              <a:rPr lang="en-US" sz="1400" dirty="0">
+                <a:solidFill>
+                  <a:srgbClr val="3D3A36"/>
+                </a:solidFill>
+                <a:latin typeface="Calibri" pitchFamily="34" charset="0"/>
+                <a:ea typeface="Calibri" pitchFamily="34" charset="-122"/>
+                <a:cs typeface="Calibri" pitchFamily="34" charset="-120"/>
+              </a:rPr>
+              <a:t>German pool entry: €3.50 + €1.50 per hour</a:t>
+            </a:r>
+            <a:endParaRPr lang="en-US" sz="1400" dirty="0"/>
+          </a:p>
+        </p:txBody>
+      </p:sp>
+    </p:spTree>
+  </p:cSld>
+  <p:clrMapOvr>
+    <a:masterClrMapping/>
+  </p:clrMapOvr>
+</p:sld>
+</file>
+
+<file path=ppt/slides/slide7.xml><?xml version="1.0" encoding="utf-8"?>
+<p:sld xmlns:a="http://schemas.openxmlformats.org/drawingml/2006/main" xmlns:r="http://schemas.openxmlformats.org/officeDocument/2006/relationships" xmlns:p="http://schemas.openxmlformats.org/presentationml/2006/main">
+  <p:cSld name="Slide 7">
+    <p:bg>
+      <p:bgPr>
+        <a:solidFill>
+          <a:srgbClr val="FAF8F5"/>
+        </a:solidFill>
+      </p:bgPr>
+    </p:bg>
+    <p:spTree>
+      <p:nvGrpSpPr>
+        <p:cNvPr id="1" name=""/>
+        <p:cNvGrpSpPr/>
+        <p:nvPr/>
+      </p:nvGrpSpPr>
+      <p:grpSpPr>
+        <a:xfrm>
+          <a:off x="0" y="0"/>
+          <a:ext cx="0" cy="0"/>
+          <a:chOff x="0" y="0"/>
+          <a:chExt cx="0" cy="0"/>
+        </a:xfrm>
+      </p:grpSpPr>
+      <p:sp>
+        <p:nvSpPr>
+          <p:cNvPr id="2" name="Shape 0"/>
+          <p:cNvSpPr/>
+          <p:nvPr/>
+        </p:nvSpPr>
+        <p:spPr>
+          <a:xfrm>
+            <a:off x="0" y="0"/>
+            <a:ext cx="9144000" cy="822960"/>
+          </a:xfrm>
+          <a:prstGeom prst="rect">
+            <a:avLst/>
+          </a:prstGeom>
+          <a:solidFill>
+            <a:srgbClr val="FFFFFF"/>
+          </a:solidFill>
+          <a:ln/>
+        </p:spPr>
+      </p:sp>
+      <p:sp>
+        <p:nvSpPr>
+          <p:cNvPr id="3" name="Shape 1"/>
+          <p:cNvSpPr/>
+          <p:nvPr/>
+        </p:nvSpPr>
+        <p:spPr>
+          <a:xfrm>
+            <a:off x="0" y="795528"/>
+            <a:ext cx="9144000" cy="27432"/>
+          </a:xfrm>
+          <a:prstGeom prst="rect">
+            <a:avLst/>
+          </a:prstGeom>
+          <a:solidFill>
+            <a:srgbClr val="2A9D8F"/>
+          </a:solidFill>
+          <a:ln/>
+        </p:spPr>
+      </p:sp>
+      <p:sp>
+        <p:nvSpPr>
+          <p:cNvPr id="4" name="Text 2"/>
+          <p:cNvSpPr/>
+          <p:nvPr/>
+        </p:nvSpPr>
+        <p:spPr>
+          <a:xfrm>
+            <a:off x="640080" y="91440"/>
+            <a:ext cx="7863840" cy="640080"/>
+          </a:xfrm>
+          <a:prstGeom prst="rect">
+            <a:avLst/>
+          </a:prstGeom>
+          <a:noFill/>
+          <a:ln/>
+        </p:spPr>
+        <p:txBody>
+          <a:bodyPr wrap="square" lIns="0" tIns="0" rIns="0" bIns="0" rtlCol="0" anchor="ctr"/>
+          <a:lstStyle/>
+          <a:p>
+            <a:pPr indent="0" marL="0">
+              <a:buNone/>
+            </a:pPr>
+            <a:r>
+              <a:rPr lang="en-US" sz="2200" b="1" dirty="0">
+                <a:solidFill>
+                  <a:srgbClr val="1B2A4A"/>
+                </a:solidFill>
+                <a:latin typeface="Georgia" pitchFamily="34" charset="0"/>
+                <a:ea typeface="Georgia" pitchFamily="34" charset="-122"/>
+                <a:cs typeface="Georgia" pitchFamily="34" charset="-120"/>
+              </a:rPr>
+              <a:t>Finding a Term's Position</a:t>
+            </a:r>
+            <a:endParaRPr lang="en-US" sz="2200" dirty="0"/>
+          </a:p>
+        </p:txBody>
+      </p:sp>
+      <p:sp>
+        <p:nvSpPr>
+          <p:cNvPr id="5" name="Text 3"/>
+          <p:cNvSpPr/>
+          <p:nvPr/>
+        </p:nvSpPr>
+        <p:spPr>
+          <a:xfrm>
+            <a:off x="640080" y="1005840"/>
+            <a:ext cx="7863840" cy="2926080"/>
+          </a:xfrm>
+          <a:prstGeom prst="rect">
+            <a:avLst/>
+          </a:prstGeom>
+          <a:noFill/>
+          <a:ln/>
+        </p:spPr>
+        <p:txBody>
+          <a:bodyPr wrap="square" rtlCol="0" anchor="ctr"/>
+          <a:lstStyle/>
+          <a:p>
+            <a:pPr marL="342900" indent="-342900">
+              <a:spcAft>
+                <a:spcPts val="800"/>
+              </a:spcAft>
+              <a:buSzPct val="100000"/>
+              <a:buChar char="•"/>
+            </a:pPr>
+            <a:r>
+              <a:rPr lang="en-US" sz="1600" dirty="0">
+                <a:solidFill>
+                  <a:srgbClr val="3D3A36"/>
+                </a:solidFill>
+                <a:latin typeface="Calibri" pitchFamily="34" charset="0"/>
+                <a:ea typeface="Calibri" pitchFamily="34" charset="-122"/>
+                <a:cs typeface="Calibri" pitchFamily="34" charset="-120"/>
+              </a:rPr>
+              <a:t>You can also work backwards: given a term, find n.</a:t>
+            </a:r>
+            <a:endParaRPr lang="en-US" sz="1600" dirty="0"/>
+          </a:p>
+          <a:p>
+            <a:pPr marL="342900" indent="-342900">
+              <a:spcAft>
+                <a:spcPts val="800"/>
+              </a:spcAft>
+              <a:buSzPct val="100000"/>
+              <a:buChar char="•"/>
+            </a:pPr>
+            <a:r>
+              <a:rPr lang="en-US" sz="1600" dirty="0">
+                <a:solidFill>
+                  <a:srgbClr val="3D3A36"/>
+                </a:solidFill>
+                <a:latin typeface="Calibri" pitchFamily="34" charset="0"/>
+                <a:ea typeface="Calibri" pitchFamily="34" charset="-122"/>
+                <a:cs typeface="Calibri" pitchFamily="34" charset="-120"/>
+              </a:rPr>
+              <a:t>Rule: 3n + 2. Which term equals 47?</a:t>
+            </a:r>
+            <a:endParaRPr lang="en-US" sz="1600" dirty="0"/>
+          </a:p>
+          <a:p>
+            <a:pPr marL="342900" indent="-342900">
+              <a:spcAft>
+                <a:spcPts val="800"/>
+              </a:spcAft>
+              <a:buSzPct val="100000"/>
+              <a:buChar char="•"/>
+            </a:pPr>
+            <a:r>
+              <a:rPr lang="en-US" sz="1600" dirty="0">
+                <a:solidFill>
+                  <a:srgbClr val="3D3A36"/>
+                </a:solidFill>
+                <a:latin typeface="Calibri" pitchFamily="34" charset="0"/>
+                <a:ea typeface="Calibri" pitchFamily="34" charset="-122"/>
+                <a:cs typeface="Calibri" pitchFamily="34" charset="-120"/>
+              </a:rPr>
+              <a:t>3n + 2 = 47 → 3n = 45 → n = 15</a:t>
+            </a:r>
+            <a:endParaRPr lang="en-US" sz="1600" dirty="0"/>
+          </a:p>
+          <a:p>
+            <a:pPr marL="342900" indent="-342900">
+              <a:spcAft>
+                <a:spcPts val="800"/>
+              </a:spcAft>
+              <a:buSzPct val="100000"/>
+              <a:buChar char="•"/>
+            </a:pPr>
+            <a:r>
+              <a:rPr lang="en-US" sz="1600" dirty="0">
+                <a:solidFill>
+                  <a:srgbClr val="3D3A36"/>
+                </a:solidFill>
+                <a:latin typeface="Calibri" pitchFamily="34" charset="0"/>
+                <a:ea typeface="Calibri" pitchFamily="34" charset="-122"/>
+                <a:cs typeface="Calibri" pitchFamily="34" charset="-120"/>
+              </a:rPr>
+              <a:t>The 15th term is 47.</a:t>
+            </a:r>
+            <a:endParaRPr lang="en-US" sz="1600" dirty="0"/>
+          </a:p>
+          <a:p>
+            <a:pPr marL="342900" indent="-342900">
+              <a:spcAft>
+                <a:spcPts val="800"/>
+              </a:spcAft>
+              <a:buSzPct val="100000"/>
+              <a:buChar char="•"/>
+            </a:pPr>
+            <a:r>
+              <a:rPr lang="en-US" sz="1600" dirty="0">
+                <a:solidFill>
+                  <a:srgbClr val="3D3A36"/>
+                </a:solidFill>
+                <a:latin typeface="Calibri" pitchFamily="34" charset="0"/>
+                <a:ea typeface="Calibri" pitchFamily="34" charset="-122"/>
+                <a:cs typeface="Calibri" pitchFamily="34" charset="-120"/>
+              </a:rPr>
+              <a:t>This uses equation-solving skills!</a:t>
+            </a:r>
+            <a:endParaRPr lang="en-US" sz="1600" dirty="0"/>
+          </a:p>
+        </p:txBody>
+      </p:sp>
+      <p:sp>
+        <p:nvSpPr>
+          <p:cNvPr id="6" name="Shape 4"/>
+          <p:cNvSpPr/>
+          <p:nvPr/>
+        </p:nvSpPr>
+        <p:spPr>
+          <a:xfrm>
+            <a:off x="640080" y="4114800"/>
+            <a:ext cx="7863840" cy="731520"/>
+          </a:xfrm>
+          <a:prstGeom prst="rect">
+            <a:avLst/>
+          </a:prstGeom>
+          <a:solidFill>
+            <a:srgbClr val="E8F5F3"/>
+          </a:solidFill>
+          <a:ln/>
+          <a:effectLst>
+            <a:outerShdw sx="100000" sy="100000" kx="0" ky="0" algn="bl" rotWithShape="0" blurRad="76200" dist="25400" dir="8100000">
+              <a:srgbClr val="000000">
+                <a:alpha val="12000"/>
+              </a:srgbClr>
+            </a:outerShdw>
+          </a:effectLst>
+        </p:spPr>
+      </p:sp>
+      <p:sp>
+        <p:nvSpPr>
+          <p:cNvPr id="7" name="Shape 5"/>
+          <p:cNvSpPr/>
+          <p:nvPr/>
+        </p:nvSpPr>
+        <p:spPr>
+          <a:xfrm>
+            <a:off x="640080" y="4114800"/>
+            <a:ext cx="64008" cy="731520"/>
+          </a:xfrm>
+          <a:prstGeom prst="rect">
+            <a:avLst/>
+          </a:prstGeom>
+          <a:solidFill>
+            <a:srgbClr val="2A9D8F"/>
+          </a:solidFill>
+          <a:ln/>
+        </p:spPr>
+      </p:sp>
+      <p:sp>
+        <p:nvSpPr>
+          <p:cNvPr id="8" name="Text 6"/>
+          <p:cNvSpPr/>
+          <p:nvPr/>
+        </p:nvSpPr>
+        <p:spPr>
+          <a:xfrm>
+            <a:off x="914400" y="4160520"/>
+            <a:ext cx="7406640" cy="640080"/>
+          </a:xfrm>
+          <a:prstGeom prst="rect">
+            <a:avLst/>
+          </a:prstGeom>
+          <a:noFill/>
+          <a:ln/>
+        </p:spPr>
+        <p:txBody>
+          <a:bodyPr wrap="square" rtlCol="0" anchor="ctr"/>
+          <a:lstStyle/>
+          <a:p>
+            <a:pPr indent="0" marL="0">
+              <a:buNone/>
+            </a:pPr>
+            <a:r>
+              <a:rPr lang="en-US" sz="1300" i="1" dirty="0">
+                <a:solidFill>
+                  <a:srgbClr val="3D3A36"/>
+                </a:solidFill>
+                <a:latin typeface="Calibri" pitchFamily="34" charset="0"/>
+                <a:ea typeface="Calibri" pitchFamily="34" charset="-122"/>
+                <a:cs typeface="Calibri" pitchFamily="34" charset="-120"/>
+              </a:rPr>
+              <a:t>Sequences and equations are deeply connected.</a:t>
+            </a:r>
+            <a:endParaRPr lang="en-US" sz="1300" dirty="0"/>
+          </a:p>
+        </p:txBody>
+      </p:sp>
+    </p:spTree>
+  </p:cSld>
+  <p:clrMapOvr>
+    <a:masterClrMapping/>
+  </p:clrMapOvr>
+</p:sld>
+</file>
+
+<file path=ppt/slides/slide8.xml><?xml version="1.0" encoding="utf-8"?>
+<p:sld xmlns:a="http://schemas.openxmlformats.org/drawingml/2006/main" xmlns:r="http://schemas.openxmlformats.org/officeDocument/2006/relationships" xmlns:p="http://schemas.openxmlformats.org/presentationml/2006/main">
+  <p:cSld name="Slide 8">
+    <p:bg>
+      <p:bgPr>
+        <a:solidFill>
+          <a:srgbClr val="FAF8F5"/>
+        </a:solidFill>
+      </p:bgPr>
+    </p:bg>
+    <p:spTree>
+      <p:nvGrpSpPr>
+        <p:cNvPr id="1" name=""/>
+        <p:cNvGrpSpPr/>
+        <p:nvPr/>
+      </p:nvGrpSpPr>
+      <p:grpSpPr>
+        <a:xfrm>
+          <a:off x="0" y="0"/>
+          <a:ext cx="0" cy="0"/>
+          <a:chOff x="0" y="0"/>
+          <a:chExt cx="0" cy="0"/>
+        </a:xfrm>
+      </p:grpSpPr>
+      <p:sp>
+        <p:nvSpPr>
+          <p:cNvPr id="2" name="Shape 0"/>
+          <p:cNvSpPr/>
+          <p:nvPr/>
+        </p:nvSpPr>
+        <p:spPr>
+          <a:xfrm>
+            <a:off x="0" y="0"/>
+            <a:ext cx="9144000" cy="822960"/>
+          </a:xfrm>
+          <a:prstGeom prst="rect">
+            <a:avLst/>
+          </a:prstGeom>
+          <a:solidFill>
+            <a:srgbClr val="FFFFFF"/>
+          </a:solidFill>
+          <a:ln/>
+        </p:spPr>
+      </p:sp>
+      <p:sp>
+        <p:nvSpPr>
+          <p:cNvPr id="3" name="Shape 1"/>
+          <p:cNvSpPr/>
+          <p:nvPr/>
+        </p:nvSpPr>
+        <p:spPr>
+          <a:xfrm>
+            <a:off x="0" y="795528"/>
+            <a:ext cx="9144000" cy="27432"/>
+          </a:xfrm>
+          <a:prstGeom prst="rect">
+            <a:avLst/>
+          </a:prstGeom>
+          <a:solidFill>
+            <a:srgbClr val="2A9D8F"/>
+          </a:solidFill>
+          <a:ln/>
+        </p:spPr>
+      </p:sp>
+      <p:sp>
+        <p:nvSpPr>
+          <p:cNvPr id="4" name="Text 2"/>
+          <p:cNvSpPr/>
+          <p:nvPr/>
+        </p:nvSpPr>
+        <p:spPr>
+          <a:xfrm>
+            <a:off x="640080" y="91440"/>
+            <a:ext cx="7863840" cy="640080"/>
+          </a:xfrm>
+          <a:prstGeom prst="rect">
+            <a:avLst/>
+          </a:prstGeom>
+          <a:noFill/>
+          <a:ln/>
+        </p:spPr>
+        <p:txBody>
+          <a:bodyPr wrap="square" lIns="0" tIns="0" rIns="0" bIns="0" rtlCol="0" anchor="ctr"/>
+          <a:lstStyle/>
+          <a:p>
+            <a:pPr indent="0" marL="0">
+              <a:buNone/>
+            </a:pPr>
+            <a:r>
+              <a:rPr lang="en-US" sz="2200" b="1" dirty="0">
+                <a:solidFill>
+                  <a:srgbClr val="1B2A4A"/>
+                </a:solidFill>
+                <a:latin typeface="Georgia" pitchFamily="34" charset="0"/>
+                <a:ea typeface="Georgia" pitchFamily="34" charset="-122"/>
+                <a:cs typeface="Georgia" pitchFamily="34" charset="-120"/>
+              </a:rPr>
+              <a:t>Recommended Videos</a:t>
+            </a:r>
+            <a:endParaRPr lang="en-US" sz="2200" dirty="0"/>
+          </a:p>
+        </p:txBody>
+      </p:sp>
+      <p:sp>
+        <p:nvSpPr>
+          <p:cNvPr id="5" name="Text 3"/>
+          <p:cNvSpPr/>
+          <p:nvPr/>
+        </p:nvSpPr>
+        <p:spPr>
+          <a:xfrm>
+            <a:off x="640080" y="868680"/>
+            <a:ext cx="7863840" cy="274320"/>
+          </a:xfrm>
+          <a:prstGeom prst="rect">
+            <a:avLst/>
+          </a:prstGeom>
+          <a:noFill/>
+          <a:ln/>
+        </p:spPr>
+        <p:txBody>
+          <a:bodyPr wrap="square" rtlCol="0" anchor="ctr"/>
+          <a:lstStyle/>
+          <a:p>
+            <a:pPr indent="0" marL="0">
+              <a:buNone/>
+            </a:pPr>
+            <a:r>
+              <a:rPr lang="en-US" sz="1200" i="1" dirty="0">
+                <a:solidFill>
+                  <a:srgbClr val="6B6660"/>
+                </a:solidFill>
+                <a:latin typeface="Calibri" pitchFamily="34" charset="0"/>
+                <a:ea typeface="Calibri" pitchFamily="34" charset="-122"/>
+                <a:cs typeface="Calibri" pitchFamily="34" charset="-120"/>
+              </a:rPr>
+              <a:t>Search these on YouTube to learn more.</a:t>
+            </a:r>
+            <a:endParaRPr lang="en-US" sz="1200" dirty="0"/>
+          </a:p>
+        </p:txBody>
+      </p:sp>
+      <p:sp>
+        <p:nvSpPr>
+          <p:cNvPr id="6" name="Shape 4"/>
+          <p:cNvSpPr/>
+          <p:nvPr/>
+        </p:nvSpPr>
+        <p:spPr>
+          <a:xfrm>
+            <a:off x="457200" y="1234440"/>
+            <a:ext cx="8229600" cy="1051560"/>
+          </a:xfrm>
+          <a:prstGeom prst="rect">
+            <a:avLst/>
+          </a:prstGeom>
+          <a:solidFill>
+            <a:srgbClr val="FFFFFF"/>
+          </a:solidFill>
+          <a:ln/>
+          <a:effectLst>
+            <a:outerShdw sx="100000" sy="100000" kx="0" ky="0" algn="bl" rotWithShape="0" blurRad="76200" dist="25400" dir="8100000">
+              <a:srgbClr val="000000">
+                <a:alpha val="12000"/>
+              </a:srgbClr>
+            </a:outerShdw>
+          </a:effectLst>
+        </p:spPr>
+      </p:sp>
+      <p:sp>
+        <p:nvSpPr>
+          <p:cNvPr id="7" name="Shape 5"/>
+          <p:cNvSpPr/>
+          <p:nvPr/>
+        </p:nvSpPr>
+        <p:spPr>
+          <a:xfrm>
+            <a:off x="457200" y="1234440"/>
+            <a:ext cx="64008" cy="1051560"/>
+          </a:xfrm>
+          <a:prstGeom prst="rect">
+            <a:avLst/>
+          </a:prstGeom>
+          <a:solidFill>
+            <a:srgbClr val="2A9D8F"/>
+          </a:solidFill>
+          <a:ln/>
+        </p:spPr>
+      </p:sp>
+      <p:sp>
+        <p:nvSpPr>
+          <p:cNvPr id="8" name="Text 6"/>
+          <p:cNvSpPr/>
+          <p:nvPr/>
+        </p:nvSpPr>
+        <p:spPr>
+          <a:xfrm>
+            <a:off x="640080" y="1325880"/>
+            <a:ext cx="457200" cy="457200"/>
+          </a:xfrm>
+          <a:prstGeom prst="rect">
+            <a:avLst/>
+          </a:prstGeom>
+          <a:noFill/>
+          <a:ln/>
+        </p:spPr>
+        <p:txBody>
+          <a:bodyPr wrap="square" rtlCol="0" anchor="ctr"/>
+          <a:lstStyle/>
+          <a:p>
+            <a:pPr algn="ctr" indent="0" marL="0">
+              <a:buNone/>
+            </a:pPr>
+            <a:r>
+              <a:rPr lang="en-US" sz="2000" dirty="0">
+                <a:solidFill>
+                  <a:srgbClr val="2A9D8F"/>
+                </a:solidFill>
+                <a:latin typeface="Calibri" pitchFamily="34" charset="0"/>
+                <a:ea typeface="Calibri" pitchFamily="34" charset="-122"/>
+                <a:cs typeface="Calibri" pitchFamily="34" charset="-120"/>
+              </a:rPr>
+              <a:t>▶</a:t>
+            </a:r>
+            <a:endParaRPr lang="en-US" sz="2000" dirty="0"/>
+          </a:p>
+        </p:txBody>
+      </p:sp>
+      <p:sp>
+        <p:nvSpPr>
+          <p:cNvPr id="9" name="Text 7"/>
+          <p:cNvSpPr/>
+          <p:nvPr/>
+        </p:nvSpPr>
+        <p:spPr>
+          <a:xfrm>
+            <a:off x="1188720" y="1307592"/>
+            <a:ext cx="7132320" cy="411480"/>
+          </a:xfrm>
+          <a:prstGeom prst="rect">
+            <a:avLst/>
+          </a:prstGeom>
+          <a:noFill/>
+          <a:ln/>
+        </p:spPr>
+        <p:txBody>
+          <a:bodyPr wrap="square" rtlCol="0" anchor="ctr"/>
+          <a:lstStyle/>
+          <a:p>
+            <a:pPr indent="0" marL="0">
+              <a:buNone/>
+            </a:pPr>
+            <a:r>
+              <a:rPr lang="en-US" sz="1400" b="1" dirty="0">
+                <a:solidFill>
+                  <a:srgbClr val="1B2A4A"/>
+                </a:solidFill>
+                <a:latin typeface="Calibri" pitchFamily="34" charset="0"/>
+                <a:ea typeface="Calibri" pitchFamily="34" charset="-122"/>
+                <a:cs typeface="Calibri" pitchFamily="34" charset="-120"/>
+              </a:rPr>
+              <a:t>Finding the nth Term of a Sequence</a:t>
+            </a:r>
+            <a:endParaRPr lang="en-US" sz="1400" dirty="0"/>
+          </a:p>
+        </p:txBody>
+      </p:sp>
+      <p:sp>
+        <p:nvSpPr>
+          <p:cNvPr id="10" name="Text 8"/>
+          <p:cNvSpPr/>
+          <p:nvPr/>
+        </p:nvSpPr>
+        <p:spPr>
+          <a:xfrm>
+            <a:off x="1188720" y="1691640"/>
+            <a:ext cx="7132320" cy="320040"/>
+          </a:xfrm>
+          <a:prstGeom prst="rect">
+            <a:avLst/>
+          </a:prstGeom>
+          <a:noFill/>
+          <a:ln/>
+        </p:spPr>
+        <p:txBody>
+          <a:bodyPr wrap="square" rtlCol="0" anchor="ctr"/>
+          <a:lstStyle/>
+          <a:p>
+            <a:pPr indent="0" marL="0">
+              <a:buNone/>
+            </a:pPr>
+            <a:r>
+              <a:rPr lang="en-US" sz="1100" dirty="0">
+                <a:solidFill>
+                  <a:srgbClr val="6B6660"/>
+                </a:solidFill>
+                <a:latin typeface="Calibri" pitchFamily="34" charset="0"/>
+                <a:ea typeface="Calibri" pitchFamily="34" charset="-122"/>
+                <a:cs typeface="Calibri" pitchFamily="34" charset="-120"/>
+              </a:rPr>
+              <a:t>Corbettmaths  •  6 min</a:t>
+            </a:r>
+            <a:endParaRPr lang="en-US" sz="1100" dirty="0"/>
+          </a:p>
+        </p:txBody>
+      </p:sp>
+      <p:sp>
+        <p:nvSpPr>
+          <p:cNvPr id="11" name="Shape 9"/>
+          <p:cNvSpPr/>
+          <p:nvPr/>
+        </p:nvSpPr>
+        <p:spPr>
+          <a:xfrm>
+            <a:off x="457200" y="2423160"/>
+            <a:ext cx="8229600" cy="1051560"/>
+          </a:xfrm>
+          <a:prstGeom prst="rect">
+            <a:avLst/>
+          </a:prstGeom>
+          <a:solidFill>
+            <a:srgbClr val="FFFFFF"/>
+          </a:solidFill>
+          <a:ln/>
+          <a:effectLst>
+            <a:outerShdw sx="100000" sy="100000" kx="0" ky="0" algn="bl" rotWithShape="0" blurRad="76200" dist="25400" dir="8100000">
+              <a:srgbClr val="000000">
+                <a:alpha val="12000"/>
+              </a:srgbClr>
+            </a:outerShdw>
+          </a:effectLst>
+        </p:spPr>
+      </p:sp>
+      <p:sp>
+        <p:nvSpPr>
+          <p:cNvPr id="12" name="Shape 10"/>
+          <p:cNvSpPr/>
+          <p:nvPr/>
+        </p:nvSpPr>
+        <p:spPr>
+          <a:xfrm>
+            <a:off x="457200" y="2423160"/>
+            <a:ext cx="64008" cy="1051560"/>
+          </a:xfrm>
+          <a:prstGeom prst="rect">
+            <a:avLst/>
+          </a:prstGeom>
+          <a:solidFill>
+            <a:srgbClr val="2A9D8F"/>
+          </a:solidFill>
+          <a:ln/>
+        </p:spPr>
+      </p:sp>
+      <p:sp>
+        <p:nvSpPr>
+          <p:cNvPr id="13" name="Text 11"/>
+          <p:cNvSpPr/>
+          <p:nvPr/>
+        </p:nvSpPr>
+        <p:spPr>
+          <a:xfrm>
+            <a:off x="640080" y="2514600"/>
+            <a:ext cx="457200" cy="457200"/>
+          </a:xfrm>
+          <a:prstGeom prst="rect">
+            <a:avLst/>
+          </a:prstGeom>
+          <a:noFill/>
+          <a:ln/>
+        </p:spPr>
+        <p:txBody>
+          <a:bodyPr wrap="square" rtlCol="0" anchor="ctr"/>
+          <a:lstStyle/>
+          <a:p>
+            <a:pPr algn="ctr" indent="0" marL="0">
+              <a:buNone/>
+            </a:pPr>
+            <a:r>
+              <a:rPr lang="en-US" sz="2000" dirty="0">
+                <a:solidFill>
+                  <a:srgbClr val="2A9D8F"/>
+                </a:solidFill>
+                <a:latin typeface="Calibri" pitchFamily="34" charset="0"/>
+                <a:ea typeface="Calibri" pitchFamily="34" charset="-122"/>
+                <a:cs typeface="Calibri" pitchFamily="34" charset="-120"/>
+              </a:rPr>
+              <a:t>▶</a:t>
+            </a:r>
+            <a:endParaRPr lang="en-US" sz="2000" dirty="0"/>
+          </a:p>
+        </p:txBody>
+      </p:sp>
+      <p:sp>
+        <p:nvSpPr>
+          <p:cNvPr id="14" name="Text 12"/>
+          <p:cNvSpPr/>
+          <p:nvPr/>
+        </p:nvSpPr>
+        <p:spPr>
+          <a:xfrm>
+            <a:off x="1188720" y="2496312"/>
+            <a:ext cx="7132320" cy="411480"/>
+          </a:xfrm>
+          <a:prstGeom prst="rect">
+            <a:avLst/>
+          </a:prstGeom>
+          <a:noFill/>
+          <a:ln/>
+        </p:spPr>
+        <p:txBody>
+          <a:bodyPr wrap="square" rtlCol="0" anchor="ctr"/>
+          <a:lstStyle/>
+          <a:p>
+            <a:pPr indent="0" marL="0">
+              <a:buNone/>
+            </a:pPr>
+            <a:r>
+              <a:rPr lang="en-US" sz="1400" b="1" dirty="0">
+                <a:solidFill>
+                  <a:srgbClr val="1B2A4A"/>
+                </a:solidFill>
+                <a:latin typeface="Calibri" pitchFamily="34" charset="0"/>
+                <a:ea typeface="Calibri" pitchFamily="34" charset="-122"/>
+                <a:cs typeface="Calibri" pitchFamily="34" charset="-120"/>
+              </a:rPr>
+              <a:t>Sequences and Patterns</a:t>
+            </a:r>
+            <a:endParaRPr lang="en-US" sz="1400" dirty="0"/>
+          </a:p>
+        </p:txBody>
+      </p:sp>
+      <p:sp>
+        <p:nvSpPr>
+          <p:cNvPr id="15" name="Text 13"/>
+          <p:cNvSpPr/>
+          <p:nvPr/>
+        </p:nvSpPr>
+        <p:spPr>
+          <a:xfrm>
+            <a:off x="1188720" y="2880360"/>
+            <a:ext cx="7132320" cy="320040"/>
+          </a:xfrm>
+          <a:prstGeom prst="rect">
+            <a:avLst/>
+          </a:prstGeom>
+          <a:noFill/>
+          <a:ln/>
+        </p:spPr>
+        <p:txBody>
+          <a:bodyPr wrap="square" rtlCol="0" anchor="ctr"/>
+          <a:lstStyle/>
+          <a:p>
+            <a:pPr indent="0" marL="0">
+              <a:buNone/>
+            </a:pPr>
+            <a:r>
+              <a:rPr lang="en-US" sz="1100" dirty="0">
+                <a:solidFill>
+                  <a:srgbClr val="6B6660"/>
+                </a:solidFill>
+                <a:latin typeface="Calibri" pitchFamily="34" charset="0"/>
+                <a:ea typeface="Calibri" pitchFamily="34" charset="-122"/>
+                <a:cs typeface="Calibri" pitchFamily="34" charset="-120"/>
+              </a:rPr>
+              <a:t>Math Antics  •  8 min</a:t>
+            </a:r>
+            <a:endParaRPr lang="en-US" sz="1100" dirty="0"/>
+          </a:p>
+        </p:txBody>
+      </p:sp>
+      <p:sp>
+        <p:nvSpPr>
+          <p:cNvPr id="16" name="Shape 14"/>
+          <p:cNvSpPr/>
+          <p:nvPr/>
+        </p:nvSpPr>
+        <p:spPr>
+          <a:xfrm>
+            <a:off x="457200" y="3611880"/>
+            <a:ext cx="8229600" cy="1051560"/>
+          </a:xfrm>
+          <a:prstGeom prst="rect">
+            <a:avLst/>
+          </a:prstGeom>
+          <a:solidFill>
+            <a:srgbClr val="FFFFFF"/>
+          </a:solidFill>
+          <a:ln/>
+          <a:effectLst>
+            <a:outerShdw sx="100000" sy="100000" kx="0" ky="0" algn="bl" rotWithShape="0" blurRad="76200" dist="25400" dir="8100000">
+              <a:srgbClr val="000000">
+                <a:alpha val="12000"/>
+              </a:srgbClr>
+            </a:outerShdw>
+          </a:effectLst>
+        </p:spPr>
+      </p:sp>
+      <p:sp>
+        <p:nvSpPr>
+          <p:cNvPr id="17" name="Shape 15"/>
+          <p:cNvSpPr/>
+          <p:nvPr/>
+        </p:nvSpPr>
+        <p:spPr>
+          <a:xfrm>
+            <a:off x="457200" y="3611880"/>
+            <a:ext cx="64008" cy="1051560"/>
+          </a:xfrm>
+          <a:prstGeom prst="rect">
+            <a:avLst/>
+          </a:prstGeom>
+          <a:solidFill>
+            <a:srgbClr val="2A9D8F"/>
+          </a:solidFill>
+          <a:ln/>
+        </p:spPr>
+      </p:sp>
+      <p:sp>
+        <p:nvSpPr>
+          <p:cNvPr id="18" name="Text 16"/>
+          <p:cNvSpPr/>
+          <p:nvPr/>
+        </p:nvSpPr>
+        <p:spPr>
+          <a:xfrm>
+            <a:off x="640080" y="3703320"/>
+            <a:ext cx="457200" cy="457200"/>
+          </a:xfrm>
+          <a:prstGeom prst="rect">
+            <a:avLst/>
+          </a:prstGeom>
+          <a:noFill/>
+          <a:ln/>
+        </p:spPr>
+        <p:txBody>
+          <a:bodyPr wrap="square" rtlCol="0" anchor="ctr"/>
+          <a:lstStyle/>
+          <a:p>
+            <a:pPr algn="ctr" indent="0" marL="0">
+              <a:buNone/>
+            </a:pPr>
+            <a:r>
+              <a:rPr lang="en-US" sz="2000" dirty="0">
+                <a:solidFill>
+                  <a:srgbClr val="2A9D8F"/>
+                </a:solidFill>
+                <a:latin typeface="Calibri" pitchFamily="34" charset="0"/>
+                <a:ea typeface="Calibri" pitchFamily="34" charset="-122"/>
+                <a:cs typeface="Calibri" pitchFamily="34" charset="-120"/>
+              </a:rPr>
+              <a:t>▶</a:t>
+            </a:r>
+            <a:endParaRPr lang="en-US" sz="2000" dirty="0"/>
+          </a:p>
+        </p:txBody>
+      </p:sp>
+      <p:sp>
+        <p:nvSpPr>
+          <p:cNvPr id="19" name="Text 17"/>
+          <p:cNvSpPr/>
+          <p:nvPr/>
+        </p:nvSpPr>
+        <p:spPr>
+          <a:xfrm>
+            <a:off x="1188720" y="3685032"/>
+            <a:ext cx="7132320" cy="411480"/>
+          </a:xfrm>
+          <a:prstGeom prst="rect">
+            <a:avLst/>
+          </a:prstGeom>
+          <a:noFill/>
+          <a:ln/>
+        </p:spPr>
+        <p:txBody>
+          <a:bodyPr wrap="square" rtlCol="0" anchor="ctr"/>
+          <a:lstStyle/>
+          <a:p>
+            <a:pPr indent="0" marL="0">
+              <a:buNone/>
+            </a:pPr>
+            <a:r>
+              <a:rPr lang="en-US" sz="1400" b="1" dirty="0">
+                <a:solidFill>
+                  <a:srgbClr val="1B2A4A"/>
+                </a:solidFill>
+                <a:latin typeface="Calibri" pitchFamily="34" charset="0"/>
+                <a:ea typeface="Calibri" pitchFamily="34" charset="-122"/>
+                <a:cs typeface="Calibri" pitchFamily="34" charset="-120"/>
+              </a:rPr>
+              <a:t>Arithmetic Sequences</a:t>
+            </a:r>
+            <a:endParaRPr lang="en-US" sz="1400" dirty="0"/>
+          </a:p>
+        </p:txBody>
+      </p:sp>
+      <p:sp>
+        <p:nvSpPr>
+          <p:cNvPr id="20" name="Text 18"/>
+          <p:cNvSpPr/>
+          <p:nvPr/>
+        </p:nvSpPr>
+        <p:spPr>
+          <a:xfrm>
+            <a:off x="1188720" y="4069080"/>
+            <a:ext cx="7132320" cy="320040"/>
+          </a:xfrm>
+          <a:prstGeom prst="rect">
+            <a:avLst/>
+          </a:prstGeom>
+          <a:noFill/>
+          <a:ln/>
+        </p:spPr>
+        <p:txBody>
+          <a:bodyPr wrap="square" rtlCol="0" anchor="ctr"/>
+          <a:lstStyle/>
+          <a:p>
+            <a:pPr indent="0" marL="0">
+              <a:buNone/>
+            </a:pPr>
+            <a:r>
+              <a:rPr lang="en-US" sz="1100" dirty="0">
+                <a:solidFill>
+                  <a:srgbClr val="6B6660"/>
+                </a:solidFill>
+                <a:latin typeface="Calibri" pitchFamily="34" charset="0"/>
+                <a:ea typeface="Calibri" pitchFamily="34" charset="-122"/>
+                <a:cs typeface="Calibri" pitchFamily="34" charset="-120"/>
+              </a:rPr>
+              <a:t>Cognito  •  5 min</a:t>
+            </a:r>
+            <a:endParaRPr lang="en-US" sz="1100" dirty="0"/>
+          </a:p>
+        </p:txBody>
+      </p:sp>
+    </p:spTree>
+  </p:cSld>
+  <p:clrMapOvr>
+    <a:masterClrMapping/>
+  </p:clrMapOvr>
+</p:sld>
+</file>
+
+<file path=ppt/slides/slide9.xml><?xml version="1.0" encoding="utf-8"?>
+<p:sld xmlns:a="http://schemas.openxmlformats.org/drawingml/2006/main" xmlns:r="http://schemas.openxmlformats.org/officeDocument/2006/relationships" xmlns:p="http://schemas.openxmlformats.org/presentationml/2006/main">
+  <p:cSld name="Slide 9">
+    <p:spTree>
+      <p:nvGrpSpPr>
+        <p:cNvPr id="1" name=""/>
+        <p:cNvGrpSpPr/>
+        <p:nvPr/>
+      </p:nvGrpSpPr>
+      <p:grpSpPr>
+        <a:xfrm>
+          <a:off x="0" y="0"/>
+          <a:ext cx="0" cy="0"/>
+          <a:chOff x="0" y="0"/>
+          <a:chExt cx="0" cy="0"/>
+        </a:xfrm>
+      </p:grpSpPr>
+      <p:sp>
+        <p:nvSpPr>
+          <p:cNvPr id="2" name="Shape 0"/>
+          <p:cNvSpPr/>
+          <p:nvPr/>
+        </p:nvSpPr>
+        <p:spPr>
+          <a:xfrm>
+            <a:off x="0" y="0"/>
+            <a:ext cx="9144000" cy="5143500"/>
+          </a:xfrm>
+          <a:prstGeom prst="rect">
+            <a:avLst/>
+          </a:prstGeom>
+          <a:solidFill>
+            <a:srgbClr val="1B2A4A"/>
+          </a:solidFill>
+          <a:ln/>
+        </p:spPr>
+      </p:sp>
+      <p:sp>
+        <p:nvSpPr>
+          <p:cNvPr id="3" name="Shape 1"/>
+          <p:cNvSpPr/>
+          <p:nvPr/>
+        </p:nvSpPr>
+        <p:spPr>
+          <a:xfrm>
+            <a:off x="0" y="4777740"/>
+            <a:ext cx="9144000" cy="365760"/>
+          </a:xfrm>
+          <a:prstGeom prst="rect">
+            <a:avLst/>
+          </a:prstGeom>
+          <a:solidFill>
+            <a:srgbClr val="2A9D8F"/>
+          </a:solidFill>
+          <a:ln/>
+        </p:spPr>
+      </p:sp>
+      <p:sp>
+        <p:nvSpPr>
+          <p:cNvPr id="4" name="Text 2"/>
+          <p:cNvSpPr/>
+          <p:nvPr/>
+        </p:nvSpPr>
+        <p:spPr>
+          <a:xfrm>
+            <a:off x="731520" y="1371600"/>
+            <a:ext cx="7680960" cy="914400"/>
+          </a:xfrm>
+          <a:prstGeom prst="rect">
+            <a:avLst/>
+          </a:prstGeom>
+          <a:noFill/>
+          <a:ln/>
+        </p:spPr>
+        <p:txBody>
+          <a:bodyPr wrap="square" rtlCol="0" anchor="ctr"/>
+          <a:lstStyle/>
+          <a:p>
+            <a:pPr algn="ctr" indent="0" marL="0">
+              <a:buNone/>
+            </a:pPr>
+            <a:r>
+              <a:rPr lang="en-US" sz="3600" b="1" dirty="0">
                 <a:solidFill>
                   <a:srgbClr val="FFFFFF"/>
                 </a:solidFill>
@@ -2437,149 +5946,22 @@
                 <a:ea typeface="Georgia" pitchFamily="34" charset="-122"/>
                 <a:cs typeface="Georgia" pitchFamily="34" charset="-120"/>
               </a:rPr>
-              <a:t>Key Takeaways</a:t>
-            </a:r>
-            <a:endParaRPr lang="en-US" sz="3200" dirty="0"/>
+              <a:t>Review &amp; Practise</a:t>
+            </a:r>
+            <a:endParaRPr lang="en-US" sz="3600" dirty="0"/>
           </a:p>
         </p:txBody>
       </p:sp>
       <p:sp>
         <p:nvSpPr>
-          <p:cNvPr id="4" name="Text 2"/>
-          <p:cNvSpPr/>
-          <p:nvPr/>
-        </p:nvSpPr>
-        <p:spPr>
-          <a:xfrm>
-            <a:off x="731520" y="1463040"/>
-            <a:ext cx="7772400" cy="3200400"/>
-          </a:xfrm>
-          <a:prstGeom prst="rect">
-            <a:avLst/>
-          </a:prstGeom>
-          <a:noFill/>
-          <a:ln/>
-        </p:spPr>
-        <p:txBody>
-          <a:bodyPr wrap="square" rtlCol="0" anchor="t"/>
-          <a:lstStyle/>
-          <a:p>
-            <a:pPr marL="342900" indent="-342900">
-              <a:spcAft>
-                <a:spcPts val="1000"/>
-              </a:spcAft>
-              <a:buSzPct val="100000"/>
-              <a:buChar char="•"/>
-            </a:pPr>
-            <a:r>
-              <a:rPr lang="en-US" sz="1500" dirty="0">
-                <a:solidFill>
-                  <a:srgbClr val="CADCFC"/>
-                </a:solidFill>
-                <a:latin typeface="Calibri" pitchFamily="34" charset="0"/>
-                <a:ea typeface="Calibri" pitchFamily="34" charset="-122"/>
-                <a:cs typeface="Calibri" pitchFamily="34" charset="-120"/>
-              </a:rPr>
-              <a:t>Sequence = list of numbers following a pattern</a:t>
-            </a:r>
-            <a:endParaRPr lang="en-US" sz="1500" dirty="0"/>
-          </a:p>
-          <a:p>
-            <a:pPr marL="342900" indent="-342900">
-              <a:spcAft>
-                <a:spcPts val="1000"/>
-              </a:spcAft>
-              <a:buSzPct val="100000"/>
-              <a:buChar char="•"/>
-            </a:pPr>
-            <a:r>
-              <a:rPr lang="en-US" sz="1500" dirty="0">
-                <a:solidFill>
-                  <a:srgbClr val="CADCFC"/>
-                </a:solidFill>
-                <a:latin typeface="Calibri" pitchFamily="34" charset="0"/>
-                <a:ea typeface="Calibri" pitchFamily="34" charset="-122"/>
-                <a:cs typeface="Calibri" pitchFamily="34" charset="-120"/>
-              </a:rPr>
-              <a:t>Common difference = what you add each time</a:t>
-            </a:r>
-            <a:endParaRPr lang="en-US" sz="1500" dirty="0"/>
-          </a:p>
-          <a:p>
-            <a:pPr marL="342900" indent="-342900">
-              <a:spcAft>
-                <a:spcPts val="1000"/>
-              </a:spcAft>
-              <a:buSzPct val="100000"/>
-              <a:buChar char="•"/>
-            </a:pPr>
-            <a:r>
-              <a:rPr lang="en-US" sz="1500" dirty="0">
-                <a:solidFill>
-                  <a:srgbClr val="CADCFC"/>
-                </a:solidFill>
-                <a:latin typeface="Calibri" pitchFamily="34" charset="0"/>
-                <a:ea typeface="Calibri" pitchFamily="34" charset="-122"/>
-                <a:cs typeface="Calibri" pitchFamily="34" charset="-120"/>
-              </a:rPr>
-              <a:t>nth term formula: dn + c, where d = common difference</a:t>
-            </a:r>
-            <a:endParaRPr lang="en-US" sz="1500" dirty="0"/>
-          </a:p>
-          <a:p>
-            <a:pPr marL="342900" indent="-342900">
-              <a:spcAft>
-                <a:spcPts val="1000"/>
-              </a:spcAft>
-              <a:buSzPct val="100000"/>
-              <a:buChar char="•"/>
-            </a:pPr>
-            <a:r>
-              <a:rPr lang="en-US" sz="1500" dirty="0">
-                <a:solidFill>
-                  <a:srgbClr val="CADCFC"/>
-                </a:solidFill>
-                <a:latin typeface="Calibri" pitchFamily="34" charset="0"/>
-                <a:ea typeface="Calibri" pitchFamily="34" charset="-122"/>
-                <a:cs typeface="Calibri" pitchFamily="34" charset="-120"/>
-              </a:rPr>
-              <a:t>Find c: first term minus d</a:t>
-            </a:r>
-            <a:endParaRPr lang="en-US" sz="1500" dirty="0"/>
-          </a:p>
-          <a:p>
-            <a:pPr marL="342900" indent="-342900">
-              <a:spcAft>
-                <a:spcPts val="1000"/>
-              </a:spcAft>
-              <a:buSzPct val="100000"/>
-              <a:buChar char="•"/>
-            </a:pPr>
-            <a:r>
-              <a:rPr lang="en-US" sz="1500" dirty="0">
-                <a:solidFill>
-                  <a:srgbClr val="CADCFC"/>
-                </a:solidFill>
-                <a:latin typeface="Calibri" pitchFamily="34" charset="0"/>
-                <a:ea typeface="Calibri" pitchFamily="34" charset="-122"/>
-                <a:cs typeface="Calibri" pitchFamily="34" charset="-120"/>
-              </a:rPr>
-              <a:t>Use the formula to find ANY term in the sequence</a:t>
-            </a:r>
-            <a:endParaRPr lang="en-US" sz="1500" dirty="0"/>
-          </a:p>
-        </p:txBody>
-      </p:sp>
-      <p:sp>
-        <p:nvSpPr>
           <p:cNvPr id="5" name="Text 3"/>
           <p:cNvSpPr/>
           <p:nvPr/>
         </p:nvSpPr>
         <p:spPr>
           <a:xfrm>
-            <a:off x="731520" y="4572000"/>
-            <a:ext cx="7772400" cy="365760"/>
+            <a:off x="731520" y="2560320"/>
+            <a:ext cx="7680960" cy="548640"/>
           </a:xfrm>
           <a:prstGeom prst="rect">
             <a:avLst/>
@@ -2591,13 +5973,13 @@
           <a:bodyPr wrap="square" rtlCol="0" anchor="ctr"/>
           <a:lstStyle/>
           <a:p>
-            <a:pPr indent="0" marL="0">
+            <a:pPr algn="ctr" indent="0" marL="0">
               <a:buNone/>
             </a:pPr>
             <a:r>
-              <a:rPr lang="en-US" sz="1100" dirty="0">
+              <a:rPr lang="en-US" sz="2000" dirty="0">
                 <a:solidFill>
-                  <a:srgbClr val="E9C46A"/>
+                  <a:srgbClr val="2A9D8F"/>
                 </a:solidFill>
                 <a:latin typeface="Calibri" pitchFamily="34" charset="0"/>
                 <a:ea typeface="Calibri" pitchFamily="34" charset="-122"/>
@@ -2605,7 +5987,7 @@
               </a:rPr>
               <a:t>mrzocchi.com</a:t>
             </a:r>
-            <a:endParaRPr lang="en-US" sz="1100" dirty="0"/>
+            <a:endParaRPr lang="en-US" sz="2000" dirty="0"/>
           </a:p>
         </p:txBody>
       </p:sp>
